--- a/_implementation-notes/evening-series/FotH Evening Session 20 Slides DRAFT v1.pptx
+++ b/_implementation-notes/evening-series/FotH Evening Session 20 Slides DRAFT v1.pptx
@@ -10,6 +10,7 @@
   <p:sldIdLst>
     <p:sldId id="256" r:id="rId2"/>
     <p:sldId id="319" r:id="rId245"/>
+    <p:sldId id="544" r:id="rId22"/>
     <p:sldId id="320" r:id="rId246"/>
     <p:sldId id="493" r:id="rId247"/>
     <p:sldId id="494" r:id="rId248"/>
@@ -18,7 +19,8 @@
     <p:sldId id="497" r:id="rId251"/>
     <p:sldId id="498" r:id="rId252"/>
     <p:sldId id="499" r:id="rId253"/>
-    <p:sldId id="543" r:id="rId254"/>
+    <p:sldId id="545" r:id="rId23"/>
+    <p:sldId id="546" r:id="rId24"/>
     <p:sldId id="500" r:id="rId255"/>
     <p:sldId id="501" r:id="rId256"/>
   </p:sldIdLst>
@@ -750,6 +752,214 @@
 </p:notes>
 </file>
 
+<file path=ppt/notesSlides/notesSlide14.xml><?xml version="1.0" encoding="utf-8"?>
+<p:notes xmlns:a="http://schemas.openxmlformats.org/drawingml/2006/main" xmlns:p="http://schemas.openxmlformats.org/presentationml/2006/main" xmlns:r="http://schemas.openxmlformats.org/officeDocument/2006/relationships">
+  <p:cSld>
+    <p:spTree>
+      <p:nvGrpSpPr>
+        <p:cNvPr id="1" name=""/>
+        <p:cNvGrpSpPr/>
+        <p:nvPr/>
+      </p:nvGrpSpPr>
+      <p:grpSpPr>
+        <a:xfrm>
+          <a:off x="0" y="0"/>
+          <a:ext cx="0" cy="0"/>
+          <a:chOff x="0" y="0"/>
+          <a:chExt cx="0" cy="0"/>
+        </a:xfrm>
+      </p:grpSpPr>
+      <p:sp>
+        <p:nvSpPr>
+          <p:cNvPr id="2" name="Notes Placeholder 1"/>
+          <p:cNvSpPr>
+            <a:spLocks noGrp="1"/>
+          </p:cNvSpPr>
+          <p:nvPr>
+            <p:ph type="body" idx="1"/>
+          </p:nvPr>
+        </p:nvSpPr>
+        <p:spPr/>
+        <p:txBody>
+          <a:bodyPr/>
+          <a:lstStyle/>
+          <a:p>
+            <a:r>
+              <a:t>S20 · WELCOME · LEAD: CONTAINER HOLDER · GROUNDING — every session opens on this map</a:t>
+            </a:r>
+          </a:p>
+          <a:p>
+            <a:r>
+              <a:t>BEATS:</a:t>
+            </a:r>
+          </a:p>
+          <a:p>
+            <a:r>
+              <a:t>1. Locate tonight on the map, plainly: Session 20 walks the whole map — all four Connects, consolidated for the road. Each connection makes the next one real (Matt. 22:37–40).</a:t>
+            </a:r>
+          </a:p>
+          <a:p>
+            <a:r>
+              <a:t>2. The four boxes are one journey — each connection makes the next one real — rooted in the two great commandments: love God, love neighbor (Matt 22:37–40).</a:t>
+            </a:r>
+          </a:p>
+          <a:p>
+            <a:r>
+              <a:t>3. This is also the 'where we are on the map' minute the welcome owes any newcomer.</a:t>
+            </a:r>
+          </a:p>
+          <a:p>
+            <a:r>
+              <a:t>CUES: Two minutes at most; then tonight's road.</a:t>
+            </a:r>
+          </a:p>
+        </p:txBody>
+      </p:sp>
+    </p:spTree>
+  </p:cSld>
+  <p:clrMapOvr>
+    <a:masterClrMapping/>
+  </p:clrMapOvr>
+</p:notes>
+</file>
+
+<file path=ppt/notesSlides/notesSlide15.xml><?xml version="1.0" encoding="utf-8"?>
+<p:notes xmlns:a="http://schemas.openxmlformats.org/drawingml/2006/main" xmlns:p="http://schemas.openxmlformats.org/presentationml/2006/main" xmlns:r="http://schemas.openxmlformats.org/officeDocument/2006/relationships">
+  <p:cSld>
+    <p:spTree>
+      <p:nvGrpSpPr>
+        <p:cNvPr id="1" name=""/>
+        <p:cNvGrpSpPr/>
+        <p:nvPr/>
+      </p:nvGrpSpPr>
+      <p:grpSpPr>
+        <a:xfrm>
+          <a:off x="0" y="0"/>
+          <a:ext cx="0" cy="0"/>
+          <a:chOff x="0" y="0"/>
+          <a:chExt cx="0" cy="0"/>
+        </a:xfrm>
+      </p:grpSpPr>
+      <p:sp>
+        <p:nvSpPr>
+          <p:cNvPr id="2" name="Notes Placeholder 1"/>
+          <p:cNvSpPr>
+            <a:spLocks noGrp="1"/>
+          </p:cNvSpPr>
+          <p:nvPr>
+            <p:ph type="body" idx="1"/>
+          </p:nvPr>
+        </p:nvSpPr>
+        <p:spPr/>
+        <p:txBody>
+          <a:bodyPr/>
+          <a:lstStyle/>
+          <a:p>
+            <a:r>
+              <a:t>S20 · COMMISSIONING · LEAD: CONTENT PRESENTER</a:t>
+            </a:r>
+          </a:p>
+          <a:p>
+            <a:r>
+              <a:t>BEATS:</a:t>
+            </a:r>
+          </a:p>
+          <a:p>
+            <a:r>
+              <a:t>1. The sheet on the screen is the sheet in their hands — walk it, don't read it.</a:t>
+            </a:r>
+          </a:p>
+          <a:p>
+            <a:r>
+              <a:t>2. The standing rhythm first: the morning question, the evening journal line — one box per day on the week-grids.</a:t>
+            </a:r>
+          </a:p>
+          <a:p>
+            <a:r>
+              <a:t>3. A missed box is never a failure — it is an invitation to return.</a:t>
+            </a:r>
+          </a:p>
+          <a:p>
+            <a:r>
+              <a:t>CUES: The four parts are the next slide.</a:t>
+            </a:r>
+          </a:p>
+        </p:txBody>
+      </p:sp>
+    </p:spTree>
+  </p:cSld>
+  <p:clrMapOvr>
+    <a:masterClrMapping/>
+  </p:clrMapOvr>
+</p:notes>
+</file>
+
+<file path=ppt/notesSlides/notesSlide16.xml><?xml version="1.0" encoding="utf-8"?>
+<p:notes xmlns:a="http://schemas.openxmlformats.org/drawingml/2006/main" xmlns:p="http://schemas.openxmlformats.org/presentationml/2006/main" xmlns:r="http://schemas.openxmlformats.org/officeDocument/2006/relationships">
+  <p:cSld>
+    <p:spTree>
+      <p:nvGrpSpPr>
+        <p:cNvPr id="1" name=""/>
+        <p:cNvGrpSpPr/>
+        <p:nvPr/>
+      </p:nvGrpSpPr>
+      <p:grpSpPr>
+        <a:xfrm>
+          <a:off x="0" y="0"/>
+          <a:ext cx="0" cy="0"/>
+          <a:chOff x="0" y="0"/>
+          <a:chExt cx="0" cy="0"/>
+        </a:xfrm>
+      </p:grpSpPr>
+      <p:sp>
+        <p:nvSpPr>
+          <p:cNvPr id="2" name="Notes Placeholder 1"/>
+          <p:cNvSpPr>
+            <a:spLocks noGrp="1"/>
+          </p:cNvSpPr>
+          <p:nvPr>
+            <p:ph type="body" idx="1"/>
+          </p:nvPr>
+        </p:nvSpPr>
+        <p:spPr/>
+        <p:txBody>
+          <a:bodyPr/>
+          <a:lstStyle/>
+          <a:p>
+            <a:r>
+              <a:t>S20 · COMMISSIONING · LEAD: CONTENT PRESENTER</a:t>
+            </a:r>
+          </a:p>
+          <a:p>
+            <a:r>
+              <a:t>BEATS:</a:t>
+            </a:r>
+          </a:p>
+          <a:p>
+            <a:r>
+              <a:t>1. The four parts, in order: the homework practice, week one; the end-of-week-one check-in; the homework practice, week two; one sentence of preparation.</a:t>
+            </a:r>
+          </a:p>
+          <a:p>
+            <a:r>
+              <a:t>2. Check-in partners are named aloud before leaving this slide — the sheet has the line to write the name.</a:t>
+            </a:r>
+          </a:p>
+          <a:p>
+            <a:r>
+              <a:t>GUARD: The sheet-walk, not a re-teach.</a:t>
+            </a:r>
+          </a:p>
+        </p:txBody>
+      </p:sp>
+    </p:spTree>
+  </p:cSld>
+  <p:clrMapOvr>
+    <a:masterClrMapping/>
+  </p:clrMapOvr>
+</p:notes>
+</file>
+
 <file path=ppt/notesSlides/notesSlide242.xml><?xml version="1.0" encoding="utf-8"?>
 <p:notes xmlns:a="http://schemas.openxmlformats.org/drawingml/2006/main" xmlns:r="http://schemas.openxmlformats.org/officeDocument/2006/relationships" xmlns:p="http://schemas.openxmlformats.org/presentationml/2006/main">
   <p:cSld>
@@ -913,32 +1123,32 @@
           <a:lstStyle/>
           <a:p>
             <a:r>
-              <a:rPr lang="en-US" sz="1200"/>
               <a:t>S20 · 7:00–7:08 · LEAD: CONTAINER HOLDER CIRCLE</a:t>
             </a:r>
           </a:p>
           <a:p>
             <a:r>
-              <a:rPr lang="en-US" sz="1200"/>
               <a:t>BEATS:</a:t>
             </a:r>
           </a:p>
           <a:p>
             <a:r>
-              <a:rPr lang="en-US" sz="1200"/>
               <a:t>1. The senior opens from memory: blessing first, phones away, the container reminder, the shape of the night, then the standard protocol whole.</a:t>
             </a:r>
           </a:p>
           <a:p>
             <a:r>
-              <a:rPr lang="en-US" sz="1200"/>
               <a:t>2. Sit where the senior can find your eyes and otherwise do nothing.</a:t>
             </a:r>
           </a:p>
           <a:p>
             <a:r>
-              <a:rPr lang="en-US" sz="1200"/>
               <a:t>3. Resist adding a welcome on top of the senior's welcome — this is one of the last container reps before Week 22 asks for it in public.</a:t>
+            </a:r>
+          </a:p>
+          <a:p>
+            <a:r>
+              <a:t>PAIR LEAD: name the leading pair in the welcome — two leaders hold tonight, and the room will see the evening handed back and forth between them; that is the design. The pair practices the session together beforehand.</a:t>
             </a:r>
           </a:p>
         </p:txBody>
@@ -1419,77 +1629,6 @@
             <a:r>
               <a:rPr lang="en-US" sz="1200"/>
               <a:t>CUES: An apologized-for instrument returns half-empty — warm and unapologetic is the register.</a:t>
-            </a:r>
-          </a:p>
-        </p:txBody>
-      </p:sp>
-    </p:spTree>
-  </p:cSld>
-  <p:clrMapOvr>
-    <a:masterClrMapping/>
-  </p:clrMapOvr>
-</p:notes>
-</file>
-
-<file path=ppt/notesSlides/notesSlide251.xml><?xml version="1.0" encoding="utf-8"?>
-<p:notes xmlns:a="http://schemas.openxmlformats.org/drawingml/2006/main" xmlns:r="http://schemas.openxmlformats.org/officeDocument/2006/relationships" xmlns:p="http://schemas.openxmlformats.org/presentationml/2006/main">
-  <p:cSld>
-    <p:spTree>
-      <p:nvGrpSpPr>
-        <p:cNvPr id="1" name=""/>
-        <p:cNvGrpSpPr/>
-        <p:nvPr/>
-      </p:nvGrpSpPr>
-      <p:grpSpPr>
-        <a:xfrm>
-          <a:off x="0" y="0"/>
-          <a:ext cx="0" cy="0"/>
-          <a:chOff x="0" y="0"/>
-          <a:chExt cx="0" cy="0"/>
-        </a:xfrm>
-      </p:grpSpPr>
-      <p:sp>
-        <p:nvSpPr>
-          <p:cNvPr id="2" name="Notes Placeholder 1"/>
-          <p:cNvSpPr>
-            <a:spLocks noGrp="1"/>
-          </p:cNvSpPr>
-          <p:nvPr>
-            <p:ph type="body" idx="1"/>
-          </p:nvPr>
-        </p:nvSpPr>
-        <p:spPr/>
-        <p:txBody>
-          <a:bodyPr/>
-          <a:lstStyle/>
-          <a:p>
-            <a:r>
-              <a:rPr lang="en-US" sz="1200"/>
-              <a:t>S20 · 8:18–8:20 · LEAD: CONTENT PRESENTER CIRCLE</a:t>
-            </a:r>
-          </a:p>
-          <a:p>
-            <a:r>
-              <a:rPr lang="en-US" sz="1200"/>
-              <a:t>BEATS:</a:t>
-            </a:r>
-          </a:p>
-          <a:p>
-            <a:r>
-              <a:rPr lang="en-US" sz="1200"/>
-              <a:t>1. Check-off card H20.2: the Rhythm Card dailies, as built.</a:t>
-            </a:r>
-          </a:p>
-          <a:p>
-            <a:r>
-              <a:rPr lang="en-US" sz="1200"/>
-              <a:t>2. Two one-time boxes: the survey — twenty honest minutes, back in the Week 21 bin — and finding both mercy cards at home and showing one other family member where they live.</a:t>
-            </a:r>
-          </a:p>
-          <a:p>
-            <a:r>
-              <a:rPr lang="en-US" sz="1200"/>
-              <a:t>3. The cards gathering dust is the hope; everyone knowing the drawer is the point.</a:t>
             </a:r>
           </a:p>
         </p:txBody>
@@ -4855,7 +4994,1585 @@
 </p:sld>
 </file>
 
-<file path=ppt/slides/slide244.xml><?xml version="1.0" encoding="utf-8"?>
+<file path=ppt/slides/slide10.xml><?xml version="1.0" encoding="utf-8"?>
+<p:sld xmlns:a="http://schemas.openxmlformats.org/drawingml/2006/main" xmlns:r="http://schemas.openxmlformats.org/officeDocument/2006/relationships" xmlns:p="http://schemas.openxmlformats.org/presentationml/2006/main">
+  <p:cSld>
+    <p:spTree>
+      <p:nvGrpSpPr>
+        <p:cNvPr id="1" name=""/>
+        <p:cNvGrpSpPr/>
+        <p:nvPr/>
+      </p:nvGrpSpPr>
+      <p:grpSpPr>
+        <a:xfrm>
+          <a:off x="0" y="0"/>
+          <a:ext cx="0" cy="0"/>
+          <a:chOff x="0" y="0"/>
+          <a:chExt cx="0" cy="0"/>
+        </a:xfrm>
+      </p:grpSpPr>
+      <p:sp>
+        <p:nvSpPr>
+          <p:cNvPr id="2" name="Rectangle 1"/>
+          <p:cNvSpPr/>
+          <p:nvPr/>
+        </p:nvSpPr>
+        <p:spPr>
+          <a:xfrm>
+            <a:off x="0" y="0"/>
+            <a:ext cx="12191695" cy="6858000"/>
+          </a:xfrm>
+          <a:prstGeom prst="rect">
+            <a:avLst/>
+          </a:prstGeom>
+          <a:solidFill>
+            <a:srgbClr val="FFFFFF"/>
+          </a:solidFill>
+          <a:ln>
+            <a:noFill/>
+          </a:ln>
+        </p:spPr>
+        <p:txBody>
+          <a:bodyPr/>
+          <a:lstStyle/>
+          <a:p>
+            <a:endParaRPr/>
+          </a:p>
+        </p:txBody>
+      </p:sp>
+      <p:sp>
+        <p:nvSpPr>
+          <p:cNvPr id="3" name="TextBox 2"/>
+          <p:cNvSpPr txBox="1"/>
+          <p:nvPr/>
+        </p:nvSpPr>
+        <p:spPr>
+          <a:xfrm>
+            <a:off x="822960" y="502920"/>
+            <a:ext cx="10515600" cy="822960"/>
+          </a:xfrm>
+          <a:prstGeom prst="rect">
+            <a:avLst/>
+          </a:prstGeom>
+          <a:noFill/>
+        </p:spPr>
+        <p:txBody>
+          <a:bodyPr wrap="square">
+            <a:spAutoFit/>
+          </a:bodyPr>
+          <a:lstStyle/>
+          <a:p>
+            <a:pPr algn="l">
+              <a:spcAft>
+                <a:spcPts val="600"/>
+              </a:spcAft>
+            </a:pPr>
+            <a:r>
+              <a:rPr sz="2800" b="1" i="0">
+                <a:solidFill>
+                  <a:srgbClr val="2C5F2D"/>
+                </a:solidFill>
+                <a:latin typeface="Cambria"/>
+              </a:rPr>
+              <a:t>The Post-Series Survey</a:t>
+            </a:r>
+          </a:p>
+        </p:txBody>
+      </p:sp>
+      <p:sp>
+        <p:nvSpPr>
+          <p:cNvPr id="4" name="TextBox 4"/>
+          <p:cNvSpPr txBox="1"/>
+          <p:nvPr/>
+        </p:nvSpPr>
+        <p:spPr>
+          <a:xfrm>
+            <a:off x="822960" y="1554480"/>
+            <a:ext cx="10515600" cy="4892040"/>
+          </a:xfrm>
+          <a:prstGeom prst="rect">
+            <a:avLst/>
+          </a:prstGeom>
+          <a:noFill/>
+        </p:spPr>
+        <p:txBody>
+          <a:bodyPr wrap="square" lIns="91440" tIns="91440" rIns="91440" bIns="91440"/>
+          <a:lstStyle/>
+          <a:p>
+            <a:pPr marL="274320" indent="-274320">
+              <a:spcAft>
+                <a:spcPts val="900"/>
+              </a:spcAft>
+            </a:pPr>
+            <a:r>
+              <a:rPr sz="2800" b="1" i="0">
+                <a:solidFill>
+                  <a:srgbClr val="97BC62"/>
+                </a:solidFill>
+                <a:latin typeface="Calibri"/>
+              </a:rPr>
+              <a:t>•  </a:t>
+            </a:r>
+            <a:r>
+              <a:rPr sz="2800" b="0" i="0">
+                <a:solidFill>
+                  <a:srgbClr val="222B22"/>
+                </a:solidFill>
+                <a:latin typeface="Calibri"/>
+              </a:rPr>
+              <a:t>The bookend to orientation’s Pre-Series Survey. Home tonight; back in the bin at the Week 21 door.</a:t>
+            </a:r>
+          </a:p>
+          <a:p>
+            <a:pPr marL="274320" indent="-274320">
+              <a:spcAft>
+                <a:spcPts val="900"/>
+              </a:spcAft>
+            </a:pPr>
+            <a:r>
+              <a:rPr sz="2800" b="1" i="0">
+                <a:solidFill>
+                  <a:srgbClr val="97BC62"/>
+                </a:solidFill>
+                <a:latin typeface="Calibri"/>
+              </a:rPr>
+              <a:t>•  </a:t>
+            </a:r>
+            <a:r>
+              <a:rPr sz="2800" b="0" i="0">
+                <a:solidFill>
+                  <a:srgbClr val="222B22"/>
+                </a:solidFill>
+                <a:latin typeface="Calibri"/>
+              </a:rPr>
+              <a:t>This is a pilot — the first year this has ever run, anywhere. Your honest answers — especially the critical ones — are a gift to families you will never meet.</a:t>
+            </a:r>
+          </a:p>
+          <a:p>
+            <a:pPr marL="274320" indent="-274320">
+              <a:spcAft>
+                <a:spcPts val="900"/>
+              </a:spcAft>
+            </a:pPr>
+            <a:r>
+              <a:rPr sz="2800" b="1" i="0">
+                <a:solidFill>
+                  <a:srgbClr val="97BC62"/>
+                </a:solidFill>
+                <a:latin typeface="Calibri"/>
+              </a:rPr>
+              <a:t>•  </a:t>
+            </a:r>
+            <a:r>
+              <a:rPr sz="2800" b="0" i="0">
+                <a:solidFill>
+                  <a:srgbClr val="222B22"/>
+                </a:solidFill>
+                <a:latin typeface="Calibri"/>
+              </a:rPr>
+              <a:t>The same covenant covers it: no scores, no grades, mirrors not levers</a:t>
+            </a:r>
+          </a:p>
+          <a:p>
+            <a:pPr marL="274320" indent="-274320">
+              <a:spcAft>
+                <a:spcPts val="900"/>
+              </a:spcAft>
+            </a:pPr>
+            <a:r>
+              <a:rPr sz="2800" b="1" i="0">
+                <a:solidFill>
+                  <a:srgbClr val="97BC62"/>
+                </a:solidFill>
+                <a:latin typeface="Calibri"/>
+              </a:rPr>
+              <a:t>•  </a:t>
+            </a:r>
+            <a:r>
+              <a:rPr sz="2800" b="0" i="0">
+                <a:solidFill>
+                  <a:srgbClr val="222B22"/>
+                </a:solidFill>
+                <a:latin typeface="Calibri"/>
+              </a:rPr>
+              <a:t>One per person — parents and teens each do their own. About twenty minutes. Signed or anonymous, your choice.</a:t>
+            </a:r>
+          </a:p>
+        </p:txBody>
+      </p:sp>
+      <p:sp>
+        <p:nvSpPr>
+          <p:cNvPr id="90" name="SlideNum"/>
+          <p:cNvSpPr txBox="1"/>
+          <p:nvPr/>
+        </p:nvSpPr>
+        <p:spPr>
+          <a:xfrm>
+            <a:off x="11384280" y="6446520"/>
+            <a:ext cx="640080" cy="292608"/>
+          </a:xfrm>
+          <a:prstGeom prst="rect">
+            <a:avLst/>
+          </a:prstGeom>
+          <a:noFill/>
+        </p:spPr>
+        <p:txBody>
+          <a:bodyPr wrap="none" lIns="0" tIns="0" rIns="45720" bIns="0" anchor="ctr"/>
+          <a:lstStyle/>
+          <a:p>
+            <a:pPr algn="r"/>
+            <a:r>
+              <a:t>252</a:t>
+            </a:r>
+            <a:endParaRPr sz="1000" b="1">
+              <a:solidFill>
+                <a:srgbClr val="7A8A6E"/>
+              </a:solidFill>
+              <a:latin typeface="Calibri"/>
+            </a:endParaRPr>
+          </a:p>
+        </p:txBody>
+      </p:sp>
+    </p:spTree>
+  </p:cSld>
+  <p:clrMapOvr>
+    <a:masterClrMapping/>
+  </p:clrMapOvr>
+</p:sld>
+</file>
+
+<file path=ppt/slides/slide12.xml><?xml version="1.0" encoding="utf-8"?>
+<p:sld xmlns:a="http://schemas.openxmlformats.org/drawingml/2006/main" xmlns:r="http://schemas.openxmlformats.org/officeDocument/2006/relationships" xmlns:p="http://schemas.openxmlformats.org/presentationml/2006/main">
+  <p:cSld>
+    <p:spTree>
+      <p:nvGrpSpPr>
+        <p:cNvPr id="1" name=""/>
+        <p:cNvGrpSpPr/>
+        <p:nvPr/>
+      </p:nvGrpSpPr>
+      <p:grpSpPr>
+        <a:xfrm>
+          <a:off x="0" y="0"/>
+          <a:ext cx="0" cy="0"/>
+          <a:chOff x="0" y="0"/>
+          <a:chExt cx="0" cy="0"/>
+        </a:xfrm>
+      </p:grpSpPr>
+      <p:sp>
+        <p:nvSpPr>
+          <p:cNvPr id="2" name="Rectangle 1"/>
+          <p:cNvSpPr/>
+          <p:nvPr/>
+        </p:nvSpPr>
+        <p:spPr>
+          <a:xfrm>
+            <a:off x="0" y="0"/>
+            <a:ext cx="12191695" cy="6858000"/>
+          </a:xfrm>
+          <a:prstGeom prst="rect">
+            <a:avLst/>
+          </a:prstGeom>
+          <a:solidFill>
+            <a:srgbClr val="FFFFFF"/>
+          </a:solidFill>
+          <a:ln>
+            <a:noFill/>
+          </a:ln>
+        </p:spPr>
+        <p:txBody>
+          <a:bodyPr/>
+          <a:lstStyle/>
+          <a:p>
+            <a:endParaRPr/>
+          </a:p>
+        </p:txBody>
+      </p:sp>
+      <p:sp>
+        <p:nvSpPr>
+          <p:cNvPr id="3" name="TextBox 2"/>
+          <p:cNvSpPr txBox="1"/>
+          <p:nvPr/>
+        </p:nvSpPr>
+        <p:spPr>
+          <a:xfrm>
+            <a:off x="822960" y="502920"/>
+            <a:ext cx="10515600" cy="822960"/>
+          </a:xfrm>
+          <a:prstGeom prst="rect">
+            <a:avLst/>
+          </a:prstGeom>
+          <a:noFill/>
+        </p:spPr>
+        <p:txBody>
+          <a:bodyPr wrap="square">
+            <a:spAutoFit/>
+          </a:bodyPr>
+          <a:lstStyle/>
+          <a:p>
+            <a:pPr algn="l">
+              <a:spcAft>
+                <a:spcPts val="600"/>
+              </a:spcAft>
+            </a:pPr>
+            <a:r>
+              <a:rPr sz="2800" b="1" i="0">
+                <a:solidFill>
+                  <a:srgbClr val="2C5F2D"/>
+                </a:solidFill>
+                <a:latin typeface="Cambria"/>
+              </a:rPr>
+              <a:t>The Leader Feedback Round</a:t>
+            </a:r>
+          </a:p>
+        </p:txBody>
+      </p:sp>
+      <p:sp>
+        <p:nvSpPr>
+          <p:cNvPr id="4" name="TextBox 4"/>
+          <p:cNvSpPr txBox="1"/>
+          <p:nvPr/>
+        </p:nvSpPr>
+        <p:spPr>
+          <a:xfrm>
+            <a:off x="822960" y="1554480"/>
+            <a:ext cx="6675120" cy="4892040"/>
+          </a:xfrm>
+          <a:prstGeom prst="rect">
+            <a:avLst/>
+          </a:prstGeom>
+          <a:noFill/>
+        </p:spPr>
+        <p:txBody>
+          <a:bodyPr wrap="square" lIns="91440" tIns="91440" rIns="91440" bIns="91440"/>
+          <a:lstStyle/>
+          <a:p>
+            <a:pPr marL="274320" indent="-274320">
+              <a:spcAft>
+                <a:spcPts val="900"/>
+              </a:spcAft>
+            </a:pPr>
+            <a:r>
+              <a:rPr sz="2800" b="1" i="0">
+                <a:solidFill>
+                  <a:srgbClr val="97BC62"/>
+                </a:solidFill>
+                <a:latin typeface="Calibri"/>
+              </a:rPr>
+              <a:t>•  </a:t>
+            </a:r>
+            <a:r>
+              <a:rPr sz="2800" b="0" i="0">
+                <a:solidFill>
+                  <a:srgbClr val="222B22"/>
+                </a:solidFill>
+                <a:latin typeface="Calibri"/>
+              </a:rPr>
+              <a:t>Two rounds, same as every session — the container holder first, then the content presenter: three things each</a:t>
+            </a:r>
+          </a:p>
+          <a:p>
+            <a:pPr marL="685800" indent="-274320">
+              <a:spcAft>
+                <a:spcPts val="700"/>
+              </a:spcAft>
+            </a:pPr>
+            <a:r>
+              <a:rPr sz="2000" b="1" i="0">
+                <a:solidFill>
+                  <a:srgbClr val="97BC62"/>
+                </a:solidFill>
+                <a:latin typeface="Calibri"/>
+              </a:rPr>
+              <a:t>–  </a:t>
+            </a:r>
+            <a:r>
+              <a:rPr sz="2000" b="0" i="1">
+                <a:solidFill>
+                  <a:srgbClr val="222B22"/>
+                </a:solidFill>
+                <a:latin typeface="Calibri"/>
+              </a:rPr>
+              <a:t>“What I think went well tonight: ______”</a:t>
+            </a:r>
+          </a:p>
+          <a:p>
+            <a:pPr marL="685800" indent="-274320">
+              <a:spcAft>
+                <a:spcPts val="700"/>
+              </a:spcAft>
+            </a:pPr>
+            <a:r>
+              <a:rPr sz="2000" b="1" i="0">
+                <a:solidFill>
+                  <a:srgbClr val="97BC62"/>
+                </a:solidFill>
+                <a:latin typeface="Calibri"/>
+              </a:rPr>
+              <a:t>–  </a:t>
+            </a:r>
+            <a:r>
+              <a:rPr sz="2000" b="0" i="1">
+                <a:solidFill>
+                  <a:srgbClr val="222B22"/>
+                </a:solidFill>
+                <a:latin typeface="Calibri"/>
+              </a:rPr>
+              <a:t>“What I’d do differently next time: ______”</a:t>
+            </a:r>
+          </a:p>
+          <a:p>
+            <a:pPr marL="685800" indent="-274320">
+              <a:spcAft>
+                <a:spcPts val="700"/>
+              </a:spcAft>
+            </a:pPr>
+            <a:r>
+              <a:rPr sz="2000" b="1" i="0">
+                <a:solidFill>
+                  <a:srgbClr val="97BC62"/>
+                </a:solidFill>
+                <a:latin typeface="Calibri"/>
+              </a:rPr>
+              <a:t>–  </a:t>
+            </a:r>
+            <a:r>
+              <a:rPr sz="2000" b="0" i="1">
+                <a:solidFill>
+                  <a:srgbClr val="222B22"/>
+                </a:solidFill>
+                <a:latin typeface="Calibri"/>
+              </a:rPr>
+              <a:t>“If I were to teach tonight’s process to someone, I would tell them: ______”</a:t>
+            </a:r>
+          </a:p>
+          <a:p>
+            <a:pPr marL="274320" indent="-274320">
+              <a:spcAft>
+                <a:spcPts val="900"/>
+              </a:spcAft>
+            </a:pPr>
+            <a:r>
+              <a:rPr sz="2800" b="1" i="0">
+                <a:solidFill>
+                  <a:srgbClr val="97BC62"/>
+                </a:solidFill>
+                <a:latin typeface="Calibri"/>
+              </a:rPr>
+              <a:t>•  </a:t>
+            </a:r>
+            <a:r>
+              <a:rPr sz="2800" b="0" i="0">
+                <a:solidFill>
+                  <a:srgbClr val="222B22"/>
+                </a:solidFill>
+                <a:latin typeface="Calibri"/>
+              </a:rPr>
+              <a:t>Then the room — the same two questions about tonight</a:t>
+            </a:r>
+          </a:p>
+          <a:p>
+            <a:pPr marL="274320" indent="-274320">
+              <a:spcAft>
+                <a:spcPts val="900"/>
+              </a:spcAft>
+            </a:pPr>
+            <a:r>
+              <a:rPr sz="2800" b="1" i="0">
+                <a:solidFill>
+                  <a:srgbClr val="97BC62"/>
+                </a:solidFill>
+                <a:latin typeface="Calibri"/>
+              </a:rPr>
+              <a:t>•  </a:t>
+            </a:r>
+            <a:r>
+              <a:rPr sz="2800" b="0" i="0">
+                <a:solidFill>
+                  <a:srgbClr val="222B22"/>
+                </a:solidFill>
+                <a:latin typeface="Calibri"/>
+              </a:rPr>
+              <a:t>The leaders receive without defending — “thank you” is the whole response</a:t>
+            </a:r>
+          </a:p>
+        </p:txBody>
+      </p:sp>
+      <p:sp>
+        <p:nvSpPr>
+          <p:cNvPr id="90" name="SlideNum"/>
+          <p:cNvSpPr txBox="1"/>
+          <p:nvPr/>
+        </p:nvSpPr>
+        <p:spPr>
+          <a:xfrm>
+            <a:off x="11384280" y="6446520"/>
+            <a:ext cx="640080" cy="292608"/>
+          </a:xfrm>
+          <a:prstGeom prst="rect">
+            <a:avLst/>
+          </a:prstGeom>
+          <a:noFill/>
+        </p:spPr>
+        <p:txBody>
+          <a:bodyPr wrap="none" lIns="0" tIns="0" rIns="45720" bIns="0" anchor="ctr"/>
+          <a:lstStyle/>
+          <a:p>
+            <a:pPr algn="r"/>
+            <a:r>
+              <a:t>254</a:t>
+            </a:r>
+            <a:endParaRPr sz="1000" b="1">
+              <a:solidFill>
+                <a:srgbClr val="7A8A6E"/>
+              </a:solidFill>
+              <a:latin typeface="Calibri"/>
+            </a:endParaRPr>
+          </a:p>
+        </p:txBody>
+      </p:sp>
+      <p:pic>
+        <p:nvPicPr>
+          <p:cNvPr id="33" name="Picture 33" descr="compass on the trail - the weekly bearing check"/>
+          <p:cNvPicPr>
+            <a:picLocks noChangeAspect="1"/>
+          </p:cNvPicPr>
+          <p:nvPr/>
+        </p:nvPicPr>
+        <p:blipFill>
+          <a:blip r:embed="rId3"/>
+          <a:stretch>
+            <a:fillRect/>
+          </a:stretch>
+        </p:blipFill>
+        <p:spPr>
+          <a:xfrm>
+            <a:off x="8106160" y="1463040"/>
+            <a:ext cx="3259831" cy="4892040"/>
+          </a:xfrm>
+          <a:prstGeom prst="rect">
+            <a:avLst/>
+          </a:prstGeom>
+          <a:ln w="76200">
+            <a:solidFill>
+              <a:srgbClr val="FFFFFF"/>
+            </a:solidFill>
+          </a:ln>
+          <a:effectLst>
+            <a:outerShdw blurRad="63500" dist="25400" dir="5400000" rotWithShape="0">
+              <a:srgbClr val="000000">
+                <a:alpha val="35000"/>
+              </a:srgbClr>
+            </a:outerShdw>
+          </a:effectLst>
+        </p:spPr>
+      </p:pic>
+    </p:spTree>
+  </p:cSld>
+  <p:clrMapOvr>
+    <a:masterClrMapping/>
+  </p:clrMapOvr>
+</p:sld>
+</file>
+
+<file path=ppt/slides/slide13.xml><?xml version="1.0" encoding="utf-8"?>
+<p:sld xmlns:a="http://schemas.openxmlformats.org/drawingml/2006/main" xmlns:r="http://schemas.openxmlformats.org/officeDocument/2006/relationships" xmlns:p="http://schemas.openxmlformats.org/presentationml/2006/main">
+  <p:cSld>
+    <p:spTree>
+      <p:nvGrpSpPr>
+        <p:cNvPr id="1" name=""/>
+        <p:cNvGrpSpPr/>
+        <p:nvPr/>
+      </p:nvGrpSpPr>
+      <p:grpSpPr>
+        <a:xfrm>
+          <a:off x="0" y="0"/>
+          <a:ext cx="0" cy="0"/>
+          <a:chOff x="0" y="0"/>
+          <a:chExt cx="0" cy="0"/>
+        </a:xfrm>
+      </p:grpSpPr>
+      <p:sp>
+        <p:nvSpPr>
+          <p:cNvPr id="2" name="Rectangle 1"/>
+          <p:cNvSpPr/>
+          <p:nvPr/>
+        </p:nvSpPr>
+        <p:spPr>
+          <a:xfrm>
+            <a:off x="0" y="0"/>
+            <a:ext cx="12191695" cy="6858000"/>
+          </a:xfrm>
+          <a:prstGeom prst="rect">
+            <a:avLst/>
+          </a:prstGeom>
+          <a:solidFill>
+            <a:srgbClr val="FFFFFF"/>
+          </a:solidFill>
+          <a:ln>
+            <a:noFill/>
+          </a:ln>
+        </p:spPr>
+        <p:txBody>
+          <a:bodyPr/>
+          <a:lstStyle/>
+          <a:p>
+            <a:endParaRPr/>
+          </a:p>
+        </p:txBody>
+      </p:sp>
+      <p:sp>
+        <p:nvSpPr>
+          <p:cNvPr id="3" name="TextBox 2"/>
+          <p:cNvSpPr txBox="1"/>
+          <p:nvPr/>
+        </p:nvSpPr>
+        <p:spPr>
+          <a:xfrm>
+            <a:off x="822960" y="502920"/>
+            <a:ext cx="10515600" cy="822960"/>
+          </a:xfrm>
+          <a:prstGeom prst="rect">
+            <a:avLst/>
+          </a:prstGeom>
+          <a:noFill/>
+        </p:spPr>
+        <p:txBody>
+          <a:bodyPr wrap="square">
+            <a:spAutoFit/>
+          </a:bodyPr>
+          <a:lstStyle/>
+          <a:p>
+            <a:pPr algn="l">
+              <a:spcAft>
+                <a:spcPts val="600"/>
+              </a:spcAft>
+            </a:pPr>
+            <a:r>
+              <a:rPr sz="2800" b="1" i="0">
+                <a:solidFill>
+                  <a:srgbClr val="2C5F2D"/>
+                </a:solidFill>
+                <a:latin typeface="Cambria"/>
+              </a:rPr>
+              <a:t>Closing the Container + Aaronic Blessing</a:t>
+            </a:r>
+          </a:p>
+        </p:txBody>
+      </p:sp>
+      <p:sp>
+        <p:nvSpPr>
+          <p:cNvPr id="4" name="TextBox 4"/>
+          <p:cNvSpPr txBox="1"/>
+          <p:nvPr/>
+        </p:nvSpPr>
+        <p:spPr>
+          <a:xfrm>
+            <a:off x="822960" y="1600200"/>
+            <a:ext cx="5669280" cy="4572000"/>
+          </a:xfrm>
+          <a:prstGeom prst="rect">
+            <a:avLst/>
+          </a:prstGeom>
+          <a:noFill/>
+        </p:spPr>
+        <p:txBody>
+          <a:bodyPr wrap="square" lIns="91440" tIns="91440" rIns="91440" bIns="91440"/>
+          <a:lstStyle/>
+          <a:p>
+            <a:pPr marL="274320" indent="-274320">
+              <a:spcAft>
+                <a:spcPts val="900"/>
+              </a:spcAft>
+            </a:pPr>
+            <a:r>
+              <a:rPr sz="2200" b="1" i="0">
+                <a:solidFill>
+                  <a:srgbClr val="97BC62"/>
+                </a:solidFill>
+                <a:latin typeface="Calibri"/>
+              </a:rPr>
+              <a:t>•  </a:t>
+            </a:r>
+            <a:r>
+              <a:rPr sz="2200" b="0" i="0">
+                <a:solidFill>
+                  <a:srgbClr val="222B22"/>
+                </a:solidFill>
+                <a:latin typeface="Calibri"/>
+              </a:rPr>
+              <a:t>We close the way we opened — the container, six steps:</a:t>
+            </a:r>
+          </a:p>
+          <a:p>
+            <a:pPr marL="685800" indent="-274320">
+              <a:spcAft>
+                <a:spcPts val="700"/>
+              </a:spcAft>
+            </a:pPr>
+            <a:r>
+              <a:rPr sz="2000" b="1" i="0">
+                <a:solidFill>
+                  <a:srgbClr val="97BC62"/>
+                </a:solidFill>
+                <a:latin typeface="Calibri"/>
+              </a:rPr>
+              <a:t>1   </a:t>
+            </a:r>
+            <a:r>
+              <a:rPr sz="2000" b="0" i="0">
+                <a:solidFill>
+                  <a:srgbClr val="222B22"/>
+                </a:solidFill>
+                <a:latin typeface="Calibri"/>
+              </a:rPr>
+              <a:t>Stand again — same circle, same posture as the open</a:t>
+            </a:r>
+          </a:p>
+          <a:p>
+            <a:pPr marL="685800" indent="-274320">
+              <a:spcAft>
+                <a:spcPts val="700"/>
+              </a:spcAft>
+            </a:pPr>
+            <a:r>
+              <a:rPr sz="2000" b="1" i="0">
+                <a:solidFill>
+                  <a:srgbClr val="97BC62"/>
+                </a:solidFill>
+                <a:latin typeface="Calibri"/>
+              </a:rPr>
+              <a:t>2   </a:t>
+            </a:r>
+            <a:r>
+              <a:rPr sz="2000" b="0" i="0">
+                <a:solidFill>
+                  <a:srgbClr val="222B22"/>
+                </a:solidFill>
+                <a:latin typeface="Calibri"/>
+              </a:rPr>
+              <a:t>One-word landing — compare it to your opening word</a:t>
+            </a:r>
+          </a:p>
+          <a:p>
+            <a:pPr marL="685800" indent="-274320">
+              <a:spcAft>
+                <a:spcPts val="700"/>
+              </a:spcAft>
+            </a:pPr>
+            <a:r>
+              <a:rPr sz="2000" b="1" i="0">
+                <a:solidFill>
+                  <a:srgbClr val="97BC62"/>
+                </a:solidFill>
+                <a:latin typeface="Calibri"/>
+              </a:rPr>
+              <a:t>3   </a:t>
+            </a:r>
+            <a:r>
+              <a:rPr sz="2000" b="0" i="0">
+                <a:solidFill>
+                  <a:srgbClr val="222B22"/>
+                </a:solidFill>
+                <a:latin typeface="Calibri"/>
+              </a:rPr>
+              <a:t>The one thing you are taking from tonight</a:t>
+            </a:r>
+          </a:p>
+          <a:p>
+            <a:pPr marL="685800" indent="-274320">
+              <a:spcAft>
+                <a:spcPts val="700"/>
+              </a:spcAft>
+            </a:pPr>
+            <a:r>
+              <a:rPr sz="2000" b="1" i="0">
+                <a:solidFill>
+                  <a:srgbClr val="97BC62"/>
+                </a:solidFill>
+                <a:latin typeface="Calibri"/>
+              </a:rPr>
+              <a:t>4   </a:t>
+            </a:r>
+            <a:r>
+              <a:rPr sz="2000" b="0" i="0">
+                <a:solidFill>
+                  <a:srgbClr val="222B22"/>
+                </a:solidFill>
+                <a:latin typeface="Calibri"/>
+              </a:rPr>
+              <a:t>The one practice — committed aloud, or modified to one you will actually keep</a:t>
+            </a:r>
+          </a:p>
+          <a:p>
+            <a:pPr marL="685800" indent="-274320">
+              <a:spcAft>
+                <a:spcPts val="700"/>
+              </a:spcAft>
+            </a:pPr>
+            <a:r>
+              <a:rPr sz="2000" b="1" i="0">
+                <a:solidFill>
+                  <a:srgbClr val="97BC62"/>
+                </a:solidFill>
+                <a:latin typeface="Calibri"/>
+              </a:rPr>
+              <a:t>5   </a:t>
+            </a:r>
+            <a:r>
+              <a:rPr sz="2000" b="0" i="0">
+                <a:solidFill>
+                  <a:srgbClr val="222B22"/>
+                </a:solidFill>
+                <a:latin typeface="Calibri"/>
+              </a:rPr>
+              <a:t>Blessings — specific, witnessed, short</a:t>
+            </a:r>
+          </a:p>
+          <a:p>
+            <a:pPr marL="685800" indent="-274320">
+              <a:spcAft>
+                <a:spcPts val="700"/>
+              </a:spcAft>
+            </a:pPr>
+            <a:r>
+              <a:rPr sz="2000" b="1" i="0">
+                <a:solidFill>
+                  <a:srgbClr val="97BC62"/>
+                </a:solidFill>
+                <a:latin typeface="Calibri"/>
+              </a:rPr>
+              <a:t>6   </a:t>
+            </a:r>
+            <a:r>
+              <a:rPr sz="2000" b="0" i="0">
+                <a:solidFill>
+                  <a:srgbClr val="222B22"/>
+                </a:solidFill>
+                <a:latin typeface="Calibri"/>
+              </a:rPr>
+              <a:t>Closing prayer — and the Aaronic blessing, spoken over each other, face to face</a:t>
+            </a:r>
+          </a:p>
+        </p:txBody>
+      </p:sp>
+      <p:sp>
+        <p:nvSpPr>
+          <p:cNvPr id="6" name="TextBox 6"/>
+          <p:cNvSpPr txBox="1"/>
+          <p:nvPr/>
+        </p:nvSpPr>
+        <p:spPr>
+          <a:xfrm>
+            <a:off x="6766560" y="1737360"/>
+            <a:ext cx="4663440" cy="2926080"/>
+          </a:xfrm>
+          <a:prstGeom prst="rect">
+            <a:avLst/>
+          </a:prstGeom>
+          <a:solidFill>
+            <a:srgbClr val="F1F6EC"/>
+          </a:solidFill>
+        </p:spPr>
+        <p:txBody>
+          <a:bodyPr wrap="square" lIns="91440" tIns="91440" rIns="91440" bIns="91440" anchor="ctr"/>
+          <a:lstStyle/>
+          <a:p>
+            <a:pPr>
+              <a:spcAft>
+                <a:spcPts val="900"/>
+              </a:spcAft>
+            </a:pPr>
+            <a:r>
+              <a:rPr sz="1200" b="1" i="0">
+                <a:solidFill>
+                  <a:srgbClr val="97BC62"/>
+                </a:solidFill>
+                <a:latin typeface="Calibri"/>
+              </a:rPr>
+              <a:t>THE AARONIC BLESSING — NUMBERS 6:24–26</a:t>
+            </a:r>
+          </a:p>
+          <a:p>
+            <a:pPr>
+              <a:spcAft>
+                <a:spcPts val="600"/>
+              </a:spcAft>
+            </a:pPr>
+            <a:r>
+              <a:rPr sz="2400" b="0" i="1">
+                <a:solidFill>
+                  <a:srgbClr val="222B22"/>
+                </a:solidFill>
+                <a:latin typeface="Cambria"/>
+              </a:rPr>
+              <a:t>“The Lord bless you and keep you;</a:t>
+            </a:r>
+          </a:p>
+          <a:p>
+            <a:pPr>
+              <a:spcAft>
+                <a:spcPts val="600"/>
+              </a:spcAft>
+            </a:pPr>
+            <a:r>
+              <a:rPr sz="2400" b="0" i="1">
+                <a:solidFill>
+                  <a:srgbClr val="222B22"/>
+                </a:solidFill>
+                <a:latin typeface="Cambria"/>
+              </a:rPr>
+              <a:t>the Lord make his face to shine upon you, and be gracious to you;</a:t>
+            </a:r>
+          </a:p>
+          <a:p>
+            <a:pPr>
+              <a:spcAft>
+                <a:spcPts val="600"/>
+              </a:spcAft>
+            </a:pPr>
+            <a:r>
+              <a:rPr sz="2400" b="0" i="1">
+                <a:solidFill>
+                  <a:srgbClr val="222B22"/>
+                </a:solidFill>
+                <a:latin typeface="Cambria"/>
+              </a:rPr>
+              <a:t>the Lord lift up his countenance upon you, and give you peace.”</a:t>
+            </a:r>
+          </a:p>
+        </p:txBody>
+      </p:sp>
+      <p:sp>
+        <p:nvSpPr>
+          <p:cNvPr id="90" name="SlideNum"/>
+          <p:cNvSpPr txBox="1"/>
+          <p:nvPr/>
+        </p:nvSpPr>
+        <p:spPr>
+          <a:xfrm>
+            <a:off x="11384280" y="6446520"/>
+            <a:ext cx="640080" cy="292608"/>
+          </a:xfrm>
+          <a:prstGeom prst="rect">
+            <a:avLst/>
+          </a:prstGeom>
+          <a:noFill/>
+        </p:spPr>
+        <p:txBody>
+          <a:bodyPr wrap="none" lIns="0" tIns="0" rIns="45720" bIns="0" anchor="ctr"/>
+          <a:lstStyle/>
+          <a:p>
+            <a:pPr algn="r"/>
+            <a:r>
+              <a:t>255</a:t>
+            </a:r>
+            <a:endParaRPr sz="1000" b="1">
+              <a:solidFill>
+                <a:srgbClr val="7A8A6E"/>
+              </a:solidFill>
+              <a:latin typeface="Calibri"/>
+            </a:endParaRPr>
+          </a:p>
+        </p:txBody>
+      </p:sp>
+    </p:spTree>
+  </p:cSld>
+  <p:clrMapOvr>
+    <a:masterClrMapping/>
+  </p:clrMapOvr>
+</p:sld>
+</file>
+
+<file path=ppt/slides/slide14.xml><?xml version="1.0" encoding="utf-8"?>
+<p:sld xmlns:a="http://schemas.openxmlformats.org/drawingml/2006/main" xmlns:p="http://schemas.openxmlformats.org/presentationml/2006/main" xmlns:r="http://schemas.openxmlformats.org/officeDocument/2006/relationships">
+  <p:cSld>
+    <p:spTree>
+      <p:nvGrpSpPr>
+        <p:cNvPr id="1" name=""/>
+        <p:cNvGrpSpPr/>
+        <p:nvPr/>
+      </p:nvGrpSpPr>
+      <p:grpSpPr/>
+      <p:sp>
+        <p:nvSpPr>
+          <p:cNvPr id="2" name="Rectangle 1"/>
+          <p:cNvSpPr/>
+          <p:nvPr/>
+        </p:nvSpPr>
+        <p:spPr>
+          <a:xfrm>
+            <a:off x="0" y="0"/>
+            <a:ext cx="12192000" cy="6858000"/>
+          </a:xfrm>
+          <a:prstGeom prst="rect">
+            <a:avLst/>
+          </a:prstGeom>
+          <a:solidFill>
+            <a:srgbClr val="FFFFFF"/>
+          </a:solidFill>
+          <a:ln>
+            <a:noFill/>
+          </a:ln>
+          <a:effectLst/>
+        </p:spPr>
+        <p:style>
+          <a:lnRef idx="1">
+            <a:schemeClr val="accent1"/>
+          </a:lnRef>
+          <a:fillRef idx="3">
+            <a:schemeClr val="accent1"/>
+          </a:fillRef>
+          <a:effectRef idx="2">
+            <a:schemeClr val="accent1"/>
+          </a:effectRef>
+          <a:fontRef idx="minor">
+            <a:schemeClr val="lt1"/>
+          </a:fontRef>
+        </p:style>
+        <p:txBody>
+          <a:bodyPr rtlCol="0" anchor="ctr"/>
+          <a:lstStyle/>
+          <a:p>
+            <a:pPr algn="ctr"/>
+          </a:p>
+        </p:txBody>
+      </p:sp>
+      <p:sp>
+        <p:nvSpPr>
+          <p:cNvPr id="3" name="TextBox 2"/>
+          <p:cNvSpPr txBox="1"/>
+          <p:nvPr/>
+        </p:nvSpPr>
+        <p:spPr>
+          <a:xfrm>
+            <a:off x="822960" y="502920"/>
+            <a:ext cx="10515600" cy="822960"/>
+          </a:xfrm>
+          <a:prstGeom prst="rect">
+            <a:avLst/>
+          </a:prstGeom>
+          <a:noFill/>
+        </p:spPr>
+        <p:txBody>
+          <a:bodyPr wrap="square">
+            <a:spAutoFit/>
+          </a:bodyPr>
+          <a:lstStyle/>
+          <a:p>
+            <a:r>
+              <a:rPr sz="2800" b="1">
+                <a:solidFill>
+                  <a:srgbClr val="2C5F2D"/>
+                </a:solidFill>
+                <a:latin typeface="Cambria"/>
+              </a:rPr>
+              <a:t>Where We Are — the Four Connects</a:t>
+            </a:r>
+          </a:p>
+        </p:txBody>
+      </p:sp>
+      <p:pic>
+        <p:nvPicPr>
+          <p:cNvPr id="4" name="Picture 3" descr="four-connects.png"/>
+          <p:cNvPicPr>
+            <a:picLocks noChangeAspect="1"/>
+          </p:cNvPicPr>
+          <p:nvPr/>
+        </p:nvPicPr>
+        <p:blipFill>
+          <a:blip r:embed="rId2"/>
+          <a:stretch>
+            <a:fillRect/>
+          </a:stretch>
+        </p:blipFill>
+        <p:spPr>
+          <a:xfrm>
+            <a:off x="932688" y="1645920"/>
+            <a:ext cx="10332720" cy="3708663"/>
+          </a:xfrm>
+          <a:prstGeom prst="rect">
+            <a:avLst/>
+          </a:prstGeom>
+        </p:spPr>
+      </p:pic>
+      <p:sp>
+        <p:nvSpPr>
+          <p:cNvPr id="5" name="TextBox 4"/>
+          <p:cNvSpPr txBox="1"/>
+          <p:nvPr/>
+        </p:nvSpPr>
+        <p:spPr>
+          <a:xfrm>
+            <a:off x="822960" y="5623560"/>
+            <a:ext cx="10515600" cy="914400"/>
+          </a:xfrm>
+          <a:prstGeom prst="rect">
+            <a:avLst/>
+          </a:prstGeom>
+          <a:noFill/>
+        </p:spPr>
+        <p:txBody>
+          <a:bodyPr wrap="square">
+            <a:spAutoFit/>
+          </a:bodyPr>
+          <a:lstStyle/>
+          <a:p>
+            <a:r>
+              <a:rPr sz="1800" b="0">
+                <a:solidFill>
+                  <a:srgbClr val="222B22"/>
+                </a:solidFill>
+                <a:latin typeface="Calibri"/>
+              </a:rPr>
+              <a:t>Session 20 walks the whole map — </a:t>
+            </a:r>
+            <a:r>
+              <a:rPr sz="1800" b="1">
+                <a:solidFill>
+                  <a:srgbClr val="2C5F2D"/>
+                </a:solidFill>
+                <a:latin typeface="Calibri"/>
+              </a:rPr>
+              <a:t>all four Connects</a:t>
+            </a:r>
+            <a:r>
+              <a:rPr sz="1800" b="0">
+                <a:solidFill>
+                  <a:srgbClr val="222B22"/>
+                </a:solidFill>
+                <a:latin typeface="Calibri"/>
+              </a:rPr>
+              <a:t>, consolidated for the road. Each connection makes the next one real (Matt. 22:37–40).</a:t>
+            </a:r>
+          </a:p>
+        </p:txBody>
+      </p:sp>
+      <p:sp>
+        <p:nvSpPr>
+          <p:cNvPr id="90" name="SlideNum"/>
+          <p:cNvSpPr txBox="1"/>
+          <p:nvPr/>
+        </p:nvSpPr>
+        <p:spPr>
+          <a:xfrm>
+            <a:off x="11384280" y="6446520"/>
+            <a:ext cx="640080" cy="292608"/>
+          </a:xfrm>
+          <a:prstGeom prst="rect">
+            <a:avLst/>
+          </a:prstGeom>
+          <a:noFill/>
+        </p:spPr>
+        <p:txBody>
+          <a:bodyPr wrap="none" lIns="0" tIns="0" rIns="45720" bIns="0" anchor="ctr"/>
+          <a:lstStyle/>
+          <a:p>
+            <a:pPr algn="r"/>
+            <a:r>
+              <a:t>244a</a:t>
+            </a:r>
+            <a:endParaRPr sz="1000" b="1">
+              <a:solidFill>
+                <a:srgbClr val="7A8A6E"/>
+              </a:solidFill>
+              <a:latin typeface="Calibri"/>
+            </a:endParaRPr>
+          </a:p>
+        </p:txBody>
+      </p:sp>
+    </p:spTree>
+  </p:cSld>
+  <p:clrMapOvr>
+    <a:masterClrMapping/>
+  </p:clrMapOvr>
+</p:sld>
+</file>
+
+<file path=ppt/slides/slide15.xml><?xml version="1.0" encoding="utf-8"?>
+<p:sld xmlns:a="http://schemas.openxmlformats.org/drawingml/2006/main" xmlns:p="http://schemas.openxmlformats.org/presentationml/2006/main" xmlns:r="http://schemas.openxmlformats.org/officeDocument/2006/relationships">
+  <p:cSld>
+    <p:spTree>
+      <p:nvGrpSpPr>
+        <p:cNvPr id="1" name=""/>
+        <p:cNvGrpSpPr/>
+        <p:nvPr/>
+      </p:nvGrpSpPr>
+      <p:grpSpPr/>
+      <p:sp>
+        <p:nvSpPr>
+          <p:cNvPr id="2" name="Rectangle 1"/>
+          <p:cNvSpPr/>
+          <p:nvPr/>
+        </p:nvSpPr>
+        <p:spPr>
+          <a:xfrm>
+            <a:off x="0" y="0"/>
+            <a:ext cx="12192000" cy="6858000"/>
+          </a:xfrm>
+          <a:prstGeom prst="rect">
+            <a:avLst/>
+          </a:prstGeom>
+          <a:solidFill>
+            <a:srgbClr val="FFFFFF"/>
+          </a:solidFill>
+          <a:ln>
+            <a:noFill/>
+          </a:ln>
+          <a:effectLst/>
+        </p:spPr>
+        <p:style>
+          <a:lnRef idx="1">
+            <a:schemeClr val="accent1"/>
+          </a:lnRef>
+          <a:fillRef idx="3">
+            <a:schemeClr val="accent1"/>
+          </a:fillRef>
+          <a:effectRef idx="2">
+            <a:schemeClr val="accent1"/>
+          </a:effectRef>
+          <a:fontRef idx="minor">
+            <a:schemeClr val="lt1"/>
+          </a:fontRef>
+        </p:style>
+        <p:txBody>
+          <a:bodyPr rtlCol="0" anchor="ctr"/>
+          <a:lstStyle/>
+          <a:p>
+            <a:pPr algn="ctr"/>
+          </a:p>
+        </p:txBody>
+      </p:sp>
+      <p:sp>
+        <p:nvSpPr>
+          <p:cNvPr id="3" name="TextBox 2"/>
+          <p:cNvSpPr txBox="1"/>
+          <p:nvPr/>
+        </p:nvSpPr>
+        <p:spPr>
+          <a:xfrm>
+            <a:off x="822960" y="502920"/>
+            <a:ext cx="10515600" cy="822960"/>
+          </a:xfrm>
+          <a:prstGeom prst="rect">
+            <a:avLst/>
+          </a:prstGeom>
+          <a:noFill/>
+        </p:spPr>
+        <p:txBody>
+          <a:bodyPr wrap="square">
+            <a:spAutoFit/>
+          </a:bodyPr>
+          <a:lstStyle/>
+          <a:p>
+            <a:r>
+              <a:rPr sz="2800" b="1">
+                <a:solidFill>
+                  <a:srgbClr val="2C5F2D"/>
+                </a:solidFill>
+                <a:latin typeface="Cambria"/>
+              </a:rPr>
+              <a:t>The Take-Home Sheet — the Daily Rhythm</a:t>
+            </a:r>
+          </a:p>
+        </p:txBody>
+      </p:sp>
+      <p:pic>
+        <p:nvPicPr>
+          <p:cNvPr id="4" name="Picture 3" descr="s20_part1.png"/>
+          <p:cNvPicPr>
+            <a:picLocks noChangeAspect="1"/>
+          </p:cNvPicPr>
+          <p:nvPr/>
+        </p:nvPicPr>
+        <p:blipFill>
+          <a:blip r:embed="rId2"/>
+          <a:stretch>
+            <a:fillRect/>
+          </a:stretch>
+        </p:blipFill>
+        <p:spPr>
+          <a:xfrm>
+            <a:off x="1798167" y="1463040"/>
+            <a:ext cx="8595360" cy="4039819"/>
+          </a:xfrm>
+          <a:prstGeom prst="rect">
+            <a:avLst/>
+          </a:prstGeom>
+          <a:ln w="12700">
+            <a:solidFill>
+              <a:srgbClr val="C8C8C8"/>
+            </a:solidFill>
+          </a:ln>
+        </p:spPr>
+      </p:pic>
+      <p:sp>
+        <p:nvSpPr>
+          <p:cNvPr id="5" name="TextBox 4"/>
+          <p:cNvSpPr txBox="1"/>
+          <p:nvPr/>
+        </p:nvSpPr>
+        <p:spPr>
+          <a:xfrm>
+            <a:off x="822960" y="6355080"/>
+            <a:ext cx="10515600" cy="411480"/>
+          </a:xfrm>
+          <a:prstGeom prst="rect">
+            <a:avLst/>
+          </a:prstGeom>
+          <a:noFill/>
+        </p:spPr>
+        <p:txBody>
+          <a:bodyPr wrap="square">
+            <a:spAutoFit/>
+          </a:bodyPr>
+          <a:lstStyle/>
+          <a:p>
+            <a:r>
+              <a:rPr sz="1400" i="1">
+                <a:solidFill>
+                  <a:srgbClr val="595959"/>
+                </a:solidFill>
+                <a:latin typeface="Calibri"/>
+              </a:rPr>
+              <a:t>Handed out now — this is the sheet in your hands.</a:t>
+            </a:r>
+          </a:p>
+        </p:txBody>
+      </p:sp>
+      <p:sp>
+        <p:nvSpPr>
+          <p:cNvPr id="90" name="SlideNum"/>
+          <p:cNvSpPr txBox="1"/>
+          <p:nvPr/>
+        </p:nvSpPr>
+        <p:spPr>
+          <a:xfrm>
+            <a:off x="11384280" y="6446520"/>
+            <a:ext cx="640080" cy="292608"/>
+          </a:xfrm>
+          <a:prstGeom prst="rect">
+            <a:avLst/>
+          </a:prstGeom>
+          <a:noFill/>
+        </p:spPr>
+        <p:txBody>
+          <a:bodyPr wrap="none" lIns="0" tIns="0" rIns="45720" bIns="0" anchor="ctr"/>
+          <a:lstStyle/>
+          <a:p>
+            <a:pPr algn="r"/>
+            <a:r>
+              <a:t>253</a:t>
+            </a:r>
+            <a:endParaRPr sz="1000" b="1">
+              <a:solidFill>
+                <a:srgbClr val="7A8A6E"/>
+              </a:solidFill>
+              <a:latin typeface="Calibri"/>
+            </a:endParaRPr>
+          </a:p>
+        </p:txBody>
+      </p:sp>
+    </p:spTree>
+  </p:cSld>
+  <p:clrMapOvr>
+    <a:masterClrMapping/>
+  </p:clrMapOvr>
+</p:sld>
+</file>
+
+<file path=ppt/slides/slide16.xml><?xml version="1.0" encoding="utf-8"?>
+<p:sld xmlns:a="http://schemas.openxmlformats.org/drawingml/2006/main" xmlns:p="http://schemas.openxmlformats.org/presentationml/2006/main" xmlns:r="http://schemas.openxmlformats.org/officeDocument/2006/relationships">
+  <p:cSld>
+    <p:spTree>
+      <p:nvGrpSpPr>
+        <p:cNvPr id="1" name=""/>
+        <p:cNvGrpSpPr/>
+        <p:nvPr/>
+      </p:nvGrpSpPr>
+      <p:grpSpPr/>
+      <p:sp>
+        <p:nvSpPr>
+          <p:cNvPr id="2" name="Rectangle 1"/>
+          <p:cNvSpPr/>
+          <p:nvPr/>
+        </p:nvSpPr>
+        <p:spPr>
+          <a:xfrm>
+            <a:off x="0" y="0"/>
+            <a:ext cx="12192000" cy="6858000"/>
+          </a:xfrm>
+          <a:prstGeom prst="rect">
+            <a:avLst/>
+          </a:prstGeom>
+          <a:solidFill>
+            <a:srgbClr val="FFFFFF"/>
+          </a:solidFill>
+          <a:ln>
+            <a:noFill/>
+          </a:ln>
+          <a:effectLst/>
+        </p:spPr>
+        <p:style>
+          <a:lnRef idx="1">
+            <a:schemeClr val="accent1"/>
+          </a:lnRef>
+          <a:fillRef idx="3">
+            <a:schemeClr val="accent1"/>
+          </a:fillRef>
+          <a:effectRef idx="2">
+            <a:schemeClr val="accent1"/>
+          </a:effectRef>
+          <a:fontRef idx="minor">
+            <a:schemeClr val="lt1"/>
+          </a:fontRef>
+        </p:style>
+        <p:txBody>
+          <a:bodyPr rtlCol="0" anchor="ctr"/>
+          <a:lstStyle/>
+          <a:p>
+            <a:pPr algn="ctr"/>
+          </a:p>
+        </p:txBody>
+      </p:sp>
+      <p:sp>
+        <p:nvSpPr>
+          <p:cNvPr id="3" name="TextBox 2"/>
+          <p:cNvSpPr txBox="1"/>
+          <p:nvPr/>
+        </p:nvSpPr>
+        <p:spPr>
+          <a:xfrm>
+            <a:off x="822960" y="502920"/>
+            <a:ext cx="10515600" cy="822960"/>
+          </a:xfrm>
+          <a:prstGeom prst="rect">
+            <a:avLst/>
+          </a:prstGeom>
+          <a:noFill/>
+        </p:spPr>
+        <p:txBody>
+          <a:bodyPr wrap="square">
+            <a:spAutoFit/>
+          </a:bodyPr>
+          <a:lstStyle/>
+          <a:p>
+            <a:r>
+              <a:rPr sz="2800" b="1">
+                <a:solidFill>
+                  <a:srgbClr val="2C5F2D"/>
+                </a:solidFill>
+                <a:latin typeface="Cambria"/>
+              </a:rPr>
+              <a:t>The Take-Home Sheet — the Four Parts</a:t>
+            </a:r>
+          </a:p>
+        </p:txBody>
+      </p:sp>
+      <p:pic>
+        <p:nvPicPr>
+          <p:cNvPr id="4" name="Picture 3" descr="s20_part2.png"/>
+          <p:cNvPicPr>
+            <a:picLocks noChangeAspect="1"/>
+          </p:cNvPicPr>
+          <p:nvPr/>
+        </p:nvPicPr>
+        <p:blipFill>
+          <a:blip r:embed="rId2"/>
+          <a:stretch>
+            <a:fillRect/>
+          </a:stretch>
+        </p:blipFill>
+        <p:spPr>
+          <a:xfrm>
+            <a:off x="2258348" y="1463040"/>
+            <a:ext cx="7674998" cy="4709159"/>
+          </a:xfrm>
+          <a:prstGeom prst="rect">
+            <a:avLst/>
+          </a:prstGeom>
+          <a:ln w="12700">
+            <a:solidFill>
+              <a:srgbClr val="C8C8C8"/>
+            </a:solidFill>
+          </a:ln>
+        </p:spPr>
+      </p:pic>
+      <p:sp>
+        <p:nvSpPr>
+          <p:cNvPr id="5" name="TextBox 4"/>
+          <p:cNvSpPr txBox="1"/>
+          <p:nvPr/>
+        </p:nvSpPr>
+        <p:spPr>
+          <a:xfrm>
+            <a:off x="822960" y="6355080"/>
+            <a:ext cx="10515600" cy="411480"/>
+          </a:xfrm>
+          <a:prstGeom prst="rect">
+            <a:avLst/>
+          </a:prstGeom>
+          <a:noFill/>
+        </p:spPr>
+        <p:txBody>
+          <a:bodyPr wrap="square">
+            <a:spAutoFit/>
+          </a:bodyPr>
+          <a:lstStyle/>
+          <a:p>
+            <a:r>
+              <a:rPr sz="1400" i="1">
+                <a:solidFill>
+                  <a:srgbClr val="595959"/>
+                </a:solidFill>
+                <a:latin typeface="Calibri"/>
+              </a:rPr>
+              <a:t>One practice at a time — and a partner expecting you at the end of week one.</a:t>
+            </a:r>
+          </a:p>
+        </p:txBody>
+      </p:sp>
+      <p:sp>
+        <p:nvSpPr>
+          <p:cNvPr id="90" name="SlideNum"/>
+          <p:cNvSpPr txBox="1"/>
+          <p:nvPr/>
+        </p:nvSpPr>
+        <p:spPr>
+          <a:xfrm>
+            <a:off x="11384280" y="6446520"/>
+            <a:ext cx="640080" cy="292608"/>
+          </a:xfrm>
+          <a:prstGeom prst="rect">
+            <a:avLst/>
+          </a:prstGeom>
+          <a:noFill/>
+        </p:spPr>
+        <p:txBody>
+          <a:bodyPr wrap="none" lIns="0" tIns="0" rIns="45720" bIns="0" anchor="ctr"/>
+          <a:lstStyle/>
+          <a:p>
+            <a:pPr algn="r"/>
+            <a:r>
+              <a:t>253a</a:t>
+            </a:r>
+            <a:endParaRPr sz="1000" b="1">
+              <a:solidFill>
+                <a:srgbClr val="7A8A6E"/>
+              </a:solidFill>
+              <a:latin typeface="Calibri"/>
+            </a:endParaRPr>
+          </a:p>
+        </p:txBody>
+      </p:sp>
+    </p:spTree>
+  </p:cSld>
+  <p:clrMapOvr>
+    <a:masterClrMapping/>
+  </p:clrMapOvr>
+</p:sld>
+</file>
+
+<file path=ppt/slides/slide2.xml><?xml version="1.0" encoding="utf-8"?>
 <p:sld xmlns:a="http://schemas.openxmlformats.org/drawingml/2006/main" xmlns:r="http://schemas.openxmlformats.org/officeDocument/2006/relationships" xmlns:p="http://schemas.openxmlformats.org/presentationml/2006/main">
   <p:cSld>
     <p:spTree>
@@ -5104,7 +6821,7 @@
 </p:sld>
 </file>
 
-<file path=ppt/slides/slide245.xml><?xml version="1.0" encoding="utf-8"?>
+<file path=ppt/slides/slide3.xml><?xml version="1.0" encoding="utf-8"?>
 <p:sld xmlns:a="http://schemas.openxmlformats.org/drawingml/2006/main" xmlns:r="http://schemas.openxmlformats.org/officeDocument/2006/relationships" xmlns:p="http://schemas.openxmlformats.org/presentationml/2006/main">
   <p:cSld>
     <p:spTree>
@@ -5530,7 +7247,7 @@
 </p:sld>
 </file>
 
-<file path=ppt/slides/slide246.xml><?xml version="1.0" encoding="utf-8"?>
+<file path=ppt/slides/slide4.xml><?xml version="1.0" encoding="utf-8"?>
 <p:sld xmlns:a="http://schemas.openxmlformats.org/drawingml/2006/main" xmlns:r="http://schemas.openxmlformats.org/officeDocument/2006/relationships" xmlns:p="http://schemas.openxmlformats.org/presentationml/2006/main">
   <p:cSld>
     <p:spTree>
@@ -5877,7 +7594,7 @@
 </p:sld>
 </file>
 
-<file path=ppt/slides/slide247.xml><?xml version="1.0" encoding="utf-8"?>
+<file path=ppt/slides/slide5.xml><?xml version="1.0" encoding="utf-8"?>
 <p:sld xmlns:a="http://schemas.openxmlformats.org/drawingml/2006/main" xmlns:r="http://schemas.openxmlformats.org/officeDocument/2006/relationships" xmlns:p="http://schemas.openxmlformats.org/presentationml/2006/main">
   <p:cSld>
     <p:spTree>
@@ -6229,7 +7946,7 @@
 </p:sld>
 </file>
 
-<file path=ppt/slides/slide248.xml><?xml version="1.0" encoding="utf-8"?>
+<file path=ppt/slides/slide6.xml><?xml version="1.0" encoding="utf-8"?>
 <p:sld xmlns:a="http://schemas.openxmlformats.org/drawingml/2006/main" xmlns:r="http://schemas.openxmlformats.org/officeDocument/2006/relationships" xmlns:p="http://schemas.openxmlformats.org/presentationml/2006/main">
   <p:cSld>
     <p:spTree>
@@ -6606,7 +8323,7 @@
 </p:sld>
 </file>
 
-<file path=ppt/slides/slide249.xml><?xml version="1.0" encoding="utf-8"?>
+<file path=ppt/slides/slide7.xml><?xml version="1.0" encoding="utf-8"?>
 <p:sld xmlns:a="http://schemas.openxmlformats.org/drawingml/2006/main" xmlns:r="http://schemas.openxmlformats.org/officeDocument/2006/relationships" xmlns:p="http://schemas.openxmlformats.org/presentationml/2006/main">
   <p:cSld>
     <p:spTree>
@@ -6999,7 +8716,7 @@
 </p:sld>
 </file>
 
-<file path=ppt/slides/slide250.xml><?xml version="1.0" encoding="utf-8"?>
+<file path=ppt/slides/slide8.xml><?xml version="1.0" encoding="utf-8"?>
 <p:sld xmlns:a="http://schemas.openxmlformats.org/drawingml/2006/main" xmlns:r="http://schemas.openxmlformats.org/officeDocument/2006/relationships" xmlns:p="http://schemas.openxmlformats.org/presentationml/2006/main">
   <p:cSld>
     <p:spTree>
@@ -7296,7 +9013,7 @@
 </p:sld>
 </file>
 
-<file path=ppt/slides/slide251.xml><?xml version="1.0" encoding="utf-8"?>
+<file path=ppt/slides/slide9.xml><?xml version="1.0" encoding="utf-8"?>
 <p:sld xmlns:a="http://schemas.openxmlformats.org/drawingml/2006/main" xmlns:r="http://schemas.openxmlformats.org/officeDocument/2006/relationships" xmlns:p="http://schemas.openxmlformats.org/presentationml/2006/main">
   <p:cSld>
     <p:spTree>
@@ -7550,1190 +9267,6 @@
             <a:pPr algn="r"/>
             <a:r>
               <a:t>251</a:t>
-            </a:r>
-            <a:endParaRPr sz="1000" b="1">
-              <a:solidFill>
-                <a:srgbClr val="7A8A6E"/>
-              </a:solidFill>
-              <a:latin typeface="Calibri"/>
-            </a:endParaRPr>
-          </a:p>
-        </p:txBody>
-      </p:sp>
-    </p:spTree>
-  </p:cSld>
-  <p:clrMapOvr>
-    <a:masterClrMapping/>
-  </p:clrMapOvr>
-</p:sld>
-</file>
-
-<file path=ppt/slides/slide252.xml><?xml version="1.0" encoding="utf-8"?>
-<p:sld xmlns:a="http://schemas.openxmlformats.org/drawingml/2006/main" xmlns:r="http://schemas.openxmlformats.org/officeDocument/2006/relationships" xmlns:p="http://schemas.openxmlformats.org/presentationml/2006/main">
-  <p:cSld>
-    <p:spTree>
-      <p:nvGrpSpPr>
-        <p:cNvPr id="1" name=""/>
-        <p:cNvGrpSpPr/>
-        <p:nvPr/>
-      </p:nvGrpSpPr>
-      <p:grpSpPr>
-        <a:xfrm>
-          <a:off x="0" y="0"/>
-          <a:ext cx="0" cy="0"/>
-          <a:chOff x="0" y="0"/>
-          <a:chExt cx="0" cy="0"/>
-        </a:xfrm>
-      </p:grpSpPr>
-      <p:sp>
-        <p:nvSpPr>
-          <p:cNvPr id="2" name="Rectangle 1"/>
-          <p:cNvSpPr/>
-          <p:nvPr/>
-        </p:nvSpPr>
-        <p:spPr>
-          <a:xfrm>
-            <a:off x="0" y="0"/>
-            <a:ext cx="12191695" cy="6858000"/>
-          </a:xfrm>
-          <a:prstGeom prst="rect">
-            <a:avLst/>
-          </a:prstGeom>
-          <a:solidFill>
-            <a:srgbClr val="FFFFFF"/>
-          </a:solidFill>
-          <a:ln>
-            <a:noFill/>
-          </a:ln>
-        </p:spPr>
-        <p:txBody>
-          <a:bodyPr/>
-          <a:lstStyle/>
-          <a:p>
-            <a:endParaRPr/>
-          </a:p>
-        </p:txBody>
-      </p:sp>
-      <p:sp>
-        <p:nvSpPr>
-          <p:cNvPr id="3" name="TextBox 2"/>
-          <p:cNvSpPr txBox="1"/>
-          <p:nvPr/>
-        </p:nvSpPr>
-        <p:spPr>
-          <a:xfrm>
-            <a:off x="822960" y="502920"/>
-            <a:ext cx="10515600" cy="822960"/>
-          </a:xfrm>
-          <a:prstGeom prst="rect">
-            <a:avLst/>
-          </a:prstGeom>
-          <a:noFill/>
-        </p:spPr>
-        <p:txBody>
-          <a:bodyPr wrap="square">
-            <a:spAutoFit/>
-          </a:bodyPr>
-          <a:lstStyle/>
-          <a:p>
-            <a:pPr algn="l">
-              <a:spcAft>
-                <a:spcPts val="600"/>
-              </a:spcAft>
-            </a:pPr>
-            <a:r>
-              <a:rPr sz="2800" b="1" i="0">
-                <a:solidFill>
-                  <a:srgbClr val="2C5F2D"/>
-                </a:solidFill>
-                <a:latin typeface="Cambria"/>
-              </a:rPr>
-              <a:t>The Post-Series Survey</a:t>
-            </a:r>
-          </a:p>
-        </p:txBody>
-      </p:sp>
-      <p:sp>
-        <p:nvSpPr>
-          <p:cNvPr id="4" name="TextBox 4"/>
-          <p:cNvSpPr txBox="1"/>
-          <p:nvPr/>
-        </p:nvSpPr>
-        <p:spPr>
-          <a:xfrm>
-            <a:off x="822960" y="1554480"/>
-            <a:ext cx="10515600" cy="4892040"/>
-          </a:xfrm>
-          <a:prstGeom prst="rect">
-            <a:avLst/>
-          </a:prstGeom>
-          <a:noFill/>
-        </p:spPr>
-        <p:txBody>
-          <a:bodyPr wrap="square" lIns="91440" tIns="91440" rIns="91440" bIns="91440"/>
-          <a:lstStyle/>
-          <a:p>
-            <a:pPr marL="274320" indent="-274320">
-              <a:spcAft>
-                <a:spcPts val="900"/>
-              </a:spcAft>
-            </a:pPr>
-            <a:r>
-              <a:rPr sz="2800" b="1" i="0">
-                <a:solidFill>
-                  <a:srgbClr val="97BC62"/>
-                </a:solidFill>
-                <a:latin typeface="Calibri"/>
-              </a:rPr>
-              <a:t>•  </a:t>
-            </a:r>
-            <a:r>
-              <a:rPr sz="2800" b="0" i="0">
-                <a:solidFill>
-                  <a:srgbClr val="222B22"/>
-                </a:solidFill>
-                <a:latin typeface="Calibri"/>
-              </a:rPr>
-              <a:t>The bookend to orientation’s Pre-Series Survey. Home tonight; back in the bin at the Week 21 door.</a:t>
-            </a:r>
-          </a:p>
-          <a:p>
-            <a:pPr marL="274320" indent="-274320">
-              <a:spcAft>
-                <a:spcPts val="900"/>
-              </a:spcAft>
-            </a:pPr>
-            <a:r>
-              <a:rPr sz="2800" b="1" i="0">
-                <a:solidFill>
-                  <a:srgbClr val="97BC62"/>
-                </a:solidFill>
-                <a:latin typeface="Calibri"/>
-              </a:rPr>
-              <a:t>•  </a:t>
-            </a:r>
-            <a:r>
-              <a:rPr sz="2800" b="0" i="0">
-                <a:solidFill>
-                  <a:srgbClr val="222B22"/>
-                </a:solidFill>
-                <a:latin typeface="Calibri"/>
-              </a:rPr>
-              <a:t>This is a pilot — the first year this has ever run, anywhere. Your honest answers — especially the critical ones — are a gift to families you will never meet.</a:t>
-            </a:r>
-          </a:p>
-          <a:p>
-            <a:pPr marL="274320" indent="-274320">
-              <a:spcAft>
-                <a:spcPts val="900"/>
-              </a:spcAft>
-            </a:pPr>
-            <a:r>
-              <a:rPr sz="2800" b="1" i="0">
-                <a:solidFill>
-                  <a:srgbClr val="97BC62"/>
-                </a:solidFill>
-                <a:latin typeface="Calibri"/>
-              </a:rPr>
-              <a:t>•  </a:t>
-            </a:r>
-            <a:r>
-              <a:rPr sz="2800" b="0" i="0">
-                <a:solidFill>
-                  <a:srgbClr val="222B22"/>
-                </a:solidFill>
-                <a:latin typeface="Calibri"/>
-              </a:rPr>
-              <a:t>The same covenant covers it: no scores, no grades, mirrors not levers</a:t>
-            </a:r>
-          </a:p>
-          <a:p>
-            <a:pPr marL="274320" indent="-274320">
-              <a:spcAft>
-                <a:spcPts val="900"/>
-              </a:spcAft>
-            </a:pPr>
-            <a:r>
-              <a:rPr sz="2800" b="1" i="0">
-                <a:solidFill>
-                  <a:srgbClr val="97BC62"/>
-                </a:solidFill>
-                <a:latin typeface="Calibri"/>
-              </a:rPr>
-              <a:t>•  </a:t>
-            </a:r>
-            <a:r>
-              <a:rPr sz="2800" b="0" i="0">
-                <a:solidFill>
-                  <a:srgbClr val="222B22"/>
-                </a:solidFill>
-                <a:latin typeface="Calibri"/>
-              </a:rPr>
-              <a:t>One per person — parents and teens each do their own. About twenty minutes. Signed or anonymous, your choice.</a:t>
-            </a:r>
-          </a:p>
-        </p:txBody>
-      </p:sp>
-      <p:sp>
-        <p:nvSpPr>
-          <p:cNvPr id="90" name="SlideNum"/>
-          <p:cNvSpPr txBox="1"/>
-          <p:nvPr/>
-        </p:nvSpPr>
-        <p:spPr>
-          <a:xfrm>
-            <a:off x="11384280" y="6446520"/>
-            <a:ext cx="640080" cy="292608"/>
-          </a:xfrm>
-          <a:prstGeom prst="rect">
-            <a:avLst/>
-          </a:prstGeom>
-          <a:noFill/>
-        </p:spPr>
-        <p:txBody>
-          <a:bodyPr wrap="none" lIns="0" tIns="0" rIns="45720" bIns="0" anchor="ctr"/>
-          <a:lstStyle/>
-          <a:p>
-            <a:pPr algn="r"/>
-            <a:r>
-              <a:t>252</a:t>
-            </a:r>
-            <a:endParaRPr sz="1000" b="1">
-              <a:solidFill>
-                <a:srgbClr val="7A8A6E"/>
-              </a:solidFill>
-              <a:latin typeface="Calibri"/>
-            </a:endParaRPr>
-          </a:p>
-        </p:txBody>
-      </p:sp>
-    </p:spTree>
-  </p:cSld>
-  <p:clrMapOvr>
-    <a:masterClrMapping/>
-  </p:clrMapOvr>
-</p:sld>
-</file>
-
-<file path=ppt/slides/slide253.xml><?xml version="1.0" encoding="utf-8"?>
-<p:sld xmlns:a="http://schemas.openxmlformats.org/drawingml/2006/main" xmlns:r="http://schemas.openxmlformats.org/officeDocument/2006/relationships" xmlns:p="http://schemas.openxmlformats.org/presentationml/2006/main">
-  <p:cSld>
-    <p:spTree>
-      <p:nvGrpSpPr>
-        <p:cNvPr id="1" name=""/>
-        <p:cNvGrpSpPr/>
-        <p:nvPr/>
-      </p:nvGrpSpPr>
-      <p:grpSpPr>
-        <a:xfrm>
-          <a:off x="0" y="0"/>
-          <a:ext cx="0" cy="0"/>
-          <a:chOff x="0" y="0"/>
-          <a:chExt cx="0" cy="0"/>
-        </a:xfrm>
-      </p:grpSpPr>
-      <p:sp>
-        <p:nvSpPr>
-          <p:cNvPr id="2" name="Rectangle 1"/>
-          <p:cNvSpPr/>
-          <p:nvPr/>
-        </p:nvSpPr>
-        <p:spPr>
-          <a:xfrm>
-            <a:off x="0" y="0"/>
-            <a:ext cx="12191695" cy="6858000"/>
-          </a:xfrm>
-          <a:prstGeom prst="rect">
-            <a:avLst/>
-          </a:prstGeom>
-          <a:solidFill>
-            <a:srgbClr val="FFFFFF"/>
-          </a:solidFill>
-          <a:ln>
-            <a:noFill/>
-          </a:ln>
-        </p:spPr>
-        <p:txBody>
-          <a:bodyPr/>
-          <a:lstStyle/>
-          <a:p>
-            <a:endParaRPr/>
-          </a:p>
-        </p:txBody>
-      </p:sp>
-      <p:sp>
-        <p:nvSpPr>
-          <p:cNvPr id="3" name="TextBox 2"/>
-          <p:cNvSpPr txBox="1"/>
-          <p:nvPr/>
-        </p:nvSpPr>
-        <p:spPr>
-          <a:xfrm>
-            <a:off x="822960" y="502920"/>
-            <a:ext cx="10515600" cy="822960"/>
-          </a:xfrm>
-          <a:prstGeom prst="rect">
-            <a:avLst/>
-          </a:prstGeom>
-          <a:noFill/>
-        </p:spPr>
-        <p:txBody>
-          <a:bodyPr wrap="square">
-            <a:spAutoFit/>
-          </a:bodyPr>
-          <a:lstStyle/>
-          <a:p>
-            <a:pPr algn="l">
-              <a:spcAft>
-                <a:spcPts val="600"/>
-              </a:spcAft>
-            </a:pPr>
-            <a:r>
-              <a:rPr sz="2800" b="1" i="0">
-                <a:solidFill>
-                  <a:srgbClr val="2C5F2D"/>
-                </a:solidFill>
-                <a:latin typeface="Cambria"/>
-              </a:rPr>
-              <a:t>Your Take-Home Card — This Session’s Practice</a:t>
-            </a:r>
-          </a:p>
-        </p:txBody>
-      </p:sp>
-      <p:sp>
-        <p:nvSpPr>
-          <p:cNvPr id="90" name="SlideNum"/>
-          <p:cNvSpPr txBox="1"/>
-          <p:nvPr/>
-        </p:nvSpPr>
-        <p:spPr>
-          <a:xfrm>
-            <a:off x="11384280" y="6446520"/>
-            <a:ext cx="640080" cy="292608"/>
-          </a:xfrm>
-          <a:prstGeom prst="rect">
-            <a:avLst/>
-          </a:prstGeom>
-          <a:noFill/>
-        </p:spPr>
-        <p:txBody>
-          <a:bodyPr wrap="none" lIns="0" tIns="0" rIns="45720" bIns="0" anchor="ctr"/>
-          <a:lstStyle/>
-          <a:p>
-            <a:pPr algn="r"/>
-            <a:r>
-              <a:t>253</a:t>
-            </a:r>
-            <a:endParaRPr sz="1000" b="1">
-              <a:solidFill>
-                <a:srgbClr val="7A8A6E"/>
-              </a:solidFill>
-              <a:latin typeface="Calibri"/>
-            </a:endParaRPr>
-          </a:p>
-        </p:txBody>
-      </p:sp>
-      <p:pic>
-        <p:nvPicPr>
-          <p:cNvPr id="270" name="CardImage" descr="the Week 20 check-off card, as handed out"/>
-          <p:cNvPicPr>
-            <a:picLocks noChangeAspect="1"/>
-          </p:cNvPicPr>
-          <p:nvPr/>
-        </p:nvPicPr>
-        <p:blipFill>
-          <a:blip r:embed="rId3"/>
-          <a:stretch>
-            <a:fillRect/>
-          </a:stretch>
-        </p:blipFill>
-        <p:spPr>
-          <a:xfrm>
-            <a:off x="1158087" y="1554480"/>
-            <a:ext cx="9875520" cy="4060657"/>
-          </a:xfrm>
-          <a:prstGeom prst="rect">
-            <a:avLst/>
-          </a:prstGeom>
-          <a:ln w="76200">
-            <a:solidFill>
-              <a:srgbClr val="FFFFFF"/>
-            </a:solidFill>
-          </a:ln>
-          <a:effectLst>
-            <a:outerShdw blurRad="63500" dist="25400" dir="5400000" rotWithShape="0">
-              <a:srgbClr val="000000">
-                <a:alpha val="35000"/>
-              </a:srgbClr>
-            </a:outerShdw>
-          </a:effectLst>
-        </p:spPr>
-      </p:pic>
-      <p:sp>
-        <p:nvSpPr>
-          <p:cNvPr id="271" name="Caption"/>
-          <p:cNvSpPr txBox="1"/>
-          <p:nvPr/>
-        </p:nvSpPr>
-        <p:spPr>
-          <a:xfrm>
-            <a:off x="822960" y="5798017"/>
-            <a:ext cx="10515600" cy="457200"/>
-          </a:xfrm>
-          <a:prstGeom prst="rect">
-            <a:avLst/>
-          </a:prstGeom>
-          <a:noFill/>
-        </p:spPr>
-        <p:txBody>
-          <a:bodyPr wrap="square"/>
-          <a:lstStyle/>
-          <a:p>
-            <a:pPr algn="ctr"/>
-            <a:r>
-              <a:rPr sz="1800" b="0" i="1">
-                <a:solidFill>
-                  <a:srgbClr val="222B22"/>
-                </a:solidFill>
-                <a:latin typeface="Calibri"/>
-              </a:rPr>
-              <a:t>Handed out now — fridge, mirror, journal pocket.</a:t>
-            </a:r>
-          </a:p>
-        </p:txBody>
-      </p:sp>
-    </p:spTree>
-  </p:cSld>
-  <p:clrMapOvr>
-    <a:masterClrMapping/>
-  </p:clrMapOvr>
-</p:sld>
-</file>
-
-<file path=ppt/slides/slide254.xml><?xml version="1.0" encoding="utf-8"?>
-<p:sld xmlns:a="http://schemas.openxmlformats.org/drawingml/2006/main" xmlns:r="http://schemas.openxmlformats.org/officeDocument/2006/relationships" xmlns:p="http://schemas.openxmlformats.org/presentationml/2006/main">
-  <p:cSld>
-    <p:spTree>
-      <p:nvGrpSpPr>
-        <p:cNvPr id="1" name=""/>
-        <p:cNvGrpSpPr/>
-        <p:nvPr/>
-      </p:nvGrpSpPr>
-      <p:grpSpPr>
-        <a:xfrm>
-          <a:off x="0" y="0"/>
-          <a:ext cx="0" cy="0"/>
-          <a:chOff x="0" y="0"/>
-          <a:chExt cx="0" cy="0"/>
-        </a:xfrm>
-      </p:grpSpPr>
-      <p:sp>
-        <p:nvSpPr>
-          <p:cNvPr id="2" name="Rectangle 1"/>
-          <p:cNvSpPr/>
-          <p:nvPr/>
-        </p:nvSpPr>
-        <p:spPr>
-          <a:xfrm>
-            <a:off x="0" y="0"/>
-            <a:ext cx="12191695" cy="6858000"/>
-          </a:xfrm>
-          <a:prstGeom prst="rect">
-            <a:avLst/>
-          </a:prstGeom>
-          <a:solidFill>
-            <a:srgbClr val="FFFFFF"/>
-          </a:solidFill>
-          <a:ln>
-            <a:noFill/>
-          </a:ln>
-        </p:spPr>
-        <p:txBody>
-          <a:bodyPr/>
-          <a:lstStyle/>
-          <a:p>
-            <a:endParaRPr/>
-          </a:p>
-        </p:txBody>
-      </p:sp>
-      <p:sp>
-        <p:nvSpPr>
-          <p:cNvPr id="3" name="TextBox 2"/>
-          <p:cNvSpPr txBox="1"/>
-          <p:nvPr/>
-        </p:nvSpPr>
-        <p:spPr>
-          <a:xfrm>
-            <a:off x="822960" y="502920"/>
-            <a:ext cx="10515600" cy="822960"/>
-          </a:xfrm>
-          <a:prstGeom prst="rect">
-            <a:avLst/>
-          </a:prstGeom>
-          <a:noFill/>
-        </p:spPr>
-        <p:txBody>
-          <a:bodyPr wrap="square">
-            <a:spAutoFit/>
-          </a:bodyPr>
-          <a:lstStyle/>
-          <a:p>
-            <a:pPr algn="l">
-              <a:spcAft>
-                <a:spcPts val="600"/>
-              </a:spcAft>
-            </a:pPr>
-            <a:r>
-              <a:rPr sz="2800" b="1" i="0">
-                <a:solidFill>
-                  <a:srgbClr val="2C5F2D"/>
-                </a:solidFill>
-                <a:latin typeface="Cambria"/>
-              </a:rPr>
-              <a:t>The Leader Feedback Round</a:t>
-            </a:r>
-          </a:p>
-        </p:txBody>
-      </p:sp>
-      <p:sp>
-        <p:nvSpPr>
-          <p:cNvPr id="4" name="TextBox 4"/>
-          <p:cNvSpPr txBox="1"/>
-          <p:nvPr/>
-        </p:nvSpPr>
-        <p:spPr>
-          <a:xfrm>
-            <a:off x="822960" y="1554480"/>
-            <a:ext cx="6675120" cy="4892040"/>
-          </a:xfrm>
-          <a:prstGeom prst="rect">
-            <a:avLst/>
-          </a:prstGeom>
-          <a:noFill/>
-        </p:spPr>
-        <p:txBody>
-          <a:bodyPr wrap="square" lIns="91440" tIns="91440" rIns="91440" bIns="91440"/>
-          <a:lstStyle/>
-          <a:p>
-            <a:pPr marL="274320" indent="-274320">
-              <a:spcAft>
-                <a:spcPts val="900"/>
-              </a:spcAft>
-            </a:pPr>
-            <a:r>
-              <a:rPr sz="2800" b="1" i="0">
-                <a:solidFill>
-                  <a:srgbClr val="97BC62"/>
-                </a:solidFill>
-                <a:latin typeface="Calibri"/>
-              </a:rPr>
-              <a:t>•  </a:t>
-            </a:r>
-            <a:r>
-              <a:rPr sz="2800" b="0" i="0">
-                <a:solidFill>
-                  <a:srgbClr val="222B22"/>
-                </a:solidFill>
-                <a:latin typeface="Calibri"/>
-              </a:rPr>
-              <a:t>Two rounds, same as every session — the container holder first, then the content presenter: three things each</a:t>
-            </a:r>
-          </a:p>
-          <a:p>
-            <a:pPr marL="685800" indent="-274320">
-              <a:spcAft>
-                <a:spcPts val="700"/>
-              </a:spcAft>
-            </a:pPr>
-            <a:r>
-              <a:rPr sz="2000" b="1" i="0">
-                <a:solidFill>
-                  <a:srgbClr val="97BC62"/>
-                </a:solidFill>
-                <a:latin typeface="Calibri"/>
-              </a:rPr>
-              <a:t>–  </a:t>
-            </a:r>
-            <a:r>
-              <a:rPr sz="2000" b="0" i="1">
-                <a:solidFill>
-                  <a:srgbClr val="222B22"/>
-                </a:solidFill>
-                <a:latin typeface="Calibri"/>
-              </a:rPr>
-              <a:t>“What I think went well tonight: ______”</a:t>
-            </a:r>
-          </a:p>
-          <a:p>
-            <a:pPr marL="685800" indent="-274320">
-              <a:spcAft>
-                <a:spcPts val="700"/>
-              </a:spcAft>
-            </a:pPr>
-            <a:r>
-              <a:rPr sz="2000" b="1" i="0">
-                <a:solidFill>
-                  <a:srgbClr val="97BC62"/>
-                </a:solidFill>
-                <a:latin typeface="Calibri"/>
-              </a:rPr>
-              <a:t>–  </a:t>
-            </a:r>
-            <a:r>
-              <a:rPr sz="2000" b="0" i="1">
-                <a:solidFill>
-                  <a:srgbClr val="222B22"/>
-                </a:solidFill>
-                <a:latin typeface="Calibri"/>
-              </a:rPr>
-              <a:t>“What I’d do differently next time: ______”</a:t>
-            </a:r>
-          </a:p>
-          <a:p>
-            <a:pPr marL="685800" indent="-274320">
-              <a:spcAft>
-                <a:spcPts val="700"/>
-              </a:spcAft>
-            </a:pPr>
-            <a:r>
-              <a:rPr sz="2000" b="1" i="0">
-                <a:solidFill>
-                  <a:srgbClr val="97BC62"/>
-                </a:solidFill>
-                <a:latin typeface="Calibri"/>
-              </a:rPr>
-              <a:t>–  </a:t>
-            </a:r>
-            <a:r>
-              <a:rPr sz="2000" b="0" i="1">
-                <a:solidFill>
-                  <a:srgbClr val="222B22"/>
-                </a:solidFill>
-                <a:latin typeface="Calibri"/>
-              </a:rPr>
-              <a:t>“If I were to teach tonight’s process to someone, I would tell them: ______”</a:t>
-            </a:r>
-          </a:p>
-          <a:p>
-            <a:pPr marL="274320" indent="-274320">
-              <a:spcAft>
-                <a:spcPts val="900"/>
-              </a:spcAft>
-            </a:pPr>
-            <a:r>
-              <a:rPr sz="2800" b="1" i="0">
-                <a:solidFill>
-                  <a:srgbClr val="97BC62"/>
-                </a:solidFill>
-                <a:latin typeface="Calibri"/>
-              </a:rPr>
-              <a:t>•  </a:t>
-            </a:r>
-            <a:r>
-              <a:rPr sz="2800" b="0" i="0">
-                <a:solidFill>
-                  <a:srgbClr val="222B22"/>
-                </a:solidFill>
-                <a:latin typeface="Calibri"/>
-              </a:rPr>
-              <a:t>Then the room — the same two questions about tonight</a:t>
-            </a:r>
-          </a:p>
-          <a:p>
-            <a:pPr marL="274320" indent="-274320">
-              <a:spcAft>
-                <a:spcPts val="900"/>
-              </a:spcAft>
-            </a:pPr>
-            <a:r>
-              <a:rPr sz="2800" b="1" i="0">
-                <a:solidFill>
-                  <a:srgbClr val="97BC62"/>
-                </a:solidFill>
-                <a:latin typeface="Calibri"/>
-              </a:rPr>
-              <a:t>•  </a:t>
-            </a:r>
-            <a:r>
-              <a:rPr sz="2800" b="0" i="0">
-                <a:solidFill>
-                  <a:srgbClr val="222B22"/>
-                </a:solidFill>
-                <a:latin typeface="Calibri"/>
-              </a:rPr>
-              <a:t>The leaders receive without defending — “thank you” is the whole response</a:t>
-            </a:r>
-          </a:p>
-        </p:txBody>
-      </p:sp>
-      <p:sp>
-        <p:nvSpPr>
-          <p:cNvPr id="90" name="SlideNum"/>
-          <p:cNvSpPr txBox="1"/>
-          <p:nvPr/>
-        </p:nvSpPr>
-        <p:spPr>
-          <a:xfrm>
-            <a:off x="11384280" y="6446520"/>
-            <a:ext cx="640080" cy="292608"/>
-          </a:xfrm>
-          <a:prstGeom prst="rect">
-            <a:avLst/>
-          </a:prstGeom>
-          <a:noFill/>
-        </p:spPr>
-        <p:txBody>
-          <a:bodyPr wrap="none" lIns="0" tIns="0" rIns="45720" bIns="0" anchor="ctr"/>
-          <a:lstStyle/>
-          <a:p>
-            <a:pPr algn="r"/>
-            <a:r>
-              <a:t>254</a:t>
-            </a:r>
-            <a:endParaRPr sz="1000" b="1">
-              <a:solidFill>
-                <a:srgbClr val="7A8A6E"/>
-              </a:solidFill>
-              <a:latin typeface="Calibri"/>
-            </a:endParaRPr>
-          </a:p>
-        </p:txBody>
-      </p:sp>
-      <p:pic>
-        <p:nvPicPr>
-          <p:cNvPr id="33" name="Picture 33" descr="compass on the trail - the weekly bearing check"/>
-          <p:cNvPicPr>
-            <a:picLocks noChangeAspect="1"/>
-          </p:cNvPicPr>
-          <p:nvPr/>
-        </p:nvPicPr>
-        <p:blipFill>
-          <a:blip r:embed="rId3"/>
-          <a:stretch>
-            <a:fillRect/>
-          </a:stretch>
-        </p:blipFill>
-        <p:spPr>
-          <a:xfrm>
-            <a:off x="8106160" y="1463040"/>
-            <a:ext cx="3259831" cy="4892040"/>
-          </a:xfrm>
-          <a:prstGeom prst="rect">
-            <a:avLst/>
-          </a:prstGeom>
-          <a:ln w="76200">
-            <a:solidFill>
-              <a:srgbClr val="FFFFFF"/>
-            </a:solidFill>
-          </a:ln>
-          <a:effectLst>
-            <a:outerShdw blurRad="63500" dist="25400" dir="5400000" rotWithShape="0">
-              <a:srgbClr val="000000">
-                <a:alpha val="35000"/>
-              </a:srgbClr>
-            </a:outerShdw>
-          </a:effectLst>
-        </p:spPr>
-      </p:pic>
-    </p:spTree>
-  </p:cSld>
-  <p:clrMapOvr>
-    <a:masterClrMapping/>
-  </p:clrMapOvr>
-</p:sld>
-</file>
-
-<file path=ppt/slides/slide255.xml><?xml version="1.0" encoding="utf-8"?>
-<p:sld xmlns:a="http://schemas.openxmlformats.org/drawingml/2006/main" xmlns:r="http://schemas.openxmlformats.org/officeDocument/2006/relationships" xmlns:p="http://schemas.openxmlformats.org/presentationml/2006/main">
-  <p:cSld>
-    <p:spTree>
-      <p:nvGrpSpPr>
-        <p:cNvPr id="1" name=""/>
-        <p:cNvGrpSpPr/>
-        <p:nvPr/>
-      </p:nvGrpSpPr>
-      <p:grpSpPr>
-        <a:xfrm>
-          <a:off x="0" y="0"/>
-          <a:ext cx="0" cy="0"/>
-          <a:chOff x="0" y="0"/>
-          <a:chExt cx="0" cy="0"/>
-        </a:xfrm>
-      </p:grpSpPr>
-      <p:sp>
-        <p:nvSpPr>
-          <p:cNvPr id="2" name="Rectangle 1"/>
-          <p:cNvSpPr/>
-          <p:nvPr/>
-        </p:nvSpPr>
-        <p:spPr>
-          <a:xfrm>
-            <a:off x="0" y="0"/>
-            <a:ext cx="12191695" cy="6858000"/>
-          </a:xfrm>
-          <a:prstGeom prst="rect">
-            <a:avLst/>
-          </a:prstGeom>
-          <a:solidFill>
-            <a:srgbClr val="FFFFFF"/>
-          </a:solidFill>
-          <a:ln>
-            <a:noFill/>
-          </a:ln>
-        </p:spPr>
-        <p:txBody>
-          <a:bodyPr/>
-          <a:lstStyle/>
-          <a:p>
-            <a:endParaRPr/>
-          </a:p>
-        </p:txBody>
-      </p:sp>
-      <p:sp>
-        <p:nvSpPr>
-          <p:cNvPr id="3" name="TextBox 2"/>
-          <p:cNvSpPr txBox="1"/>
-          <p:nvPr/>
-        </p:nvSpPr>
-        <p:spPr>
-          <a:xfrm>
-            <a:off x="822960" y="502920"/>
-            <a:ext cx="10515600" cy="822960"/>
-          </a:xfrm>
-          <a:prstGeom prst="rect">
-            <a:avLst/>
-          </a:prstGeom>
-          <a:noFill/>
-        </p:spPr>
-        <p:txBody>
-          <a:bodyPr wrap="square">
-            <a:spAutoFit/>
-          </a:bodyPr>
-          <a:lstStyle/>
-          <a:p>
-            <a:pPr algn="l">
-              <a:spcAft>
-                <a:spcPts val="600"/>
-              </a:spcAft>
-            </a:pPr>
-            <a:r>
-              <a:rPr sz="2800" b="1" i="0">
-                <a:solidFill>
-                  <a:srgbClr val="2C5F2D"/>
-                </a:solidFill>
-                <a:latin typeface="Cambria"/>
-              </a:rPr>
-              <a:t>Closing the Container + Aaronic Blessing</a:t>
-            </a:r>
-          </a:p>
-        </p:txBody>
-      </p:sp>
-      <p:sp>
-        <p:nvSpPr>
-          <p:cNvPr id="4" name="TextBox 4"/>
-          <p:cNvSpPr txBox="1"/>
-          <p:nvPr/>
-        </p:nvSpPr>
-        <p:spPr>
-          <a:xfrm>
-            <a:off x="822960" y="1600200"/>
-            <a:ext cx="5669280" cy="4572000"/>
-          </a:xfrm>
-          <a:prstGeom prst="rect">
-            <a:avLst/>
-          </a:prstGeom>
-          <a:noFill/>
-        </p:spPr>
-        <p:txBody>
-          <a:bodyPr wrap="square" lIns="91440" tIns="91440" rIns="91440" bIns="91440"/>
-          <a:lstStyle/>
-          <a:p>
-            <a:pPr marL="274320" indent="-274320">
-              <a:spcAft>
-                <a:spcPts val="900"/>
-              </a:spcAft>
-            </a:pPr>
-            <a:r>
-              <a:rPr sz="2200" b="1" i="0">
-                <a:solidFill>
-                  <a:srgbClr val="97BC62"/>
-                </a:solidFill>
-                <a:latin typeface="Calibri"/>
-              </a:rPr>
-              <a:t>•  </a:t>
-            </a:r>
-            <a:r>
-              <a:rPr sz="2200" b="0" i="0">
-                <a:solidFill>
-                  <a:srgbClr val="222B22"/>
-                </a:solidFill>
-                <a:latin typeface="Calibri"/>
-              </a:rPr>
-              <a:t>We close the way we opened — the container, six steps:</a:t>
-            </a:r>
-          </a:p>
-          <a:p>
-            <a:pPr marL="685800" indent="-274320">
-              <a:spcAft>
-                <a:spcPts val="700"/>
-              </a:spcAft>
-            </a:pPr>
-            <a:r>
-              <a:rPr sz="2000" b="1" i="0">
-                <a:solidFill>
-                  <a:srgbClr val="97BC62"/>
-                </a:solidFill>
-                <a:latin typeface="Calibri"/>
-              </a:rPr>
-              <a:t>1   </a:t>
-            </a:r>
-            <a:r>
-              <a:rPr sz="2000" b="0" i="0">
-                <a:solidFill>
-                  <a:srgbClr val="222B22"/>
-                </a:solidFill>
-                <a:latin typeface="Calibri"/>
-              </a:rPr>
-              <a:t>Stand again — same circle, same posture as the open</a:t>
-            </a:r>
-          </a:p>
-          <a:p>
-            <a:pPr marL="685800" indent="-274320">
-              <a:spcAft>
-                <a:spcPts val="700"/>
-              </a:spcAft>
-            </a:pPr>
-            <a:r>
-              <a:rPr sz="2000" b="1" i="0">
-                <a:solidFill>
-                  <a:srgbClr val="97BC62"/>
-                </a:solidFill>
-                <a:latin typeface="Calibri"/>
-              </a:rPr>
-              <a:t>2   </a:t>
-            </a:r>
-            <a:r>
-              <a:rPr sz="2000" b="0" i="0">
-                <a:solidFill>
-                  <a:srgbClr val="222B22"/>
-                </a:solidFill>
-                <a:latin typeface="Calibri"/>
-              </a:rPr>
-              <a:t>One-word landing — compare it to your opening word</a:t>
-            </a:r>
-          </a:p>
-          <a:p>
-            <a:pPr marL="685800" indent="-274320">
-              <a:spcAft>
-                <a:spcPts val="700"/>
-              </a:spcAft>
-            </a:pPr>
-            <a:r>
-              <a:rPr sz="2000" b="1" i="0">
-                <a:solidFill>
-                  <a:srgbClr val="97BC62"/>
-                </a:solidFill>
-                <a:latin typeface="Calibri"/>
-              </a:rPr>
-              <a:t>3   </a:t>
-            </a:r>
-            <a:r>
-              <a:rPr sz="2000" b="0" i="0">
-                <a:solidFill>
-                  <a:srgbClr val="222B22"/>
-                </a:solidFill>
-                <a:latin typeface="Calibri"/>
-              </a:rPr>
-              <a:t>The one thing you are taking from tonight</a:t>
-            </a:r>
-          </a:p>
-          <a:p>
-            <a:pPr marL="685800" indent="-274320">
-              <a:spcAft>
-                <a:spcPts val="700"/>
-              </a:spcAft>
-            </a:pPr>
-            <a:r>
-              <a:rPr sz="2000" b="1" i="0">
-                <a:solidFill>
-                  <a:srgbClr val="97BC62"/>
-                </a:solidFill>
-                <a:latin typeface="Calibri"/>
-              </a:rPr>
-              <a:t>4   </a:t>
-            </a:r>
-            <a:r>
-              <a:rPr sz="2000" b="0" i="0">
-                <a:solidFill>
-                  <a:srgbClr val="222B22"/>
-                </a:solidFill>
-                <a:latin typeface="Calibri"/>
-              </a:rPr>
-              <a:t>The one practice — committed aloud, or modified to one you will actually keep</a:t>
-            </a:r>
-          </a:p>
-          <a:p>
-            <a:pPr marL="685800" indent="-274320">
-              <a:spcAft>
-                <a:spcPts val="700"/>
-              </a:spcAft>
-            </a:pPr>
-            <a:r>
-              <a:rPr sz="2000" b="1" i="0">
-                <a:solidFill>
-                  <a:srgbClr val="97BC62"/>
-                </a:solidFill>
-                <a:latin typeface="Calibri"/>
-              </a:rPr>
-              <a:t>5   </a:t>
-            </a:r>
-            <a:r>
-              <a:rPr sz="2000" b="0" i="0">
-                <a:solidFill>
-                  <a:srgbClr val="222B22"/>
-                </a:solidFill>
-                <a:latin typeface="Calibri"/>
-              </a:rPr>
-              <a:t>Blessings — specific, witnessed, short</a:t>
-            </a:r>
-          </a:p>
-          <a:p>
-            <a:pPr marL="685800" indent="-274320">
-              <a:spcAft>
-                <a:spcPts val="700"/>
-              </a:spcAft>
-            </a:pPr>
-            <a:r>
-              <a:rPr sz="2000" b="1" i="0">
-                <a:solidFill>
-                  <a:srgbClr val="97BC62"/>
-                </a:solidFill>
-                <a:latin typeface="Calibri"/>
-              </a:rPr>
-              <a:t>6   </a:t>
-            </a:r>
-            <a:r>
-              <a:rPr sz="2000" b="0" i="0">
-                <a:solidFill>
-                  <a:srgbClr val="222B22"/>
-                </a:solidFill>
-                <a:latin typeface="Calibri"/>
-              </a:rPr>
-              <a:t>Closing prayer — and the Aaronic blessing, spoken over each other, face to face</a:t>
-            </a:r>
-          </a:p>
-        </p:txBody>
-      </p:sp>
-      <p:sp>
-        <p:nvSpPr>
-          <p:cNvPr id="6" name="TextBox 6"/>
-          <p:cNvSpPr txBox="1"/>
-          <p:nvPr/>
-        </p:nvSpPr>
-        <p:spPr>
-          <a:xfrm>
-            <a:off x="6766560" y="1737360"/>
-            <a:ext cx="4663440" cy="2926080"/>
-          </a:xfrm>
-          <a:prstGeom prst="rect">
-            <a:avLst/>
-          </a:prstGeom>
-          <a:solidFill>
-            <a:srgbClr val="F1F6EC"/>
-          </a:solidFill>
-        </p:spPr>
-        <p:txBody>
-          <a:bodyPr wrap="square" lIns="91440" tIns="91440" rIns="91440" bIns="91440" anchor="ctr"/>
-          <a:lstStyle/>
-          <a:p>
-            <a:pPr>
-              <a:spcAft>
-                <a:spcPts val="900"/>
-              </a:spcAft>
-            </a:pPr>
-            <a:r>
-              <a:rPr sz="1200" b="1" i="0">
-                <a:solidFill>
-                  <a:srgbClr val="97BC62"/>
-                </a:solidFill>
-                <a:latin typeface="Calibri"/>
-              </a:rPr>
-              <a:t>THE AARONIC BLESSING — NUMBERS 6:24–26</a:t>
-            </a:r>
-          </a:p>
-          <a:p>
-            <a:pPr>
-              <a:spcAft>
-                <a:spcPts val="600"/>
-              </a:spcAft>
-            </a:pPr>
-            <a:r>
-              <a:rPr sz="2400" b="0" i="1">
-                <a:solidFill>
-                  <a:srgbClr val="222B22"/>
-                </a:solidFill>
-                <a:latin typeface="Cambria"/>
-              </a:rPr>
-              <a:t>“The Lord bless you and keep you;</a:t>
-            </a:r>
-          </a:p>
-          <a:p>
-            <a:pPr>
-              <a:spcAft>
-                <a:spcPts val="600"/>
-              </a:spcAft>
-            </a:pPr>
-            <a:r>
-              <a:rPr sz="2400" b="0" i="1">
-                <a:solidFill>
-                  <a:srgbClr val="222B22"/>
-                </a:solidFill>
-                <a:latin typeface="Cambria"/>
-              </a:rPr>
-              <a:t>the Lord make his face to shine upon you, and be gracious to you;</a:t>
-            </a:r>
-          </a:p>
-          <a:p>
-            <a:pPr>
-              <a:spcAft>
-                <a:spcPts val="600"/>
-              </a:spcAft>
-            </a:pPr>
-            <a:r>
-              <a:rPr sz="2400" b="0" i="1">
-                <a:solidFill>
-                  <a:srgbClr val="222B22"/>
-                </a:solidFill>
-                <a:latin typeface="Cambria"/>
-              </a:rPr>
-              <a:t>the Lord lift up his countenance upon you, and give you peace.”</a:t>
-            </a:r>
-          </a:p>
-        </p:txBody>
-      </p:sp>
-      <p:sp>
-        <p:nvSpPr>
-          <p:cNvPr id="90" name="SlideNum"/>
-          <p:cNvSpPr txBox="1"/>
-          <p:nvPr/>
-        </p:nvSpPr>
-        <p:spPr>
-          <a:xfrm>
-            <a:off x="11384280" y="6446520"/>
-            <a:ext cx="640080" cy="292608"/>
-          </a:xfrm>
-          <a:prstGeom prst="rect">
-            <a:avLst/>
-          </a:prstGeom>
-          <a:noFill/>
-        </p:spPr>
-        <p:txBody>
-          <a:bodyPr wrap="none" lIns="0" tIns="0" rIns="45720" bIns="0" anchor="ctr"/>
-          <a:lstStyle/>
-          <a:p>
-            <a:pPr algn="r"/>
-            <a:r>
-              <a:t>255</a:t>
             </a:r>
             <a:endParaRPr sz="1000" b="1">
               <a:solidFill>

--- a/_implementation-notes/evening-series/FotH Evening Session 20 Slides DRAFT v1.pptx
+++ b/_implementation-notes/evening-series/FotH Evening Session 20 Slides DRAFT v1.pptx
@@ -5074,7 +5074,7 @@
                 </a:solidFill>
                 <a:latin typeface="Cambria"/>
               </a:rPr>
-              <a:t>The Post-Series Survey</a:t>
+              <a:t>One Sentence, and the Testimony Gathering</a:t>
             </a:r>
           </a:p>
         </p:txBody>
@@ -5105,7 +5105,7 @@
               </a:spcAft>
             </a:pPr>
             <a:r>
-              <a:rPr sz="2800" b="1" i="0">
+              <a:rPr sz="2400" b="1" i="0">
                 <a:solidFill>
                   <a:srgbClr val="97BC62"/>
                 </a:solidFill>
@@ -5114,13 +5114,13 @@
               <a:t>•  </a:t>
             </a:r>
             <a:r>
-              <a:rPr sz="2800" b="0" i="0">
+              <a:rPr sz="2400" b="0" i="0">
                 <a:solidFill>
                   <a:srgbClr val="222B22"/>
                 </a:solidFill>
                 <a:latin typeface="Calibri"/>
               </a:rPr>
-              <a:t>The bookend to orientation’s Pre-Series Survey. Home tonight; back in the bin at the Week 21 door.</a:t>
+              <a:t>One sentence each — where He met you this year, or what you don’t want to lose. Just the sentence; no story around it. A parent starts.</a:t>
             </a:r>
           </a:p>
           <a:p>
@@ -5130,7 +5130,7 @@
               </a:spcAft>
             </a:pPr>
             <a:r>
-              <a:rPr sz="2800" b="1" i="0">
+              <a:rPr sz="2400" b="1" i="0">
                 <a:solidFill>
                   <a:srgbClr val="97BC62"/>
                 </a:solidFill>
@@ -5139,13 +5139,13 @@
               <a:t>•  </a:t>
             </a:r>
             <a:r>
-              <a:rPr sz="2800" b="0" i="0">
+              <a:rPr sz="2400" b="0" i="0">
                 <a:solidFill>
                   <a:srgbClr val="222B22"/>
                 </a:solidFill>
                 <a:latin typeface="Calibri"/>
               </a:rPr>
-              <a:t>This is a pilot — the first year this has ever run, anywhere. Your honest answers — especially the critical ones — are a gift to families you will never meet.</a:t>
+              <a:t>Pass-anytime holds — a pass gets the same nod a sentence gets</a:t>
             </a:r>
           </a:p>
           <a:p>
@@ -5155,7 +5155,7 @@
               </a:spcAft>
             </a:pPr>
             <a:r>
-              <a:rPr sz="2800" b="1" i="0">
+              <a:rPr sz="2400" b="1" i="0">
                 <a:solidFill>
                   <a:srgbClr val="97BC62"/>
                 </a:solidFill>
@@ -5164,13 +5164,13 @@
               <a:t>•  </a:t>
             </a:r>
             <a:r>
-              <a:rPr sz="2800" b="0" i="0">
+              <a:rPr sz="2400" b="0" i="0">
                 <a:solidFill>
                   <a:srgbClr val="222B22"/>
                 </a:solidFill>
                 <a:latin typeface="Calibri"/>
               </a:rPr>
-              <a:t>The same covenant covers it: no scores, no grades, mirrors not levers</a:t>
+              <a:t>Then one more invitation, genuinely optional: your sentence, read aloud at the sendings — Week 21 or Week 22</a:t>
             </a:r>
           </a:p>
           <a:p>
@@ -5180,7 +5180,7 @@
               </a:spcAft>
             </a:pPr>
             <a:r>
-              <a:rPr sz="2800" b="1" i="0">
+              <a:rPr sz="2400" b="1" i="0">
                 <a:solidFill>
                   <a:srgbClr val="97BC62"/>
                 </a:solidFill>
@@ -5189,13 +5189,38 @@
               <a:t>•  </a:t>
             </a:r>
             <a:r>
-              <a:rPr sz="2800" b="0" i="0">
+              <a:rPr sz="2400" b="0" i="0">
                 <a:solidFill>
                   <a:srgbClr val="222B22"/>
                 </a:solidFill>
                 <a:latin typeface="Calibri"/>
               </a:rPr>
-              <a:t>One per person — parents and teens each do their own. About twenty minutes. Signed or anonymous, your choice.</a:t>
+              <a:t>Written down exactly as you say it, read back for your nod — signed or anonymous, your choice</a:t>
+            </a:r>
+          </a:p>
+          <a:p>
+            <a:pPr marL="274320" indent="-274320">
+              <a:spcAft>
+                <a:spcPts val="900"/>
+              </a:spcAft>
+            </a:pPr>
+            <a:r>
+              <a:rPr sz="2400" b="1" i="0">
+                <a:solidFill>
+                  <a:srgbClr val="97BC62"/>
+                </a:solidFill>
+                <a:latin typeface="Calibri"/>
+              </a:rPr>
+              <a:t>•  </a:t>
+            </a:r>
+            <a:r>
+              <a:rPr sz="2400" b="0" i="0">
+                <a:solidFill>
+                  <a:srgbClr val="222B22"/>
+                </a:solidFill>
+                <a:latin typeface="Calibri"/>
+              </a:rPr>
+              <a:t>“An empty card is a complete answer.” Nothing written, nothing noted, and nobody will ask again.</a:t>
             </a:r>
           </a:p>
         </p:txBody>
@@ -5222,6 +5247,253 @@
           <a:p>
             <a:pPr algn="r"/>
             <a:r>
+              <a:t>251</a:t>
+            </a:r>
+            <a:endParaRPr sz="1000" b="1">
+              <a:solidFill>
+                <a:srgbClr val="7A8A6E"/>
+              </a:solidFill>
+              <a:latin typeface="Calibri"/>
+            </a:endParaRPr>
+          </a:p>
+        </p:txBody>
+      </p:sp>
+    </p:spTree>
+  </p:cSld>
+  <p:clrMapOvr>
+    <a:masterClrMapping/>
+  </p:clrMapOvr>
+</p:sld>
+</file>
+
+<file path=ppt/slides/slide11.xml><?xml version="1.0" encoding="utf-8"?>
+<p:sld xmlns:a="http://schemas.openxmlformats.org/drawingml/2006/main" xmlns:r="http://schemas.openxmlformats.org/officeDocument/2006/relationships" xmlns:p="http://schemas.openxmlformats.org/presentationml/2006/main">
+  <p:cSld>
+    <p:spTree>
+      <p:nvGrpSpPr>
+        <p:cNvPr id="1" name=""/>
+        <p:cNvGrpSpPr/>
+        <p:nvPr/>
+      </p:nvGrpSpPr>
+      <p:grpSpPr>
+        <a:xfrm>
+          <a:off x="0" y="0"/>
+          <a:ext cx="0" cy="0"/>
+          <a:chOff x="0" y="0"/>
+          <a:chExt cx="0" cy="0"/>
+        </a:xfrm>
+      </p:grpSpPr>
+      <p:sp>
+        <p:nvSpPr>
+          <p:cNvPr id="2" name="Rectangle 1"/>
+          <p:cNvSpPr/>
+          <p:nvPr/>
+        </p:nvSpPr>
+        <p:spPr>
+          <a:xfrm>
+            <a:off x="0" y="0"/>
+            <a:ext cx="12191695" cy="6858000"/>
+          </a:xfrm>
+          <a:prstGeom prst="rect">
+            <a:avLst/>
+          </a:prstGeom>
+          <a:solidFill>
+            <a:srgbClr val="FFFFFF"/>
+          </a:solidFill>
+          <a:ln>
+            <a:noFill/>
+          </a:ln>
+        </p:spPr>
+        <p:txBody>
+          <a:bodyPr/>
+          <a:lstStyle/>
+          <a:p>
+            <a:endParaRPr/>
+          </a:p>
+        </p:txBody>
+      </p:sp>
+      <p:sp>
+        <p:nvSpPr>
+          <p:cNvPr id="3" name="TextBox 2"/>
+          <p:cNvSpPr txBox="1"/>
+          <p:nvPr/>
+        </p:nvSpPr>
+        <p:spPr>
+          <a:xfrm>
+            <a:off x="822960" y="502920"/>
+            <a:ext cx="10515600" cy="822960"/>
+          </a:xfrm>
+          <a:prstGeom prst="rect">
+            <a:avLst/>
+          </a:prstGeom>
+          <a:noFill/>
+        </p:spPr>
+        <p:txBody>
+          <a:bodyPr wrap="square">
+            <a:spAutoFit/>
+          </a:bodyPr>
+          <a:lstStyle/>
+          <a:p>
+            <a:pPr algn="l">
+              <a:spcAft>
+                <a:spcPts val="600"/>
+              </a:spcAft>
+            </a:pPr>
+            <a:r>
+              <a:rPr sz="2800" b="1" i="0">
+                <a:solidFill>
+                  <a:srgbClr val="2C5F2D"/>
+                </a:solidFill>
+                <a:latin typeface="Cambria"/>
+              </a:rPr>
+              <a:t>The Post-Series Survey</a:t>
+            </a:r>
+          </a:p>
+        </p:txBody>
+      </p:sp>
+      <p:sp>
+        <p:nvSpPr>
+          <p:cNvPr id="4" name="TextBox 4"/>
+          <p:cNvSpPr txBox="1"/>
+          <p:nvPr/>
+        </p:nvSpPr>
+        <p:spPr>
+          <a:xfrm>
+            <a:off x="822960" y="1554480"/>
+            <a:ext cx="10515600" cy="4892040"/>
+          </a:xfrm>
+          <a:prstGeom prst="rect">
+            <a:avLst/>
+          </a:prstGeom>
+          <a:noFill/>
+        </p:spPr>
+        <p:txBody>
+          <a:bodyPr wrap="square" lIns="91440" tIns="91440" rIns="91440" bIns="91440"/>
+          <a:lstStyle/>
+          <a:p>
+            <a:pPr marL="274320" indent="-274320">
+              <a:spcAft>
+                <a:spcPts val="900"/>
+              </a:spcAft>
+            </a:pPr>
+            <a:r>
+              <a:rPr sz="2800" b="1" i="0">
+                <a:solidFill>
+                  <a:srgbClr val="97BC62"/>
+                </a:solidFill>
+                <a:latin typeface="Calibri"/>
+              </a:rPr>
+              <a:t>•  </a:t>
+            </a:r>
+            <a:r>
+              <a:rPr sz="2800" b="0" i="0">
+                <a:solidFill>
+                  <a:srgbClr val="222B22"/>
+                </a:solidFill>
+                <a:latin typeface="Calibri"/>
+              </a:rPr>
+              <a:t>The bookend to orientation’s Pre-Series Survey. Home tonight; back in the bin at the Week 21 door.</a:t>
+            </a:r>
+          </a:p>
+          <a:p>
+            <a:pPr marL="274320" indent="-274320">
+              <a:spcAft>
+                <a:spcPts val="900"/>
+              </a:spcAft>
+            </a:pPr>
+            <a:r>
+              <a:rPr sz="2800" b="1" i="0">
+                <a:solidFill>
+                  <a:srgbClr val="97BC62"/>
+                </a:solidFill>
+                <a:latin typeface="Calibri"/>
+              </a:rPr>
+              <a:t>•  </a:t>
+            </a:r>
+            <a:r>
+              <a:rPr sz="2800" b="0" i="0">
+                <a:solidFill>
+                  <a:srgbClr val="222B22"/>
+                </a:solidFill>
+                <a:latin typeface="Calibri"/>
+              </a:rPr>
+              <a:t>This is a pilot — the first year this has ever run, anywhere. Your honest answers — especially the critical ones — are a gift to families you will never meet.</a:t>
+            </a:r>
+          </a:p>
+          <a:p>
+            <a:pPr marL="274320" indent="-274320">
+              <a:spcAft>
+                <a:spcPts val="900"/>
+              </a:spcAft>
+            </a:pPr>
+            <a:r>
+              <a:rPr sz="2800" b="1" i="0">
+                <a:solidFill>
+                  <a:srgbClr val="97BC62"/>
+                </a:solidFill>
+                <a:latin typeface="Calibri"/>
+              </a:rPr>
+              <a:t>•  </a:t>
+            </a:r>
+            <a:r>
+              <a:rPr sz="2800" b="0" i="0">
+                <a:solidFill>
+                  <a:srgbClr val="222B22"/>
+                </a:solidFill>
+                <a:latin typeface="Calibri"/>
+              </a:rPr>
+              <a:t>The same covenant covers it: no scores, no grades, mirrors not levers</a:t>
+            </a:r>
+          </a:p>
+          <a:p>
+            <a:pPr marL="274320" indent="-274320">
+              <a:spcAft>
+                <a:spcPts val="900"/>
+              </a:spcAft>
+            </a:pPr>
+            <a:r>
+              <a:rPr sz="2800" b="1" i="0">
+                <a:solidFill>
+                  <a:srgbClr val="97BC62"/>
+                </a:solidFill>
+                <a:latin typeface="Calibri"/>
+              </a:rPr>
+              <a:t>•  </a:t>
+            </a:r>
+            <a:r>
+              <a:rPr sz="2800" b="0" i="0">
+                <a:solidFill>
+                  <a:srgbClr val="222B22"/>
+                </a:solidFill>
+                <a:latin typeface="Calibri"/>
+              </a:rPr>
+              <a:t>One per person — parents and teens each do their own. About twenty minutes. Signed or anonymous, your choice.</a:t>
+            </a:r>
+          </a:p>
+        </p:txBody>
+      </p:sp>
+      <p:sp>
+        <p:nvSpPr>
+          <p:cNvPr id="90" name="SlideNum"/>
+          <p:cNvSpPr txBox="1"/>
+          <p:nvPr/>
+        </p:nvSpPr>
+        <p:spPr>
+          <a:xfrm>
+            <a:off x="11384280" y="6446520"/>
+            <a:ext cx="640080" cy="292608"/>
+          </a:xfrm>
+          <a:prstGeom prst="rect">
+            <a:avLst/>
+          </a:prstGeom>
+          <a:noFill/>
+        </p:spPr>
+        <p:txBody>
+          <a:bodyPr wrap="none" lIns="0" tIns="0" rIns="45720" bIns="0" anchor="ctr"/>
+          <a:lstStyle/>
+          <a:p>
+            <a:pPr algn="r"/>
+            <a:r>
               <a:t>252</a:t>
             </a:r>
             <a:endParaRPr sz="1000" b="1">
@@ -5242,6 +5514,390 @@
 </file>
 
 <file path=ppt/slides/slide12.xml><?xml version="1.0" encoding="utf-8"?>
+<p:sld xmlns:a="http://schemas.openxmlformats.org/drawingml/2006/main" xmlns:p="http://schemas.openxmlformats.org/presentationml/2006/main" xmlns:r="http://schemas.openxmlformats.org/officeDocument/2006/relationships">
+  <p:cSld>
+    <p:spTree>
+      <p:nvGrpSpPr>
+        <p:cNvPr id="1" name=""/>
+        <p:cNvGrpSpPr/>
+        <p:nvPr/>
+      </p:nvGrpSpPr>
+      <p:grpSpPr/>
+      <p:sp>
+        <p:nvSpPr>
+          <p:cNvPr id="2" name="Rectangle 1"/>
+          <p:cNvSpPr/>
+          <p:nvPr/>
+        </p:nvSpPr>
+        <p:spPr>
+          <a:xfrm>
+            <a:off x="0" y="0"/>
+            <a:ext cx="12192000" cy="6858000"/>
+          </a:xfrm>
+          <a:prstGeom prst="rect">
+            <a:avLst/>
+          </a:prstGeom>
+          <a:solidFill>
+            <a:srgbClr val="FFFFFF"/>
+          </a:solidFill>
+          <a:ln>
+            <a:noFill/>
+          </a:ln>
+          <a:effectLst/>
+        </p:spPr>
+        <p:style>
+          <a:lnRef idx="1">
+            <a:schemeClr val="accent1"/>
+          </a:lnRef>
+          <a:fillRef idx="3">
+            <a:schemeClr val="accent1"/>
+          </a:fillRef>
+          <a:effectRef idx="2">
+            <a:schemeClr val="accent1"/>
+          </a:effectRef>
+          <a:fontRef idx="minor">
+            <a:schemeClr val="lt1"/>
+          </a:fontRef>
+        </p:style>
+        <p:txBody>
+          <a:bodyPr rtlCol="0" anchor="ctr"/>
+          <a:lstStyle/>
+          <a:p>
+            <a:pPr algn="ctr"/>
+          </a:p>
+        </p:txBody>
+      </p:sp>
+      <p:sp>
+        <p:nvSpPr>
+          <p:cNvPr id="3" name="TextBox 2"/>
+          <p:cNvSpPr txBox="1"/>
+          <p:nvPr/>
+        </p:nvSpPr>
+        <p:spPr>
+          <a:xfrm>
+            <a:off x="822960" y="502920"/>
+            <a:ext cx="10515600" cy="822960"/>
+          </a:xfrm>
+          <a:prstGeom prst="rect">
+            <a:avLst/>
+          </a:prstGeom>
+          <a:noFill/>
+        </p:spPr>
+        <p:txBody>
+          <a:bodyPr wrap="square">
+            <a:spAutoFit/>
+          </a:bodyPr>
+          <a:lstStyle/>
+          <a:p>
+            <a:r>
+              <a:rPr sz="2800" b="1">
+                <a:solidFill>
+                  <a:srgbClr val="2C5F2D"/>
+                </a:solidFill>
+                <a:latin typeface="Cambria"/>
+              </a:rPr>
+              <a:t>The Take-Home Sheet — the Daily Rhythm</a:t>
+            </a:r>
+          </a:p>
+        </p:txBody>
+      </p:sp>
+      <p:pic>
+        <p:nvPicPr>
+          <p:cNvPr id="4" name="Picture 3" descr="s20_part1.png"/>
+          <p:cNvPicPr>
+            <a:picLocks noChangeAspect="1"/>
+          </p:cNvPicPr>
+          <p:nvPr/>
+        </p:nvPicPr>
+        <p:blipFill>
+          <a:blip r:embed="rId2"/>
+          <a:stretch>
+            <a:fillRect/>
+          </a:stretch>
+        </p:blipFill>
+        <p:spPr>
+          <a:xfrm>
+            <a:off x="1798167" y="1463040"/>
+            <a:ext cx="8595360" cy="4039819"/>
+          </a:xfrm>
+          <a:prstGeom prst="rect">
+            <a:avLst/>
+          </a:prstGeom>
+          <a:ln w="12700">
+            <a:solidFill>
+              <a:srgbClr val="C8C8C8"/>
+            </a:solidFill>
+          </a:ln>
+        </p:spPr>
+      </p:pic>
+      <p:sp>
+        <p:nvSpPr>
+          <p:cNvPr id="5" name="TextBox 4"/>
+          <p:cNvSpPr txBox="1"/>
+          <p:nvPr/>
+        </p:nvSpPr>
+        <p:spPr>
+          <a:xfrm>
+            <a:off x="822960" y="6355080"/>
+            <a:ext cx="10515600" cy="411480"/>
+          </a:xfrm>
+          <a:prstGeom prst="rect">
+            <a:avLst/>
+          </a:prstGeom>
+          <a:noFill/>
+        </p:spPr>
+        <p:txBody>
+          <a:bodyPr wrap="square">
+            <a:spAutoFit/>
+          </a:bodyPr>
+          <a:lstStyle/>
+          <a:p>
+            <a:r>
+              <a:rPr sz="1400" i="1">
+                <a:solidFill>
+                  <a:srgbClr val="595959"/>
+                </a:solidFill>
+                <a:latin typeface="Calibri"/>
+              </a:rPr>
+              <a:t>Handed out now — this is the sheet in your hands.</a:t>
+            </a:r>
+          </a:p>
+        </p:txBody>
+      </p:sp>
+      <p:sp>
+        <p:nvSpPr>
+          <p:cNvPr id="90" name="SlideNum"/>
+          <p:cNvSpPr txBox="1"/>
+          <p:nvPr/>
+        </p:nvSpPr>
+        <p:spPr>
+          <a:xfrm>
+            <a:off x="11384280" y="6446520"/>
+            <a:ext cx="640080" cy="292608"/>
+          </a:xfrm>
+          <a:prstGeom prst="rect">
+            <a:avLst/>
+          </a:prstGeom>
+          <a:noFill/>
+        </p:spPr>
+        <p:txBody>
+          <a:bodyPr wrap="none" lIns="0" tIns="0" rIns="45720" bIns="0" anchor="ctr"/>
+          <a:lstStyle/>
+          <a:p>
+            <a:pPr algn="r"/>
+            <a:r>
+              <a:t>253</a:t>
+            </a:r>
+            <a:endParaRPr sz="1000" b="1">
+              <a:solidFill>
+                <a:srgbClr val="7A8A6E"/>
+              </a:solidFill>
+              <a:latin typeface="Calibri"/>
+            </a:endParaRPr>
+          </a:p>
+        </p:txBody>
+      </p:sp>
+    </p:spTree>
+  </p:cSld>
+  <p:clrMapOvr>
+    <a:masterClrMapping/>
+  </p:clrMapOvr>
+</p:sld>
+</file>
+
+<file path=ppt/slides/slide13.xml><?xml version="1.0" encoding="utf-8"?>
+<p:sld xmlns:a="http://schemas.openxmlformats.org/drawingml/2006/main" xmlns:p="http://schemas.openxmlformats.org/presentationml/2006/main" xmlns:r="http://schemas.openxmlformats.org/officeDocument/2006/relationships">
+  <p:cSld>
+    <p:spTree>
+      <p:nvGrpSpPr>
+        <p:cNvPr id="1" name=""/>
+        <p:cNvGrpSpPr/>
+        <p:nvPr/>
+      </p:nvGrpSpPr>
+      <p:grpSpPr/>
+      <p:sp>
+        <p:nvSpPr>
+          <p:cNvPr id="2" name="Rectangle 1"/>
+          <p:cNvSpPr/>
+          <p:nvPr/>
+        </p:nvSpPr>
+        <p:spPr>
+          <a:xfrm>
+            <a:off x="0" y="0"/>
+            <a:ext cx="12192000" cy="6858000"/>
+          </a:xfrm>
+          <a:prstGeom prst="rect">
+            <a:avLst/>
+          </a:prstGeom>
+          <a:solidFill>
+            <a:srgbClr val="FFFFFF"/>
+          </a:solidFill>
+          <a:ln>
+            <a:noFill/>
+          </a:ln>
+          <a:effectLst/>
+        </p:spPr>
+        <p:style>
+          <a:lnRef idx="1">
+            <a:schemeClr val="accent1"/>
+          </a:lnRef>
+          <a:fillRef idx="3">
+            <a:schemeClr val="accent1"/>
+          </a:fillRef>
+          <a:effectRef idx="2">
+            <a:schemeClr val="accent1"/>
+          </a:effectRef>
+          <a:fontRef idx="minor">
+            <a:schemeClr val="lt1"/>
+          </a:fontRef>
+        </p:style>
+        <p:txBody>
+          <a:bodyPr rtlCol="0" anchor="ctr"/>
+          <a:lstStyle/>
+          <a:p>
+            <a:pPr algn="ctr"/>
+          </a:p>
+        </p:txBody>
+      </p:sp>
+      <p:sp>
+        <p:nvSpPr>
+          <p:cNvPr id="3" name="TextBox 2"/>
+          <p:cNvSpPr txBox="1"/>
+          <p:nvPr/>
+        </p:nvSpPr>
+        <p:spPr>
+          <a:xfrm>
+            <a:off x="822960" y="502920"/>
+            <a:ext cx="10515600" cy="822960"/>
+          </a:xfrm>
+          <a:prstGeom prst="rect">
+            <a:avLst/>
+          </a:prstGeom>
+          <a:noFill/>
+        </p:spPr>
+        <p:txBody>
+          <a:bodyPr wrap="square">
+            <a:spAutoFit/>
+          </a:bodyPr>
+          <a:lstStyle/>
+          <a:p>
+            <a:r>
+              <a:rPr sz="2800" b="1">
+                <a:solidFill>
+                  <a:srgbClr val="2C5F2D"/>
+                </a:solidFill>
+                <a:latin typeface="Cambria"/>
+              </a:rPr>
+              <a:t>The Take-Home Sheet — the Four Parts</a:t>
+            </a:r>
+          </a:p>
+        </p:txBody>
+      </p:sp>
+      <p:pic>
+        <p:nvPicPr>
+          <p:cNvPr id="4" name="Picture 3" descr="s20_part2.png"/>
+          <p:cNvPicPr>
+            <a:picLocks noChangeAspect="1"/>
+          </p:cNvPicPr>
+          <p:nvPr/>
+        </p:nvPicPr>
+        <p:blipFill>
+          <a:blip r:embed="rId2"/>
+          <a:stretch>
+            <a:fillRect/>
+          </a:stretch>
+        </p:blipFill>
+        <p:spPr>
+          <a:xfrm>
+            <a:off x="2258348" y="1463040"/>
+            <a:ext cx="7674998" cy="4709159"/>
+          </a:xfrm>
+          <a:prstGeom prst="rect">
+            <a:avLst/>
+          </a:prstGeom>
+          <a:ln w="12700">
+            <a:solidFill>
+              <a:srgbClr val="C8C8C8"/>
+            </a:solidFill>
+          </a:ln>
+        </p:spPr>
+      </p:pic>
+      <p:sp>
+        <p:nvSpPr>
+          <p:cNvPr id="5" name="TextBox 4"/>
+          <p:cNvSpPr txBox="1"/>
+          <p:nvPr/>
+        </p:nvSpPr>
+        <p:spPr>
+          <a:xfrm>
+            <a:off x="822960" y="6355080"/>
+            <a:ext cx="10515600" cy="411480"/>
+          </a:xfrm>
+          <a:prstGeom prst="rect">
+            <a:avLst/>
+          </a:prstGeom>
+          <a:noFill/>
+        </p:spPr>
+        <p:txBody>
+          <a:bodyPr wrap="square">
+            <a:spAutoFit/>
+          </a:bodyPr>
+          <a:lstStyle/>
+          <a:p>
+            <a:r>
+              <a:rPr sz="1400" i="1">
+                <a:solidFill>
+                  <a:srgbClr val="595959"/>
+                </a:solidFill>
+                <a:latin typeface="Calibri"/>
+              </a:rPr>
+              <a:t>One practice at a time — and a partner expecting you at the end of week one.</a:t>
+            </a:r>
+          </a:p>
+        </p:txBody>
+      </p:sp>
+      <p:sp>
+        <p:nvSpPr>
+          <p:cNvPr id="90" name="SlideNum"/>
+          <p:cNvSpPr txBox="1"/>
+          <p:nvPr/>
+        </p:nvSpPr>
+        <p:spPr>
+          <a:xfrm>
+            <a:off x="11384280" y="6446520"/>
+            <a:ext cx="640080" cy="292608"/>
+          </a:xfrm>
+          <a:prstGeom prst="rect">
+            <a:avLst/>
+          </a:prstGeom>
+          <a:noFill/>
+        </p:spPr>
+        <p:txBody>
+          <a:bodyPr wrap="none" lIns="0" tIns="0" rIns="45720" bIns="0" anchor="ctr"/>
+          <a:lstStyle/>
+          <a:p>
+            <a:pPr algn="r"/>
+            <a:r>
+              <a:t>253a</a:t>
+            </a:r>
+            <a:endParaRPr sz="1000" b="1">
+              <a:solidFill>
+                <a:srgbClr val="7A8A6E"/>
+              </a:solidFill>
+              <a:latin typeface="Calibri"/>
+            </a:endParaRPr>
+          </a:p>
+        </p:txBody>
+      </p:sp>
+    </p:spTree>
+  </p:cSld>
+  <p:clrMapOvr>
+    <a:masterClrMapping/>
+  </p:clrMapOvr>
+</p:sld>
+</file>
+
+<file path=ppt/slides/slide14.xml><?xml version="1.0" encoding="utf-8"?>
 <p:sld xmlns:a="http://schemas.openxmlformats.org/drawingml/2006/main" xmlns:r="http://schemas.openxmlformats.org/officeDocument/2006/relationships" xmlns:p="http://schemas.openxmlformats.org/presentationml/2006/main">
   <p:cSld>
     <p:spTree>
@@ -5574,7 +6230,7 @@
 </p:sld>
 </file>
 
-<file path=ppt/slides/slide13.xml><?xml version="1.0" encoding="utf-8"?>
+<file path=ppt/slides/slide15.xml><?xml version="1.0" encoding="utf-8"?>
 <p:sld xmlns:a="http://schemas.openxmlformats.org/drawingml/2006/main" xmlns:r="http://schemas.openxmlformats.org/officeDocument/2006/relationships" xmlns:p="http://schemas.openxmlformats.org/presentationml/2006/main">
   <p:cSld>
     <p:spTree>
@@ -5965,595 +6621,6 @@
             <a:pPr algn="r"/>
             <a:r>
               <a:t>255</a:t>
-            </a:r>
-            <a:endParaRPr sz="1000" b="1">
-              <a:solidFill>
-                <a:srgbClr val="7A8A6E"/>
-              </a:solidFill>
-              <a:latin typeface="Calibri"/>
-            </a:endParaRPr>
-          </a:p>
-        </p:txBody>
-      </p:sp>
-    </p:spTree>
-  </p:cSld>
-  <p:clrMapOvr>
-    <a:masterClrMapping/>
-  </p:clrMapOvr>
-</p:sld>
-</file>
-
-<file path=ppt/slides/slide14.xml><?xml version="1.0" encoding="utf-8"?>
-<p:sld xmlns:a="http://schemas.openxmlformats.org/drawingml/2006/main" xmlns:p="http://schemas.openxmlformats.org/presentationml/2006/main" xmlns:r="http://schemas.openxmlformats.org/officeDocument/2006/relationships">
-  <p:cSld>
-    <p:spTree>
-      <p:nvGrpSpPr>
-        <p:cNvPr id="1" name=""/>
-        <p:cNvGrpSpPr/>
-        <p:nvPr/>
-      </p:nvGrpSpPr>
-      <p:grpSpPr/>
-      <p:sp>
-        <p:nvSpPr>
-          <p:cNvPr id="2" name="Rectangle 1"/>
-          <p:cNvSpPr/>
-          <p:nvPr/>
-        </p:nvSpPr>
-        <p:spPr>
-          <a:xfrm>
-            <a:off x="0" y="0"/>
-            <a:ext cx="12192000" cy="6858000"/>
-          </a:xfrm>
-          <a:prstGeom prst="rect">
-            <a:avLst/>
-          </a:prstGeom>
-          <a:solidFill>
-            <a:srgbClr val="FFFFFF"/>
-          </a:solidFill>
-          <a:ln>
-            <a:noFill/>
-          </a:ln>
-          <a:effectLst/>
-        </p:spPr>
-        <p:style>
-          <a:lnRef idx="1">
-            <a:schemeClr val="accent1"/>
-          </a:lnRef>
-          <a:fillRef idx="3">
-            <a:schemeClr val="accent1"/>
-          </a:fillRef>
-          <a:effectRef idx="2">
-            <a:schemeClr val="accent1"/>
-          </a:effectRef>
-          <a:fontRef idx="minor">
-            <a:schemeClr val="lt1"/>
-          </a:fontRef>
-        </p:style>
-        <p:txBody>
-          <a:bodyPr rtlCol="0" anchor="ctr"/>
-          <a:lstStyle/>
-          <a:p>
-            <a:pPr algn="ctr"/>
-          </a:p>
-        </p:txBody>
-      </p:sp>
-      <p:sp>
-        <p:nvSpPr>
-          <p:cNvPr id="3" name="TextBox 2"/>
-          <p:cNvSpPr txBox="1"/>
-          <p:nvPr/>
-        </p:nvSpPr>
-        <p:spPr>
-          <a:xfrm>
-            <a:off x="822960" y="502920"/>
-            <a:ext cx="10515600" cy="822960"/>
-          </a:xfrm>
-          <a:prstGeom prst="rect">
-            <a:avLst/>
-          </a:prstGeom>
-          <a:noFill/>
-        </p:spPr>
-        <p:txBody>
-          <a:bodyPr wrap="square">
-            <a:spAutoFit/>
-          </a:bodyPr>
-          <a:lstStyle/>
-          <a:p>
-            <a:r>
-              <a:rPr sz="2800" b="1">
-                <a:solidFill>
-                  <a:srgbClr val="2C5F2D"/>
-                </a:solidFill>
-                <a:latin typeface="Cambria"/>
-              </a:rPr>
-              <a:t>Where We Are — the Four Connects</a:t>
-            </a:r>
-          </a:p>
-        </p:txBody>
-      </p:sp>
-      <p:pic>
-        <p:nvPicPr>
-          <p:cNvPr id="4" name="Picture 3" descr="four-connects.png"/>
-          <p:cNvPicPr>
-            <a:picLocks noChangeAspect="1"/>
-          </p:cNvPicPr>
-          <p:nvPr/>
-        </p:nvPicPr>
-        <p:blipFill>
-          <a:blip r:embed="rId2"/>
-          <a:stretch>
-            <a:fillRect/>
-          </a:stretch>
-        </p:blipFill>
-        <p:spPr>
-          <a:xfrm>
-            <a:off x="932688" y="1645920"/>
-            <a:ext cx="10332720" cy="3708663"/>
-          </a:xfrm>
-          <a:prstGeom prst="rect">
-            <a:avLst/>
-          </a:prstGeom>
-        </p:spPr>
-      </p:pic>
-      <p:sp>
-        <p:nvSpPr>
-          <p:cNvPr id="5" name="TextBox 4"/>
-          <p:cNvSpPr txBox="1"/>
-          <p:nvPr/>
-        </p:nvSpPr>
-        <p:spPr>
-          <a:xfrm>
-            <a:off x="822960" y="5623560"/>
-            <a:ext cx="10515600" cy="914400"/>
-          </a:xfrm>
-          <a:prstGeom prst="rect">
-            <a:avLst/>
-          </a:prstGeom>
-          <a:noFill/>
-        </p:spPr>
-        <p:txBody>
-          <a:bodyPr wrap="square">
-            <a:spAutoFit/>
-          </a:bodyPr>
-          <a:lstStyle/>
-          <a:p>
-            <a:r>
-              <a:rPr sz="1800" b="0">
-                <a:solidFill>
-                  <a:srgbClr val="222B22"/>
-                </a:solidFill>
-                <a:latin typeface="Calibri"/>
-              </a:rPr>
-              <a:t>Session 20 walks the whole map — </a:t>
-            </a:r>
-            <a:r>
-              <a:rPr sz="1800" b="1">
-                <a:solidFill>
-                  <a:srgbClr val="2C5F2D"/>
-                </a:solidFill>
-                <a:latin typeface="Calibri"/>
-              </a:rPr>
-              <a:t>all four Connects</a:t>
-            </a:r>
-            <a:r>
-              <a:rPr sz="1800" b="0">
-                <a:solidFill>
-                  <a:srgbClr val="222B22"/>
-                </a:solidFill>
-                <a:latin typeface="Calibri"/>
-              </a:rPr>
-              <a:t>, consolidated for the road. Each connection makes the next one real (Matt. 22:37–40).</a:t>
-            </a:r>
-          </a:p>
-        </p:txBody>
-      </p:sp>
-      <p:sp>
-        <p:nvSpPr>
-          <p:cNvPr id="90" name="SlideNum"/>
-          <p:cNvSpPr txBox="1"/>
-          <p:nvPr/>
-        </p:nvSpPr>
-        <p:spPr>
-          <a:xfrm>
-            <a:off x="11384280" y="6446520"/>
-            <a:ext cx="640080" cy="292608"/>
-          </a:xfrm>
-          <a:prstGeom prst="rect">
-            <a:avLst/>
-          </a:prstGeom>
-          <a:noFill/>
-        </p:spPr>
-        <p:txBody>
-          <a:bodyPr wrap="none" lIns="0" tIns="0" rIns="45720" bIns="0" anchor="ctr"/>
-          <a:lstStyle/>
-          <a:p>
-            <a:pPr algn="r"/>
-            <a:r>
-              <a:t>244a</a:t>
-            </a:r>
-            <a:endParaRPr sz="1000" b="1">
-              <a:solidFill>
-                <a:srgbClr val="7A8A6E"/>
-              </a:solidFill>
-              <a:latin typeface="Calibri"/>
-            </a:endParaRPr>
-          </a:p>
-        </p:txBody>
-      </p:sp>
-    </p:spTree>
-  </p:cSld>
-  <p:clrMapOvr>
-    <a:masterClrMapping/>
-  </p:clrMapOvr>
-</p:sld>
-</file>
-
-<file path=ppt/slides/slide15.xml><?xml version="1.0" encoding="utf-8"?>
-<p:sld xmlns:a="http://schemas.openxmlformats.org/drawingml/2006/main" xmlns:p="http://schemas.openxmlformats.org/presentationml/2006/main" xmlns:r="http://schemas.openxmlformats.org/officeDocument/2006/relationships">
-  <p:cSld>
-    <p:spTree>
-      <p:nvGrpSpPr>
-        <p:cNvPr id="1" name=""/>
-        <p:cNvGrpSpPr/>
-        <p:nvPr/>
-      </p:nvGrpSpPr>
-      <p:grpSpPr/>
-      <p:sp>
-        <p:nvSpPr>
-          <p:cNvPr id="2" name="Rectangle 1"/>
-          <p:cNvSpPr/>
-          <p:nvPr/>
-        </p:nvSpPr>
-        <p:spPr>
-          <a:xfrm>
-            <a:off x="0" y="0"/>
-            <a:ext cx="12192000" cy="6858000"/>
-          </a:xfrm>
-          <a:prstGeom prst="rect">
-            <a:avLst/>
-          </a:prstGeom>
-          <a:solidFill>
-            <a:srgbClr val="FFFFFF"/>
-          </a:solidFill>
-          <a:ln>
-            <a:noFill/>
-          </a:ln>
-          <a:effectLst/>
-        </p:spPr>
-        <p:style>
-          <a:lnRef idx="1">
-            <a:schemeClr val="accent1"/>
-          </a:lnRef>
-          <a:fillRef idx="3">
-            <a:schemeClr val="accent1"/>
-          </a:fillRef>
-          <a:effectRef idx="2">
-            <a:schemeClr val="accent1"/>
-          </a:effectRef>
-          <a:fontRef idx="minor">
-            <a:schemeClr val="lt1"/>
-          </a:fontRef>
-        </p:style>
-        <p:txBody>
-          <a:bodyPr rtlCol="0" anchor="ctr"/>
-          <a:lstStyle/>
-          <a:p>
-            <a:pPr algn="ctr"/>
-          </a:p>
-        </p:txBody>
-      </p:sp>
-      <p:sp>
-        <p:nvSpPr>
-          <p:cNvPr id="3" name="TextBox 2"/>
-          <p:cNvSpPr txBox="1"/>
-          <p:nvPr/>
-        </p:nvSpPr>
-        <p:spPr>
-          <a:xfrm>
-            <a:off x="822960" y="502920"/>
-            <a:ext cx="10515600" cy="822960"/>
-          </a:xfrm>
-          <a:prstGeom prst="rect">
-            <a:avLst/>
-          </a:prstGeom>
-          <a:noFill/>
-        </p:spPr>
-        <p:txBody>
-          <a:bodyPr wrap="square">
-            <a:spAutoFit/>
-          </a:bodyPr>
-          <a:lstStyle/>
-          <a:p>
-            <a:r>
-              <a:rPr sz="2800" b="1">
-                <a:solidFill>
-                  <a:srgbClr val="2C5F2D"/>
-                </a:solidFill>
-                <a:latin typeface="Cambria"/>
-              </a:rPr>
-              <a:t>The Take-Home Sheet — the Daily Rhythm</a:t>
-            </a:r>
-          </a:p>
-        </p:txBody>
-      </p:sp>
-      <p:pic>
-        <p:nvPicPr>
-          <p:cNvPr id="4" name="Picture 3" descr="s20_part1.png"/>
-          <p:cNvPicPr>
-            <a:picLocks noChangeAspect="1"/>
-          </p:cNvPicPr>
-          <p:nvPr/>
-        </p:nvPicPr>
-        <p:blipFill>
-          <a:blip r:embed="rId2"/>
-          <a:stretch>
-            <a:fillRect/>
-          </a:stretch>
-        </p:blipFill>
-        <p:spPr>
-          <a:xfrm>
-            <a:off x="1798167" y="1463040"/>
-            <a:ext cx="8595360" cy="4039819"/>
-          </a:xfrm>
-          <a:prstGeom prst="rect">
-            <a:avLst/>
-          </a:prstGeom>
-          <a:ln w="12700">
-            <a:solidFill>
-              <a:srgbClr val="C8C8C8"/>
-            </a:solidFill>
-          </a:ln>
-        </p:spPr>
-      </p:pic>
-      <p:sp>
-        <p:nvSpPr>
-          <p:cNvPr id="5" name="TextBox 4"/>
-          <p:cNvSpPr txBox="1"/>
-          <p:nvPr/>
-        </p:nvSpPr>
-        <p:spPr>
-          <a:xfrm>
-            <a:off x="822960" y="6355080"/>
-            <a:ext cx="10515600" cy="411480"/>
-          </a:xfrm>
-          <a:prstGeom prst="rect">
-            <a:avLst/>
-          </a:prstGeom>
-          <a:noFill/>
-        </p:spPr>
-        <p:txBody>
-          <a:bodyPr wrap="square">
-            <a:spAutoFit/>
-          </a:bodyPr>
-          <a:lstStyle/>
-          <a:p>
-            <a:r>
-              <a:rPr sz="1400" i="1">
-                <a:solidFill>
-                  <a:srgbClr val="595959"/>
-                </a:solidFill>
-                <a:latin typeface="Calibri"/>
-              </a:rPr>
-              <a:t>Handed out now — this is the sheet in your hands.</a:t>
-            </a:r>
-          </a:p>
-        </p:txBody>
-      </p:sp>
-      <p:sp>
-        <p:nvSpPr>
-          <p:cNvPr id="90" name="SlideNum"/>
-          <p:cNvSpPr txBox="1"/>
-          <p:nvPr/>
-        </p:nvSpPr>
-        <p:spPr>
-          <a:xfrm>
-            <a:off x="11384280" y="6446520"/>
-            <a:ext cx="640080" cy="292608"/>
-          </a:xfrm>
-          <a:prstGeom prst="rect">
-            <a:avLst/>
-          </a:prstGeom>
-          <a:noFill/>
-        </p:spPr>
-        <p:txBody>
-          <a:bodyPr wrap="none" lIns="0" tIns="0" rIns="45720" bIns="0" anchor="ctr"/>
-          <a:lstStyle/>
-          <a:p>
-            <a:pPr algn="r"/>
-            <a:r>
-              <a:t>253</a:t>
-            </a:r>
-            <a:endParaRPr sz="1000" b="1">
-              <a:solidFill>
-                <a:srgbClr val="7A8A6E"/>
-              </a:solidFill>
-              <a:latin typeface="Calibri"/>
-            </a:endParaRPr>
-          </a:p>
-        </p:txBody>
-      </p:sp>
-    </p:spTree>
-  </p:cSld>
-  <p:clrMapOvr>
-    <a:masterClrMapping/>
-  </p:clrMapOvr>
-</p:sld>
-</file>
-
-<file path=ppt/slides/slide16.xml><?xml version="1.0" encoding="utf-8"?>
-<p:sld xmlns:a="http://schemas.openxmlformats.org/drawingml/2006/main" xmlns:p="http://schemas.openxmlformats.org/presentationml/2006/main" xmlns:r="http://schemas.openxmlformats.org/officeDocument/2006/relationships">
-  <p:cSld>
-    <p:spTree>
-      <p:nvGrpSpPr>
-        <p:cNvPr id="1" name=""/>
-        <p:cNvGrpSpPr/>
-        <p:nvPr/>
-      </p:nvGrpSpPr>
-      <p:grpSpPr/>
-      <p:sp>
-        <p:nvSpPr>
-          <p:cNvPr id="2" name="Rectangle 1"/>
-          <p:cNvSpPr/>
-          <p:nvPr/>
-        </p:nvSpPr>
-        <p:spPr>
-          <a:xfrm>
-            <a:off x="0" y="0"/>
-            <a:ext cx="12192000" cy="6858000"/>
-          </a:xfrm>
-          <a:prstGeom prst="rect">
-            <a:avLst/>
-          </a:prstGeom>
-          <a:solidFill>
-            <a:srgbClr val="FFFFFF"/>
-          </a:solidFill>
-          <a:ln>
-            <a:noFill/>
-          </a:ln>
-          <a:effectLst/>
-        </p:spPr>
-        <p:style>
-          <a:lnRef idx="1">
-            <a:schemeClr val="accent1"/>
-          </a:lnRef>
-          <a:fillRef idx="3">
-            <a:schemeClr val="accent1"/>
-          </a:fillRef>
-          <a:effectRef idx="2">
-            <a:schemeClr val="accent1"/>
-          </a:effectRef>
-          <a:fontRef idx="minor">
-            <a:schemeClr val="lt1"/>
-          </a:fontRef>
-        </p:style>
-        <p:txBody>
-          <a:bodyPr rtlCol="0" anchor="ctr"/>
-          <a:lstStyle/>
-          <a:p>
-            <a:pPr algn="ctr"/>
-          </a:p>
-        </p:txBody>
-      </p:sp>
-      <p:sp>
-        <p:nvSpPr>
-          <p:cNvPr id="3" name="TextBox 2"/>
-          <p:cNvSpPr txBox="1"/>
-          <p:nvPr/>
-        </p:nvSpPr>
-        <p:spPr>
-          <a:xfrm>
-            <a:off x="822960" y="502920"/>
-            <a:ext cx="10515600" cy="822960"/>
-          </a:xfrm>
-          <a:prstGeom prst="rect">
-            <a:avLst/>
-          </a:prstGeom>
-          <a:noFill/>
-        </p:spPr>
-        <p:txBody>
-          <a:bodyPr wrap="square">
-            <a:spAutoFit/>
-          </a:bodyPr>
-          <a:lstStyle/>
-          <a:p>
-            <a:r>
-              <a:rPr sz="2800" b="1">
-                <a:solidFill>
-                  <a:srgbClr val="2C5F2D"/>
-                </a:solidFill>
-                <a:latin typeface="Cambria"/>
-              </a:rPr>
-              <a:t>The Take-Home Sheet — the Four Parts</a:t>
-            </a:r>
-          </a:p>
-        </p:txBody>
-      </p:sp>
-      <p:pic>
-        <p:nvPicPr>
-          <p:cNvPr id="4" name="Picture 3" descr="s20_part2.png"/>
-          <p:cNvPicPr>
-            <a:picLocks noChangeAspect="1"/>
-          </p:cNvPicPr>
-          <p:nvPr/>
-        </p:nvPicPr>
-        <p:blipFill>
-          <a:blip r:embed="rId2"/>
-          <a:stretch>
-            <a:fillRect/>
-          </a:stretch>
-        </p:blipFill>
-        <p:spPr>
-          <a:xfrm>
-            <a:off x="2258348" y="1463040"/>
-            <a:ext cx="7674998" cy="4709159"/>
-          </a:xfrm>
-          <a:prstGeom prst="rect">
-            <a:avLst/>
-          </a:prstGeom>
-          <a:ln w="12700">
-            <a:solidFill>
-              <a:srgbClr val="C8C8C8"/>
-            </a:solidFill>
-          </a:ln>
-        </p:spPr>
-      </p:pic>
-      <p:sp>
-        <p:nvSpPr>
-          <p:cNvPr id="5" name="TextBox 4"/>
-          <p:cNvSpPr txBox="1"/>
-          <p:nvPr/>
-        </p:nvSpPr>
-        <p:spPr>
-          <a:xfrm>
-            <a:off x="822960" y="6355080"/>
-            <a:ext cx="10515600" cy="411480"/>
-          </a:xfrm>
-          <a:prstGeom prst="rect">
-            <a:avLst/>
-          </a:prstGeom>
-          <a:noFill/>
-        </p:spPr>
-        <p:txBody>
-          <a:bodyPr wrap="square">
-            <a:spAutoFit/>
-          </a:bodyPr>
-          <a:lstStyle/>
-          <a:p>
-            <a:r>
-              <a:rPr sz="1400" i="1">
-                <a:solidFill>
-                  <a:srgbClr val="595959"/>
-                </a:solidFill>
-                <a:latin typeface="Calibri"/>
-              </a:rPr>
-              <a:t>One practice at a time — and a partner expecting you at the end of week one.</a:t>
-            </a:r>
-          </a:p>
-        </p:txBody>
-      </p:sp>
-      <p:sp>
-        <p:nvSpPr>
-          <p:cNvPr id="90" name="SlideNum"/>
-          <p:cNvSpPr txBox="1"/>
-          <p:nvPr/>
-        </p:nvSpPr>
-        <p:spPr>
-          <a:xfrm>
-            <a:off x="11384280" y="6446520"/>
-            <a:ext cx="640080" cy="292608"/>
-          </a:xfrm>
-          <a:prstGeom prst="rect">
-            <a:avLst/>
-          </a:prstGeom>
-          <a:noFill/>
-        </p:spPr>
-        <p:txBody>
-          <a:bodyPr wrap="none" lIns="0" tIns="0" rIns="45720" bIns="0" anchor="ctr"/>
-          <a:lstStyle/>
-          <a:p>
-            <a:pPr algn="r"/>
-            <a:r>
-              <a:t>253a</a:t>
             </a:r>
             <a:endParaRPr sz="1000" b="1">
               <a:solidFill>
@@ -6822,6 +6889,211 @@
 </file>
 
 <file path=ppt/slides/slide3.xml><?xml version="1.0" encoding="utf-8"?>
+<p:sld xmlns:a="http://schemas.openxmlformats.org/drawingml/2006/main" xmlns:p="http://schemas.openxmlformats.org/presentationml/2006/main" xmlns:r="http://schemas.openxmlformats.org/officeDocument/2006/relationships">
+  <p:cSld>
+    <p:spTree>
+      <p:nvGrpSpPr>
+        <p:cNvPr id="1" name=""/>
+        <p:cNvGrpSpPr/>
+        <p:nvPr/>
+      </p:nvGrpSpPr>
+      <p:grpSpPr/>
+      <p:sp>
+        <p:nvSpPr>
+          <p:cNvPr id="2" name="Rectangle 1"/>
+          <p:cNvSpPr/>
+          <p:nvPr/>
+        </p:nvSpPr>
+        <p:spPr>
+          <a:xfrm>
+            <a:off x="0" y="0"/>
+            <a:ext cx="12192000" cy="6858000"/>
+          </a:xfrm>
+          <a:prstGeom prst="rect">
+            <a:avLst/>
+          </a:prstGeom>
+          <a:solidFill>
+            <a:srgbClr val="FFFFFF"/>
+          </a:solidFill>
+          <a:ln>
+            <a:noFill/>
+          </a:ln>
+          <a:effectLst/>
+        </p:spPr>
+        <p:style>
+          <a:lnRef idx="1">
+            <a:schemeClr val="accent1"/>
+          </a:lnRef>
+          <a:fillRef idx="3">
+            <a:schemeClr val="accent1"/>
+          </a:fillRef>
+          <a:effectRef idx="2">
+            <a:schemeClr val="accent1"/>
+          </a:effectRef>
+          <a:fontRef idx="minor">
+            <a:schemeClr val="lt1"/>
+          </a:fontRef>
+        </p:style>
+        <p:txBody>
+          <a:bodyPr rtlCol="0" anchor="ctr"/>
+          <a:lstStyle/>
+          <a:p>
+            <a:pPr algn="ctr"/>
+          </a:p>
+        </p:txBody>
+      </p:sp>
+      <p:sp>
+        <p:nvSpPr>
+          <p:cNvPr id="3" name="TextBox 2"/>
+          <p:cNvSpPr txBox="1"/>
+          <p:nvPr/>
+        </p:nvSpPr>
+        <p:spPr>
+          <a:xfrm>
+            <a:off x="822960" y="502920"/>
+            <a:ext cx="10515600" cy="822960"/>
+          </a:xfrm>
+          <a:prstGeom prst="rect">
+            <a:avLst/>
+          </a:prstGeom>
+          <a:noFill/>
+        </p:spPr>
+        <p:txBody>
+          <a:bodyPr wrap="square">
+            <a:spAutoFit/>
+          </a:bodyPr>
+          <a:lstStyle/>
+          <a:p>
+            <a:r>
+              <a:rPr sz="2800" b="1">
+                <a:solidFill>
+                  <a:srgbClr val="2C5F2D"/>
+                </a:solidFill>
+                <a:latin typeface="Cambria"/>
+              </a:rPr>
+              <a:t>Where We Are — the Four Connects</a:t>
+            </a:r>
+          </a:p>
+        </p:txBody>
+      </p:sp>
+      <p:sp>
+        <p:nvSpPr>
+          <p:cNvPr id="5" name="TextBox 4"/>
+          <p:cNvSpPr txBox="1"/>
+          <p:nvPr/>
+        </p:nvSpPr>
+        <p:spPr>
+          <a:xfrm>
+            <a:off x="822960" y="5623560"/>
+            <a:ext cx="10515600" cy="914400"/>
+          </a:xfrm>
+          <a:prstGeom prst="rect">
+            <a:avLst/>
+          </a:prstGeom>
+          <a:noFill/>
+        </p:spPr>
+        <p:txBody>
+          <a:bodyPr wrap="square">
+            <a:spAutoFit/>
+          </a:bodyPr>
+          <a:lstStyle/>
+          <a:p>
+            <a:r>
+              <a:rPr sz="1800" b="0">
+                <a:solidFill>
+                  <a:srgbClr val="222B22"/>
+                </a:solidFill>
+                <a:latin typeface="Calibri"/>
+              </a:rPr>
+              <a:t>Session 20 walks the whole map — </a:t>
+            </a:r>
+            <a:r>
+              <a:rPr sz="1800" b="1">
+                <a:solidFill>
+                  <a:srgbClr val="2C5F2D"/>
+                </a:solidFill>
+                <a:latin typeface="Calibri"/>
+              </a:rPr>
+              <a:t>all four Connects</a:t>
+            </a:r>
+            <a:r>
+              <a:rPr sz="1800" b="0">
+                <a:solidFill>
+                  <a:srgbClr val="222B22"/>
+                </a:solidFill>
+                <a:latin typeface="Calibri"/>
+              </a:rPr>
+              <a:t>, consolidated for the road. Each connection makes the next one real (Matt. 22:37–40).</a:t>
+            </a:r>
+          </a:p>
+        </p:txBody>
+      </p:sp>
+      <p:sp>
+        <p:nvSpPr>
+          <p:cNvPr id="90" name="SlideNum"/>
+          <p:cNvSpPr txBox="1"/>
+          <p:nvPr/>
+        </p:nvSpPr>
+        <p:spPr>
+          <a:xfrm>
+            <a:off x="11384280" y="6446520"/>
+            <a:ext cx="640080" cy="292608"/>
+          </a:xfrm>
+          <a:prstGeom prst="rect">
+            <a:avLst/>
+          </a:prstGeom>
+          <a:noFill/>
+        </p:spPr>
+        <p:txBody>
+          <a:bodyPr wrap="none" lIns="0" tIns="0" rIns="45720" bIns="0" anchor="ctr"/>
+          <a:lstStyle/>
+          <a:p>
+            <a:pPr algn="r"/>
+            <a:r>
+              <a:t>244a</a:t>
+            </a:r>
+            <a:endParaRPr sz="1000" b="1">
+              <a:solidFill>
+                <a:srgbClr val="7A8A6E"/>
+              </a:solidFill>
+              <a:latin typeface="Calibri"/>
+            </a:endParaRPr>
+          </a:p>
+        </p:txBody>
+      </p:sp>
+      <p:pic>
+        <p:nvPicPr>
+          <p:cNvPr id="91" name="Picture 90" descr="four-connects.png"/>
+          <p:cNvPicPr>
+            <a:picLocks noChangeAspect="1"/>
+          </p:cNvPicPr>
+          <p:nvPr/>
+        </p:nvPicPr>
+        <p:blipFill>
+          <a:blip r:embed="rId4"/>
+          <a:stretch>
+            <a:fillRect/>
+          </a:stretch>
+        </p:blipFill>
+        <p:spPr>
+          <a:xfrm>
+            <a:off x="932688" y="1645920"/>
+            <a:ext cx="10332720" cy="3708663"/>
+          </a:xfrm>
+          <a:prstGeom prst="rect">
+            <a:avLst/>
+          </a:prstGeom>
+        </p:spPr>
+      </p:pic>
+    </p:spTree>
+  </p:cSld>
+  <p:clrMapOvr>
+    <a:masterClrMapping/>
+  </p:clrMapOvr>
+</p:sld>
+</file>
+
+<file path=ppt/slides/slide4.xml><?xml version="1.0" encoding="utf-8"?>
 <p:sld xmlns:a="http://schemas.openxmlformats.org/drawingml/2006/main" xmlns:r="http://schemas.openxmlformats.org/officeDocument/2006/relationships" xmlns:p="http://schemas.openxmlformats.org/presentationml/2006/main">
   <p:cSld>
     <p:spTree>
@@ -7247,353 +7519,6 @@
 </p:sld>
 </file>
 
-<file path=ppt/slides/slide4.xml><?xml version="1.0" encoding="utf-8"?>
-<p:sld xmlns:a="http://schemas.openxmlformats.org/drawingml/2006/main" xmlns:r="http://schemas.openxmlformats.org/officeDocument/2006/relationships" xmlns:p="http://schemas.openxmlformats.org/presentationml/2006/main">
-  <p:cSld>
-    <p:spTree>
-      <p:nvGrpSpPr>
-        <p:cNvPr id="1" name=""/>
-        <p:cNvGrpSpPr/>
-        <p:nvPr/>
-      </p:nvGrpSpPr>
-      <p:grpSpPr>
-        <a:xfrm>
-          <a:off x="0" y="0"/>
-          <a:ext cx="0" cy="0"/>
-          <a:chOff x="0" y="0"/>
-          <a:chExt cx="0" cy="0"/>
-        </a:xfrm>
-      </p:grpSpPr>
-      <p:sp>
-        <p:nvSpPr>
-          <p:cNvPr id="2" name="Rectangle 1"/>
-          <p:cNvSpPr/>
-          <p:nvPr/>
-        </p:nvSpPr>
-        <p:spPr>
-          <a:xfrm>
-            <a:off x="0" y="0"/>
-            <a:ext cx="12191695" cy="6858000"/>
-          </a:xfrm>
-          <a:prstGeom prst="rect">
-            <a:avLst/>
-          </a:prstGeom>
-          <a:solidFill>
-            <a:srgbClr val="FFFFFF"/>
-          </a:solidFill>
-          <a:ln>
-            <a:noFill/>
-          </a:ln>
-        </p:spPr>
-        <p:txBody>
-          <a:bodyPr/>
-          <a:lstStyle/>
-          <a:p>
-            <a:endParaRPr/>
-          </a:p>
-        </p:txBody>
-      </p:sp>
-      <p:sp>
-        <p:nvSpPr>
-          <p:cNvPr id="3" name="TextBox 2"/>
-          <p:cNvSpPr txBox="1"/>
-          <p:nvPr/>
-        </p:nvSpPr>
-        <p:spPr>
-          <a:xfrm>
-            <a:off x="822960" y="502920"/>
-            <a:ext cx="10515600" cy="822960"/>
-          </a:xfrm>
-          <a:prstGeom prst="rect">
-            <a:avLst/>
-          </a:prstGeom>
-          <a:noFill/>
-        </p:spPr>
-        <p:txBody>
-          <a:bodyPr wrap="square">
-            <a:spAutoFit/>
-          </a:bodyPr>
-          <a:lstStyle/>
-          <a:p>
-            <a:pPr algn="l">
-              <a:spcAft>
-                <a:spcPts val="600"/>
-              </a:spcAft>
-            </a:pPr>
-            <a:r>
-              <a:rPr sz="2800" b="1" i="0">
-                <a:solidFill>
-                  <a:srgbClr val="2C5F2D"/>
-                </a:solidFill>
-                <a:latin typeface="Cambria"/>
-              </a:rPr>
-              <a:t>Opening Container — the Eight Steps</a:t>
-            </a:r>
-          </a:p>
-        </p:txBody>
-      </p:sp>
-      <p:sp>
-        <p:nvSpPr>
-          <p:cNvPr id="4" name="TextBox 4"/>
-          <p:cNvSpPr txBox="1"/>
-          <p:nvPr/>
-        </p:nvSpPr>
-        <p:spPr>
-          <a:xfrm>
-            <a:off x="822960" y="1554480"/>
-            <a:ext cx="10515600" cy="4892040"/>
-          </a:xfrm>
-          <a:prstGeom prst="rect">
-            <a:avLst/>
-          </a:prstGeom>
-          <a:noFill/>
-        </p:spPr>
-        <p:txBody>
-          <a:bodyPr wrap="square" lIns="91440" tIns="91440" rIns="91440" bIns="91440"/>
-          <a:lstStyle/>
-          <a:p>
-            <a:pPr marL="342900" indent="-342900">
-              <a:spcAft>
-                <a:spcPts val="650"/>
-              </a:spcAft>
-            </a:pPr>
-            <a:r>
-              <a:rPr sz="2400" b="1" i="0">
-                <a:solidFill>
-                  <a:srgbClr val="97BC62"/>
-                </a:solidFill>
-                <a:latin typeface="Calibri"/>
-              </a:rPr>
-              <a:t>1   </a:t>
-            </a:r>
-            <a:r>
-              <a:rPr sz="2400" b="0" i="0">
-                <a:solidFill>
-                  <a:srgbClr val="222B22"/>
-                </a:solidFill>
-                <a:latin typeface="Calibri"/>
-              </a:rPr>
-              <a:t>Welcome — five minutes to open the container</a:t>
-            </a:r>
-          </a:p>
-          <a:p>
-            <a:pPr marL="342900" indent="-342900">
-              <a:spcAft>
-                <a:spcPts val="650"/>
-              </a:spcAft>
-            </a:pPr>
-            <a:r>
-              <a:rPr sz="2400" b="1" i="0">
-                <a:solidFill>
-                  <a:srgbClr val="97BC62"/>
-                </a:solidFill>
-                <a:latin typeface="Calibri"/>
-              </a:rPr>
-              <a:t>2   </a:t>
-            </a:r>
-            <a:r>
-              <a:rPr sz="2400" b="0" i="0">
-                <a:solidFill>
-                  <a:srgbClr val="222B22"/>
-                </a:solidFill>
-                <a:latin typeface="Calibri"/>
-              </a:rPr>
-              <a:t>Phones silenced and put away</a:t>
-            </a:r>
-          </a:p>
-          <a:p>
-            <a:pPr marL="342900" indent="-342900">
-              <a:spcAft>
-                <a:spcPts val="650"/>
-              </a:spcAft>
-            </a:pPr>
-            <a:r>
-              <a:rPr sz="2400" b="1" i="0">
-                <a:solidFill>
-                  <a:srgbClr val="97BC62"/>
-                </a:solidFill>
-                <a:latin typeface="Calibri"/>
-              </a:rPr>
-              <a:t>3   </a:t>
-            </a:r>
-            <a:r>
-              <a:rPr sz="2400" b="0" i="0">
-                <a:solidFill>
-                  <a:srgbClr val="222B22"/>
-                </a:solidFill>
-                <a:latin typeface="Calibri"/>
-              </a:rPr>
-              <a:t>Stand in a circle</a:t>
-            </a:r>
-          </a:p>
-          <a:p>
-            <a:pPr marL="342900" indent="-342900">
-              <a:spcAft>
-                <a:spcPts val="650"/>
-              </a:spcAft>
-            </a:pPr>
-            <a:r>
-              <a:rPr sz="2400" b="1" i="0">
-                <a:solidFill>
-                  <a:srgbClr val="97BC62"/>
-                </a:solidFill>
-                <a:latin typeface="Calibri"/>
-              </a:rPr>
-              <a:t>4   </a:t>
-            </a:r>
-            <a:r>
-              <a:rPr sz="2400" b="0" i="0">
-                <a:solidFill>
-                  <a:srgbClr val="222B22"/>
-                </a:solidFill>
-                <a:latin typeface="Calibri"/>
-              </a:rPr>
-              <a:t>One-word check-in — how you actually are, right now</a:t>
-            </a:r>
-          </a:p>
-          <a:p>
-            <a:pPr marL="342900" indent="-342900">
-              <a:spcAft>
-                <a:spcPts val="650"/>
-              </a:spcAft>
-            </a:pPr>
-            <a:r>
-              <a:rPr sz="2400" b="1" i="0">
-                <a:solidFill>
-                  <a:srgbClr val="97BC62"/>
-                </a:solidFill>
-                <a:latin typeface="Calibri"/>
-              </a:rPr>
-              <a:t>5   </a:t>
-            </a:r>
-            <a:r>
-              <a:rPr sz="2400" b="0" i="0">
-                <a:solidFill>
-                  <a:srgbClr val="222B22"/>
-                </a:solidFill>
-                <a:latin typeface="Calibri"/>
-              </a:rPr>
-              <a:t>Put out / bring in — set something down; bring a blessing in</a:t>
-            </a:r>
-          </a:p>
-          <a:p>
-            <a:pPr marL="342900" indent="-342900">
-              <a:spcAft>
-                <a:spcPts val="650"/>
-              </a:spcAft>
-            </a:pPr>
-            <a:r>
-              <a:rPr sz="2400" b="1" i="0">
-                <a:solidFill>
-                  <a:srgbClr val="97BC62"/>
-                </a:solidFill>
-                <a:latin typeface="Calibri"/>
-              </a:rPr>
-              <a:t>6   </a:t>
-            </a:r>
-            <a:r>
-              <a:rPr sz="2400" b="0" i="0">
-                <a:solidFill>
-                  <a:srgbClr val="222B22"/>
-                </a:solidFill>
-                <a:latin typeface="Calibri"/>
-              </a:rPr>
-              <a:t>Spoken commitment: “I am here. I am paying attention. I am willing to be moved.”</a:t>
-            </a:r>
-          </a:p>
-          <a:p>
-            <a:pPr marL="342900" indent="-342900">
-              <a:spcAft>
-                <a:spcPts val="650"/>
-              </a:spcAft>
-            </a:pPr>
-            <a:r>
-              <a:rPr sz="2400" b="1" i="0">
-                <a:solidFill>
-                  <a:srgbClr val="97BC62"/>
-                </a:solidFill>
-                <a:latin typeface="Calibri"/>
-              </a:rPr>
-              <a:t>7   </a:t>
-            </a:r>
-            <a:r>
-              <a:rPr sz="2400" b="0" i="0">
-                <a:solidFill>
-                  <a:srgbClr val="222B22"/>
-                </a:solidFill>
-                <a:latin typeface="Calibri"/>
-              </a:rPr>
-              <a:t>Opening prayer — “Holy Spirit, you are welcome here. Speak. We are listening.”</a:t>
-            </a:r>
-          </a:p>
-          <a:p>
-            <a:pPr marL="342900" indent="-342900">
-              <a:spcAft>
-                <a:spcPts val="650"/>
-              </a:spcAft>
-            </a:pPr>
-            <a:r>
-              <a:rPr sz="2400" b="1" i="0">
-                <a:solidFill>
-                  <a:srgbClr val="97BC62"/>
-                </a:solidFill>
-                <a:latin typeface="Calibri"/>
-              </a:rPr>
-              <a:t>8   </a:t>
-            </a:r>
-            <a:r>
-              <a:rPr sz="2400" b="0" i="0">
-                <a:solidFill>
-                  <a:srgbClr val="222B22"/>
-                </a:solidFill>
-                <a:latin typeface="Calibri"/>
-              </a:rPr>
-              <a:t>Sit. Begin.</a:t>
-            </a:r>
-          </a:p>
-        </p:txBody>
-      </p:sp>
-      <p:sp>
-        <p:nvSpPr>
-          <p:cNvPr id="90" name="SlideNum"/>
-          <p:cNvSpPr txBox="1"/>
-          <p:nvPr/>
-        </p:nvSpPr>
-        <p:spPr>
-          <a:xfrm>
-            <a:off x="11384280" y="6446520"/>
-            <a:ext cx="640080" cy="292608"/>
-          </a:xfrm>
-          <a:prstGeom prst="rect">
-            <a:avLst/>
-          </a:prstGeom>
-          <a:noFill/>
-        </p:spPr>
-        <p:txBody>
-          <a:bodyPr wrap="none" lIns="0" tIns="0" rIns="45720" bIns="0" anchor="ctr"/>
-          <a:lstStyle/>
-          <a:p>
-            <a:pPr algn="r"/>
-            <a:r>
-              <a:t>246</a:t>
-            </a:r>
-            <a:endParaRPr sz="1000" b="1">
-              <a:solidFill>
-                <a:srgbClr val="7A8A6E"/>
-              </a:solidFill>
-              <a:latin typeface="Calibri"/>
-            </a:endParaRPr>
-          </a:p>
-        </p:txBody>
-      </p:sp>
-    </p:spTree>
-  </p:cSld>
-  <p:clrMapOvr>
-    <a:masterClrMapping/>
-  </p:clrMapOvr>
-</p:sld>
-</file>
-
 <file path=ppt/slides/slide5.xml><?xml version="1.0" encoding="utf-8"?>
 <p:sld xmlns:a="http://schemas.openxmlformats.org/drawingml/2006/main" xmlns:r="http://schemas.openxmlformats.org/officeDocument/2006/relationships" xmlns:p="http://schemas.openxmlformats.org/presentationml/2006/main">
   <p:cSld>
@@ -7674,7 +7599,7 @@
                 </a:solidFill>
                 <a:latin typeface="Cambria"/>
               </a:rPr>
-              <a:t>Why Tonight — Isaiah 50:10</a:t>
+              <a:t>Opening Container — the Eight Steps</a:t>
             </a:r>
           </a:p>
         </p:txBody>
@@ -7687,8 +7612,8 @@
         </p:nvSpPr>
         <p:spPr>
           <a:xfrm>
-            <a:off x="822960" y="1600200"/>
-            <a:ext cx="5669280" cy="4572000"/>
+            <a:off x="822960" y="1554480"/>
+            <a:ext cx="10515600" cy="4892040"/>
           </a:xfrm>
           <a:prstGeom prst="rect">
             <a:avLst/>
@@ -7699,208 +7624,203 @@
           <a:bodyPr wrap="square" lIns="91440" tIns="91440" rIns="91440" bIns="91440"/>
           <a:lstStyle/>
           <a:p>
-            <a:pPr marL="274320" indent="-274320">
+            <a:pPr marL="342900" indent="-342900">
               <a:spcAft>
                 <a:spcPts val="650"/>
               </a:spcAft>
             </a:pPr>
             <a:r>
-              <a:rPr sz="1800" b="1" i="0">
+              <a:rPr sz="2400" b="1" i="0">
                 <a:solidFill>
                   <a:srgbClr val="97BC62"/>
                 </a:solidFill>
                 <a:latin typeface="Calibri"/>
               </a:rPr>
-              <a:t>•  </a:t>
-            </a:r>
-            <a:r>
-              <a:rPr sz="1800" b="0" i="0">
+              <a:t>1   </a:t>
+            </a:r>
+            <a:r>
+              <a:rPr sz="2400" b="0" i="0">
                 <a:solidFill>
                   <a:srgbClr val="222B22"/>
                 </a:solidFill>
                 <a:latin typeface="Calibri"/>
               </a:rPr>
-              <a:t>In two weeks this room stops meeting — the next two Wednesdays are sendings, not endings. On the other side: a summer with no Wednesday in it.</a:t>
-            </a:r>
-          </a:p>
-          <a:p>
-            <a:pPr marL="274320" indent="-274320">
+              <a:t>Welcome — five minutes to open the container</a:t>
+            </a:r>
+          </a:p>
+          <a:p>
+            <a:pPr marL="342900" indent="-342900">
               <a:spcAft>
                 <a:spcPts val="650"/>
               </a:spcAft>
             </a:pPr>
             <a:r>
-              <a:rPr sz="1800" b="1" i="0">
+              <a:rPr sz="2400" b="1" i="0">
                 <a:solidFill>
                   <a:srgbClr val="97BC62"/>
                 </a:solidFill>
                 <a:latin typeface="Calibri"/>
               </a:rPr>
-              <a:t>•  </a:t>
-            </a:r>
-            <a:r>
-              <a:rPr sz="1800" b="0" i="0">
+              <a:t>2   </a:t>
+            </a:r>
+            <a:r>
+              <a:rPr sz="2400" b="0" i="0">
                 <a:solidFill>
                   <a:srgbClr val="222B22"/>
                 </a:solidFill>
                 <a:latin typeface="Calibri"/>
               </a:rPr>
-              <a:t>Somewhere out there — this summer, or in twenty years — every person in this room will hit a season where the practices go gray</a:t>
-            </a:r>
-          </a:p>
-          <a:p>
-            <a:pPr marL="274320" indent="-274320">
+              <a:t>Phones silenced and put away</a:t>
+            </a:r>
+          </a:p>
+          <a:p>
+            <a:pPr marL="342900" indent="-342900">
               <a:spcAft>
                 <a:spcPts val="650"/>
               </a:spcAft>
             </a:pPr>
             <a:r>
-              <a:rPr sz="1800" b="1" i="0">
+              <a:rPr sz="2400" b="1" i="0">
                 <a:solidFill>
                   <a:srgbClr val="97BC62"/>
                 </a:solidFill>
                 <a:latin typeface="Calibri"/>
               </a:rPr>
-              <a:t>•  </a:t>
-            </a:r>
-            <a:r>
-              <a:rPr sz="1800" b="0" i="0">
+              <a:t>3   </a:t>
+            </a:r>
+            <a:r>
+              <a:rPr sz="2400" b="0" i="0">
                 <a:solidFill>
                   <a:srgbClr val="222B22"/>
                 </a:solidFill>
                 <a:latin typeface="Calibri"/>
               </a:rPr>
-              <a:t>The most dangerous thing on the long walk is not the dryness — it is the wrong diagnosis of the dryness</a:t>
-            </a:r>
-          </a:p>
-          <a:p>
-            <a:pPr marL="274320" indent="-274320">
+              <a:t>Stand in a circle</a:t>
+            </a:r>
+          </a:p>
+          <a:p>
+            <a:pPr marL="342900" indent="-342900">
               <a:spcAft>
                 <a:spcPts val="650"/>
               </a:spcAft>
             </a:pPr>
             <a:r>
-              <a:rPr sz="1800" b="1" i="0">
+              <a:rPr sz="2400" b="1" i="0">
                 <a:solidFill>
                   <a:srgbClr val="97BC62"/>
                 </a:solidFill>
                 <a:latin typeface="Calibri"/>
               </a:rPr>
-              <a:t>•  </a:t>
-            </a:r>
-            <a:r>
-              <a:rPr sz="1800" b="0" i="0">
+              <a:t>4   </a:t>
+            </a:r>
+            <a:r>
+              <a:rPr sz="2400" b="0" i="0">
                 <a:solidFill>
                   <a:srgbClr val="222B22"/>
                 </a:solidFill>
                 <a:latin typeface="Calibri"/>
               </a:rPr>
-              <a:t>So tonight we hand you the equipment for that season — on purpose, at the threshold, before anyone needs it</a:t>
-            </a:r>
-          </a:p>
-          <a:p>
-            <a:pPr marL="274320" indent="-274320">
+              <a:t>One-word check-in — how you actually are, right now</a:t>
+            </a:r>
+          </a:p>
+          <a:p>
+            <a:pPr marL="342900" indent="-342900">
               <a:spcAft>
                 <a:spcPts val="650"/>
               </a:spcAft>
             </a:pPr>
             <a:r>
-              <a:rPr sz="1800" b="1" i="0">
+              <a:rPr sz="2400" b="1" i="0">
                 <a:solidFill>
                   <a:srgbClr val="97BC62"/>
                 </a:solidFill>
                 <a:latin typeface="Calibri"/>
               </a:rPr>
-              <a:t>•  </a:t>
-            </a:r>
-            <a:r>
-              <a:rPr sz="1800" b="0" i="0">
+              <a:t>5   </a:t>
+            </a:r>
+            <a:r>
+              <a:rPr sz="2400" b="0" i="0">
                 <a:solidFill>
                   <a:srgbClr val="222B22"/>
                 </a:solidFill>
                 <a:latin typeface="Calibri"/>
               </a:rPr>
-              <a:t>Psalm 23:4 — “Even though I walk through the valley of the shadow of death, I will fear no evil, for you are with me.” The road goes through.</a:t>
-            </a:r>
-          </a:p>
-          <a:p>
-            <a:pPr marL="274320" indent="-274320">
+              <a:t>Put out / bring in — set something down; bring a blessing in</a:t>
+            </a:r>
+          </a:p>
+          <a:p>
+            <a:pPr marL="342900" indent="-342900">
               <a:spcAft>
                 <a:spcPts val="650"/>
               </a:spcAft>
             </a:pPr>
             <a:r>
-              <a:rPr sz="1800" b="1" i="0">
+              <a:rPr sz="2400" b="1" i="0">
                 <a:solidFill>
                   <a:srgbClr val="97BC62"/>
                 </a:solidFill>
                 <a:latin typeface="Calibri"/>
               </a:rPr>
-              <a:t>•  </a:t>
-            </a:r>
-            <a:r>
-              <a:rPr sz="1800" b="0" i="0">
+              <a:t>6   </a:t>
+            </a:r>
+            <a:r>
+              <a:rPr sz="2400" b="0" i="0">
                 <a:solidFill>
                   <a:srgbClr val="222B22"/>
                 </a:solidFill>
                 <a:latin typeface="Calibri"/>
               </a:rPr>
-              <a:t>Now the teaching — in the seniors’ voices, not ours</a:t>
-            </a:r>
-          </a:p>
-        </p:txBody>
-      </p:sp>
-      <p:sp>
-        <p:nvSpPr>
-          <p:cNvPr id="6" name="TextBox 6"/>
-          <p:cNvSpPr txBox="1"/>
-          <p:nvPr/>
-        </p:nvSpPr>
-        <p:spPr>
-          <a:xfrm>
-            <a:off x="6766560" y="1737360"/>
-            <a:ext cx="4663440" cy="2542032"/>
-          </a:xfrm>
-          <a:prstGeom prst="rect">
-            <a:avLst/>
-          </a:prstGeom>
-          <a:solidFill>
-            <a:srgbClr val="F1F6EC"/>
-          </a:solidFill>
-        </p:spPr>
-        <p:txBody>
-          <a:bodyPr wrap="square" lIns="91440" tIns="91440" rIns="91440" bIns="91440" anchor="ctr"/>
-          <a:lstStyle/>
-          <a:p>
-            <a:pPr>
+              <a:t>Spoken commitment: “I am here. I am paying attention. I am willing to be moved.”</a:t>
+            </a:r>
+          </a:p>
+          <a:p>
+            <a:pPr marL="342900" indent="-342900">
               <a:spcAft>
-                <a:spcPts val="900"/>
+                <a:spcPts val="650"/>
               </a:spcAft>
             </a:pPr>
             <a:r>
-              <a:rPr sz="1200" b="1" i="0">
+              <a:rPr sz="2400" b="1" i="0">
                 <a:solidFill>
                   <a:srgbClr val="97BC62"/>
                 </a:solidFill>
                 <a:latin typeface="Calibri"/>
               </a:rPr>
-              <a:t>ISAIAH 50:10</a:t>
-            </a:r>
-          </a:p>
-          <a:p>
-            <a:pPr>
+              <a:t>7   </a:t>
+            </a:r>
+            <a:r>
+              <a:rPr sz="2400" b="0" i="0">
+                <a:solidFill>
+                  <a:srgbClr val="222B22"/>
+                </a:solidFill>
+                <a:latin typeface="Calibri"/>
+              </a:rPr>
+              <a:t>Opening prayer — “Holy Spirit, you are welcome here. Speak. We are listening.”</a:t>
+            </a:r>
+          </a:p>
+          <a:p>
+            <a:pPr marL="342900" indent="-342900">
               <a:spcAft>
-                <a:spcPts val="600"/>
+                <a:spcPts val="650"/>
               </a:spcAft>
             </a:pPr>
             <a:r>
-              <a:rPr sz="2400" b="0" i="1">
+              <a:rPr sz="2400" b="1" i="0">
+                <a:solidFill>
+                  <a:srgbClr val="97BC62"/>
+                </a:solidFill>
+                <a:latin typeface="Calibri"/>
+              </a:rPr>
+              <a:t>8   </a:t>
+            </a:r>
+            <a:r>
+              <a:rPr sz="2400" b="0" i="0">
                 <a:solidFill>
                   <a:srgbClr val="222B22"/>
                 </a:solidFill>
-                <a:latin typeface="Cambria"/>
-              </a:rPr>
-              <a:t>“Who among you fears the LORD and obeys the voice of his servant? Let him who walks in darkness and has no light trust in the name of the LORD and rely on his God.”</a:t>
+                <a:latin typeface="Calibri"/>
+              </a:rPr>
+              <a:t>Sit. Begin.</a:t>
             </a:r>
           </a:p>
         </p:txBody>
@@ -7927,7 +7847,7 @@
           <a:p>
             <a:pPr algn="r"/>
             <a:r>
-              <a:t>247</a:t>
+              <a:t>246</a:t>
             </a:r>
             <a:endParaRPr sz="1000" b="1">
               <a:solidFill>
@@ -8026,7 +7946,7 @@
                 </a:solidFill>
                 <a:latin typeface="Cambria"/>
               </a:rPr>
-              <a:t>The Signs Card — the Four Kinds of Dry</a:t>
+              <a:t>Why Tonight — Isaiah 50:10</a:t>
             </a:r>
           </a:p>
         </p:txBody>
@@ -8057,7 +7977,7 @@
               </a:spcAft>
             </a:pPr>
             <a:r>
-              <a:rPr sz="1500" b="1" i="0">
+              <a:rPr sz="1800" b="1" i="0">
                 <a:solidFill>
                   <a:srgbClr val="97BC62"/>
                 </a:solidFill>
@@ -8066,113 +7986,13 @@
               <a:t>•  </a:t>
             </a:r>
             <a:r>
-              <a:rPr sz="1500" b="0" i="0">
+              <a:rPr sz="1800" b="0" i="0">
                 <a:solidFill>
                   <a:srgbClr val="222B22"/>
                 </a:solidFill>
                 <a:latin typeface="Calibri"/>
               </a:rPr>
-              <a:t>The danger is not the dryness — it is the wrong diagnosis. One question sorts everything: “Which way does the desire point?”</a:t>
-            </a:r>
-          </a:p>
-          <a:p>
-            <a:pPr marL="342900" indent="-342900">
-              <a:spcAft>
-                <a:spcPts val="650"/>
-              </a:spcAft>
-            </a:pPr>
-            <a:r>
-              <a:rPr sz="1500" b="1" i="0">
-                <a:solidFill>
-                  <a:srgbClr val="97BC62"/>
-                </a:solidFill>
-                <a:latin typeface="Calibri"/>
-              </a:rPr>
-              <a:t>1   </a:t>
-            </a:r>
-            <a:r>
-              <a:rPr sz="1500" b="0" i="0">
-                <a:solidFill>
-                  <a:srgbClr val="222B22"/>
-                </a:solidFill>
-                <a:latin typeface="Calibri"/>
-              </a:rPr>
-              <a:t>Neglect — the desire has faded and the distance doesn’t ache; the world tastes fine. First step: wake and turn — rebuild the rhythm</a:t>
-            </a:r>
-          </a:p>
-          <a:p>
-            <a:pPr marL="342900" indent="-342900">
-              <a:spcAft>
-                <a:spcPts val="650"/>
-              </a:spcAft>
-            </a:pPr>
-            <a:r>
-              <a:rPr sz="1500" b="1" i="0">
-                <a:solidFill>
-                  <a:srgbClr val="97BC62"/>
-                </a:solidFill>
-                <a:latin typeface="Calibri"/>
-              </a:rPr>
-              <a:t>2   </a:t>
-            </a:r>
-            <a:r>
-              <a:rPr sz="1500" b="0" i="0">
-                <a:solidFill>
-                  <a:srgbClr val="222B22"/>
-                </a:solidFill>
-                <a:latin typeface="Calibri"/>
-              </a:rPr>
-              <a:t>Worn out — the desire is buried under duty; you want escape, not God. First step: rest — a lighter yoke, smaller faithful steps, stay put</a:t>
-            </a:r>
-          </a:p>
-          <a:p>
-            <a:pPr marL="342900" indent="-342900">
-              <a:spcAft>
-                <a:spcPts val="650"/>
-              </a:spcAft>
-            </a:pPr>
-            <a:r>
-              <a:rPr sz="1500" b="1" i="0">
-                <a:solidFill>
-                  <a:srgbClr val="97BC62"/>
-                </a:solidFill>
-                <a:latin typeface="Calibri"/>
-              </a:rPr>
-              <a:t>3   </a:t>
-            </a:r>
-            <a:r>
-              <a:rPr sz="1500" b="0" i="0">
-                <a:solidFill>
-                  <a:srgbClr val="222B22"/>
-                </a:solidFill>
-                <a:latin typeface="Calibri"/>
-              </a:rPr>
-              <a:t>The enemy’s dry wind — accused, pressured, a voice counseling change: quit, undo, leave. First step: resist — change nothing, pray a little more, tell someone</a:t>
-            </a:r>
-          </a:p>
-          <a:p>
-            <a:pPr marL="342900" indent="-342900">
-              <a:spcAft>
-                <a:spcPts val="650"/>
-              </a:spcAft>
-            </a:pPr>
-            <a:r>
-              <a:rPr sz="1500" b="1" i="0">
-                <a:solidFill>
-                  <a:srgbClr val="97BC62"/>
-                </a:solidFill>
-                <a:latin typeface="Calibri"/>
-              </a:rPr>
-              <a:t>4   </a:t>
-            </a:r>
-            <a:r>
-              <a:rPr sz="1500" b="0" i="0">
-                <a:solidFill>
-                  <a:srgbClr val="222B22"/>
-                </a:solidFill>
-                <a:latin typeface="Calibri"/>
-              </a:rPr>
-              <a:t>God’s own stripping — the desire intact and starving; the ache is the sign. First step: receive — wait, stay faithful, stay accompanied</a:t>
+              <a:t>In two weeks this room stops meeting — the next two Wednesdays are sendings, not endings. On the other side: a summer with no Wednesday in it.</a:t>
             </a:r>
           </a:p>
           <a:p>
@@ -8182,7 +8002,7 @@
               </a:spcAft>
             </a:pPr>
             <a:r>
-              <a:rPr sz="1500" b="1" i="0">
+              <a:rPr sz="1800" b="1" i="0">
                 <a:solidFill>
                   <a:srgbClr val="97BC62"/>
                 </a:solidFill>
@@ -8191,38 +8011,113 @@
               <a:t>•  </a:t>
             </a:r>
             <a:r>
-              <a:rPr sz="1500" b="0" i="0">
+              <a:rPr sz="1800" b="0" i="0">
                 <a:solidFill>
                   <a:srgbClr val="222B22"/>
                 </a:solidFill>
                 <a:latin typeface="Calibri"/>
               </a:rPr>
-              <a:t>Three and four command opposite motions — one says fight, the other says yield. When you cannot tell which you are in, do not decide alone — that is what Companions are for.</a:t>
-            </a:r>
-          </a:p>
-          <a:p>
-            <a:pPr marL="685800" indent="-274320">
+              <a:t>Somewhere out there — this summer, or in twenty years — every person in this room will hit a season where the practices go gray</a:t>
+            </a:r>
+          </a:p>
+          <a:p>
+            <a:pPr marL="274320" indent="-274320">
               <a:spcAft>
-                <a:spcPts val="500"/>
+                <a:spcPts val="650"/>
               </a:spcAft>
             </a:pPr>
             <a:r>
-              <a:rPr sz="1400" b="1" i="0">
+              <a:rPr sz="1800" b="1" i="0">
                 <a:solidFill>
                   <a:srgbClr val="97BC62"/>
                 </a:solidFill>
                 <a:latin typeface="Calibri"/>
               </a:rPr>
-              <a:t>–  </a:t>
-            </a:r>
-            <a:r>
-              <a:rPr sz="1400" b="0" i="1">
+              <a:t>•  </a:t>
+            </a:r>
+            <a:r>
+              <a:rPr sz="1800" b="0" i="0">
                 <a:solidFill>
                   <a:srgbClr val="222B22"/>
                 </a:solidFill>
                 <a:latin typeface="Calibri"/>
               </a:rPr>
-              <a:t>Four rules on the card — your own heart only; in every case, tell someone; no big decisions in the dark; know when to call the doctor</a:t>
+              <a:t>The most dangerous thing on the long walk is not the dryness — it is the wrong diagnosis of the dryness</a:t>
+            </a:r>
+          </a:p>
+          <a:p>
+            <a:pPr marL="274320" indent="-274320">
+              <a:spcAft>
+                <a:spcPts val="650"/>
+              </a:spcAft>
+            </a:pPr>
+            <a:r>
+              <a:rPr sz="1800" b="1" i="0">
+                <a:solidFill>
+                  <a:srgbClr val="97BC62"/>
+                </a:solidFill>
+                <a:latin typeface="Calibri"/>
+              </a:rPr>
+              <a:t>•  </a:t>
+            </a:r>
+            <a:r>
+              <a:rPr sz="1800" b="0" i="0">
+                <a:solidFill>
+                  <a:srgbClr val="222B22"/>
+                </a:solidFill>
+                <a:latin typeface="Calibri"/>
+              </a:rPr>
+              <a:t>So tonight we hand you the equipment for that season — on purpose, at the threshold, before anyone needs it</a:t>
+            </a:r>
+          </a:p>
+          <a:p>
+            <a:pPr marL="274320" indent="-274320">
+              <a:spcAft>
+                <a:spcPts val="650"/>
+              </a:spcAft>
+            </a:pPr>
+            <a:r>
+              <a:rPr sz="1800" b="1" i="0">
+                <a:solidFill>
+                  <a:srgbClr val="97BC62"/>
+                </a:solidFill>
+                <a:latin typeface="Calibri"/>
+              </a:rPr>
+              <a:t>•  </a:t>
+            </a:r>
+            <a:r>
+              <a:rPr sz="1800" b="0" i="0">
+                <a:solidFill>
+                  <a:srgbClr val="222B22"/>
+                </a:solidFill>
+                <a:latin typeface="Calibri"/>
+              </a:rPr>
+              <a:t>Psalm 23:4 — “Even though I walk through the valley of the shadow of death, I will fear no evil, for you are with me.” The road goes through.</a:t>
+            </a:r>
+          </a:p>
+          <a:p>
+            <a:pPr marL="274320" indent="-274320">
+              <a:spcAft>
+                <a:spcPts val="650"/>
+              </a:spcAft>
+            </a:pPr>
+            <a:r>
+              <a:rPr sz="1800" b="1" i="0">
+                <a:solidFill>
+                  <a:srgbClr val="97BC62"/>
+                </a:solidFill>
+                <a:latin typeface="Calibri"/>
+              </a:rPr>
+              <a:t>•  </a:t>
+            </a:r>
+            <a:r>
+              <a:rPr sz="1800" b="0" i="0">
+                <a:solidFill>
+                  <a:srgbClr val="222B22"/>
+                </a:solidFill>
+                <a:latin typeface="Calibri"/>
+              </a:rPr>
+              <a:t>Now the teaching — in the seniors’ voices, not ours</a:t>
             </a:r>
           </a:p>
         </p:txBody>
@@ -8255,13 +8150,13 @@
               </a:spcAft>
             </a:pPr>
             <a:r>
-              <a:rPr sz="1800" b="1" i="0">
+              <a:rPr sz="1200" b="1" i="0">
                 <a:solidFill>
                   <a:srgbClr val="97BC62"/>
                 </a:solidFill>
                 <a:latin typeface="Calibri"/>
               </a:rPr>
-              <a:t>THE SENTENCE TO CARRY HOME</a:t>
+              <a:t>ISAIAH 50:10</a:t>
             </a:r>
           </a:p>
           <a:p>
@@ -8277,7 +8172,7 @@
                 </a:solidFill>
                 <a:latin typeface="Cambria"/>
               </a:rPr>
-              <a:t>“The fact that His absence hurts you is the evidence that He has not gone. Drifting hearts do not ache. Abandoned fields do not thirst. A dry season is not a verdict.”</a:t>
+              <a:t>“Who among you fears the LORD and obeys the voice of his servant? Let him who walks in darkness and has no light trust in the name of the LORD and rely on his God.”</a:t>
             </a:r>
           </a:p>
         </p:txBody>
@@ -8304,7 +8199,7 @@
           <a:p>
             <a:pPr algn="r"/>
             <a:r>
-              <a:t>248</a:t>
+              <a:t>247</a:t>
             </a:r>
             <a:endParaRPr sz="1000" b="1">
               <a:solidFill>
@@ -8403,7 +8298,7 @@
                 </a:solidFill>
                 <a:latin typeface="Cambria"/>
               </a:rPr>
-              <a:t>The Path Home Card — the Written Door</a:t>
+              <a:t>The Signs Card — the Four Kinds of Dry</a:t>
             </a:r>
           </a:p>
         </p:txBody>
@@ -8434,7 +8329,7 @@
               </a:spcAft>
             </a:pPr>
             <a:r>
-              <a:rPr sz="1800" b="1" i="0">
+              <a:rPr sz="1500" b="1" i="0">
                 <a:solidFill>
                   <a:srgbClr val="97BC62"/>
                 </a:solidFill>
@@ -8443,13 +8338,13 @@
               <a:t>•  </a:t>
             </a:r>
             <a:r>
-              <a:rPr sz="1800" b="0" i="0">
+              <a:rPr sz="1500" b="0" i="0">
                 <a:solidFill>
                   <a:srgbClr val="222B22"/>
                 </a:solidFill>
                 <a:latin typeface="Calibri"/>
               </a:rPr>
-              <a:t>For the one who leaves and concludes a room like this would not want them back — most churches leave the way back unwritten. Not here.</a:t>
+              <a:t>The danger is not the dryness — it is the wrong diagnosis. One question sorts everything: “Which way does the desire point?”</a:t>
             </a:r>
           </a:p>
           <a:p>
@@ -8459,7 +8354,7 @@
               </a:spcAft>
             </a:pPr>
             <a:r>
-              <a:rPr sz="1800" b="1" i="0">
+              <a:rPr sz="1500" b="1" i="0">
                 <a:solidFill>
                   <a:srgbClr val="97BC62"/>
                 </a:solidFill>
@@ -8468,13 +8363,13 @@
               <a:t>1   </a:t>
             </a:r>
             <a:r>
-              <a:rPr sz="1800" b="0" i="0">
+              <a:rPr sz="1500" b="0" i="0">
                 <a:solidFill>
                   <a:srgbClr val="222B22"/>
                 </a:solidFill>
                 <a:latin typeface="Calibri"/>
               </a:rPr>
-              <a:t>Come as you are — conviction is specific and hopeful and draws you toward home; shame is vague and hopeless and drives you away</a:t>
+              <a:t>Neglect — the desire has faded and the distance doesn’t ache; the world tastes fine. First step: wake and turn — rebuild the rhythm</a:t>
             </a:r>
           </a:p>
           <a:p>
@@ -8484,7 +8379,7 @@
               </a:spcAft>
             </a:pPr>
             <a:r>
-              <a:rPr sz="1800" b="1" i="0">
+              <a:rPr sz="1500" b="1" i="0">
                 <a:solidFill>
                   <a:srgbClr val="97BC62"/>
                 </a:solidFill>
@@ -8493,13 +8388,13 @@
               <a:t>2   </a:t>
             </a:r>
             <a:r>
-              <a:rPr sz="1800" b="0" i="0">
+              <a:rPr sz="1500" b="0" i="0">
                 <a:solidFill>
                   <a:srgbClr val="222B22"/>
                 </a:solidFill>
                 <a:latin typeface="Calibri"/>
               </a:rPr>
-              <a:t>Tell it straight — to God in plain words, and to one trusted person; you choose the person and how much</a:t>
+              <a:t>Worn out — the desire is buried under duty; you want escape, not God. First step: rest — a lighter yoke, smaller faithful steps, stay put</a:t>
             </a:r>
           </a:p>
           <a:p>
@@ -8509,7 +8404,7 @@
               </a:spcAft>
             </a:pPr>
             <a:r>
-              <a:rPr sz="1800" b="1" i="0">
+              <a:rPr sz="1500" b="1" i="0">
                 <a:solidFill>
                   <a:srgbClr val="97BC62"/>
                 </a:solidFill>
@@ -8518,13 +8413,13 @@
               <a:t>3   </a:t>
             </a:r>
             <a:r>
-              <a:rPr sz="1800" b="0" i="0">
+              <a:rPr sz="1500" b="0" i="0">
                 <a:solidFill>
                   <a:srgbClr val="222B22"/>
                 </a:solidFill>
                 <a:latin typeface="Calibri"/>
               </a:rPr>
-              <a:t>Grieve what needs grieving — lament is faith with tears in its voice</a:t>
+              <a:t>The enemy’s dry wind — accused, pressured, a voice counseling change: quit, undo, leave. First step: resist — change nothing, pray a little more, tell someone</a:t>
             </a:r>
           </a:p>
           <a:p>
@@ -8534,7 +8429,7 @@
               </a:spcAft>
             </a:pPr>
             <a:r>
-              <a:rPr sz="1800" b="1" i="0">
+              <a:rPr sz="1500" b="1" i="0">
                 <a:solidFill>
                   <a:srgbClr val="97BC62"/>
                 </a:solidFill>
@@ -8543,38 +8438,13 @@
               <a:t>4   </a:t>
             </a:r>
             <a:r>
-              <a:rPr sz="1800" b="0" i="0">
+              <a:rPr sz="1500" b="0" i="0">
                 <a:solidFill>
                   <a:srgbClr val="222B22"/>
                 </a:solidFill>
                 <a:latin typeface="Calibri"/>
               </a:rPr>
-              <a:t>Return to the table — small; do not start over, begin again on the next available day</a:t>
-            </a:r>
-          </a:p>
-          <a:p>
-            <a:pPr marL="342900" indent="-342900">
-              <a:spcAft>
-                <a:spcPts val="650"/>
-              </a:spcAft>
-            </a:pPr>
-            <a:r>
-              <a:rPr sz="1800" b="1" i="0">
-                <a:solidFill>
-                  <a:srgbClr val="97BC62"/>
-                </a:solidFill>
-                <a:latin typeface="Calibri"/>
-              </a:rPr>
-              <a:t>5   </a:t>
-            </a:r>
-            <a:r>
-              <a:rPr sz="1800" b="0" i="0">
-                <a:solidFill>
-                  <a:srgbClr val="222B22"/>
-                </a:solidFill>
-                <a:latin typeface="Calibri"/>
-              </a:rPr>
-              <a:t>Let it be celebrated — in the Lord’s own story of return, the ending is not a probation meeting. It is a feast.</a:t>
+              <a:t>God’s own stripping — the desire intact and starving; the ache is the sign. First step: receive — wait, stay faithful, stay accompanied</a:t>
             </a:r>
           </a:p>
           <a:p>
@@ -8584,7 +8454,7 @@
               </a:spcAft>
             </a:pPr>
             <a:r>
-              <a:rPr sz="1800" b="1" i="0">
+              <a:rPr sz="1500" b="1" i="0">
                 <a:solidFill>
                   <a:srgbClr val="97BC62"/>
                 </a:solidFill>
@@ -8593,13 +8463,38 @@
               <a:t>•  </a:t>
             </a:r>
             <a:r>
-              <a:rPr sz="1800" b="0" i="0">
+              <a:rPr sz="1500" b="0" i="0">
                 <a:solidFill>
                   <a:srgbClr val="222B22"/>
                 </a:solidFill>
                 <a:latin typeface="Calibri"/>
               </a:rPr>
-              <a:t>The witnessed filing — everyone files the card now, while we watch each other do it: “The door is not locked. The light is on.”</a:t>
+              <a:t>Three and four command opposite motions — one says fight, the other says yield. When you cannot tell which you are in, do not decide alone — that is what Companions are for.</a:t>
+            </a:r>
+          </a:p>
+          <a:p>
+            <a:pPr marL="685800" indent="-274320">
+              <a:spcAft>
+                <a:spcPts val="500"/>
+              </a:spcAft>
+            </a:pPr>
+            <a:r>
+              <a:rPr sz="1400" b="1" i="0">
+                <a:solidFill>
+                  <a:srgbClr val="97BC62"/>
+                </a:solidFill>
+                <a:latin typeface="Calibri"/>
+              </a:rPr>
+              <a:t>–  </a:t>
+            </a:r>
+            <a:r>
+              <a:rPr sz="1400" b="0" i="1">
+                <a:solidFill>
+                  <a:srgbClr val="222B22"/>
+                </a:solidFill>
+                <a:latin typeface="Calibri"/>
+              </a:rPr>
+              <a:t>Four rules on the card — your own heart only; in every case, tell someone; no big decisions in the dark; know when to call the doctor</a:t>
             </a:r>
           </a:p>
         </p:txBody>
@@ -8613,7 +8508,7 @@
         <p:spPr>
           <a:xfrm>
             <a:off x="6766560" y="1737360"/>
-            <a:ext cx="4663440" cy="3310128"/>
+            <a:ext cx="4663440" cy="2542032"/>
           </a:xfrm>
           <a:prstGeom prst="rect">
             <a:avLst/>
@@ -8632,13 +8527,13 @@
               </a:spcAft>
             </a:pPr>
             <a:r>
-              <a:rPr sz="1200" b="1" i="0">
+              <a:rPr sz="1800" b="1" i="0">
                 <a:solidFill>
                   <a:srgbClr val="97BC62"/>
                 </a:solidFill>
                 <a:latin typeface="Calibri"/>
               </a:rPr>
-              <a:t>LUKE 15:20</a:t>
+              <a:t>THE SENTENCE TO CARRY HOME</a:t>
             </a:r>
           </a:p>
           <a:p>
@@ -8654,23 +8549,7 @@
                 </a:solidFill>
                 <a:latin typeface="Cambria"/>
               </a:rPr>
-              <a:t>“But while he was still a long way off, his father saw him and felt compassion, and ran and embraced him and kissed him.”</a:t>
-            </a:r>
-          </a:p>
-          <a:p>
-            <a:pPr>
-              <a:spcAft>
-                <a:spcPts val="600"/>
-              </a:spcAft>
-            </a:pPr>
-            <a:r>
-              <a:rPr sz="2400" b="0" i="1">
-                <a:solidFill>
-                  <a:srgbClr val="222B22"/>
-                </a:solidFill>
-                <a:latin typeface="Cambria"/>
-              </a:rPr>
-              <a:t>The father was watching the road. He ran first, embraced first, and asked for no accounting before the robe.</a:t>
+              <a:t>“The fact that His absence hurts you is the evidence that He has not gone. Drifting hearts do not ache. Abandoned fields do not thirst. A dry season is not a verdict.”</a:t>
             </a:r>
           </a:p>
         </p:txBody>
@@ -8697,7 +8576,7 @@
           <a:p>
             <a:pPr algn="r"/>
             <a:r>
-              <a:t>249</a:t>
+              <a:t>248</a:t>
             </a:r>
             <a:endParaRPr sz="1000" b="1">
               <a:solidFill>
@@ -8796,7 +8675,7 @@
                 </a:solidFill>
                 <a:latin typeface="Cambria"/>
               </a:rPr>
-              <a:t>The Journal Arc Review</a:t>
+              <a:t>The Path Home Card — the Written Door</a:t>
             </a:r>
           </a:p>
         </p:txBody>
@@ -8809,8 +8688,8 @@
         </p:nvSpPr>
         <p:spPr>
           <a:xfrm>
-            <a:off x="822960" y="1554480"/>
-            <a:ext cx="10515600" cy="4892040"/>
+            <a:off x="822960" y="1600200"/>
+            <a:ext cx="5669280" cy="4572000"/>
           </a:xfrm>
           <a:prstGeom prst="rect">
             <a:avLst/>
@@ -8823,11 +8702,11 @@
           <a:p>
             <a:pPr marL="274320" indent="-274320">
               <a:spcAft>
-                <a:spcPts val="750"/>
+                <a:spcPts val="650"/>
               </a:spcAft>
             </a:pPr>
             <a:r>
-              <a:rPr sz="2400" b="1" i="0">
+              <a:rPr sz="1800" b="1" i="0">
                 <a:solidFill>
                   <a:srgbClr val="97BC62"/>
                 </a:solidFill>
@@ -8836,23 +8715,148 @@
               <a:t>•  </a:t>
             </a:r>
             <a:r>
-              <a:rPr sz="2400" b="0" i="0">
+              <a:rPr sz="1800" b="0" i="0">
                 <a:solidFill>
                   <a:srgbClr val="222B22"/>
                 </a:solidFill>
                 <a:latin typeface="Calibri"/>
               </a:rPr>
-              <a:t>Take out your journal — the one you have been writing in since September. If yours is missing, take paper and walk the year from memory.</a:t>
+              <a:t>For the one who leaves and concludes a room like this would not want them back — most churches leave the way back unwritten. Not here.</a:t>
+            </a:r>
+          </a:p>
+          <a:p>
+            <a:pPr marL="342900" indent="-342900">
+              <a:spcAft>
+                <a:spcPts val="650"/>
+              </a:spcAft>
+            </a:pPr>
+            <a:r>
+              <a:rPr sz="1800" b="1" i="0">
+                <a:solidFill>
+                  <a:srgbClr val="97BC62"/>
+                </a:solidFill>
+                <a:latin typeface="Calibri"/>
+              </a:rPr>
+              <a:t>1   </a:t>
+            </a:r>
+            <a:r>
+              <a:rPr sz="1800" b="0" i="0">
+                <a:solidFill>
+                  <a:srgbClr val="222B22"/>
+                </a:solidFill>
+                <a:latin typeface="Calibri"/>
+              </a:rPr>
+              <a:t>Come as you are — conviction is specific and hopeful and draws you toward home; shame is vague and hopeless and drives you away</a:t>
+            </a:r>
+          </a:p>
+          <a:p>
+            <a:pPr marL="342900" indent="-342900">
+              <a:spcAft>
+                <a:spcPts val="650"/>
+              </a:spcAft>
+            </a:pPr>
+            <a:r>
+              <a:rPr sz="1800" b="1" i="0">
+                <a:solidFill>
+                  <a:srgbClr val="97BC62"/>
+                </a:solidFill>
+                <a:latin typeface="Calibri"/>
+              </a:rPr>
+              <a:t>2   </a:t>
+            </a:r>
+            <a:r>
+              <a:rPr sz="1800" b="0" i="0">
+                <a:solidFill>
+                  <a:srgbClr val="222B22"/>
+                </a:solidFill>
+                <a:latin typeface="Calibri"/>
+              </a:rPr>
+              <a:t>Tell it straight — to God in plain words, and to one trusted person; you choose the person and how much</a:t>
+            </a:r>
+          </a:p>
+          <a:p>
+            <a:pPr marL="342900" indent="-342900">
+              <a:spcAft>
+                <a:spcPts val="650"/>
+              </a:spcAft>
+            </a:pPr>
+            <a:r>
+              <a:rPr sz="1800" b="1" i="0">
+                <a:solidFill>
+                  <a:srgbClr val="97BC62"/>
+                </a:solidFill>
+                <a:latin typeface="Calibri"/>
+              </a:rPr>
+              <a:t>3   </a:t>
+            </a:r>
+            <a:r>
+              <a:rPr sz="1800" b="0" i="0">
+                <a:solidFill>
+                  <a:srgbClr val="222B22"/>
+                </a:solidFill>
+                <a:latin typeface="Calibri"/>
+              </a:rPr>
+              <a:t>Grieve what needs grieving — lament is faith with tears in its voice</a:t>
+            </a:r>
+          </a:p>
+          <a:p>
+            <a:pPr marL="342900" indent="-342900">
+              <a:spcAft>
+                <a:spcPts val="650"/>
+              </a:spcAft>
+            </a:pPr>
+            <a:r>
+              <a:rPr sz="1800" b="1" i="0">
+                <a:solidFill>
+                  <a:srgbClr val="97BC62"/>
+                </a:solidFill>
+                <a:latin typeface="Calibri"/>
+              </a:rPr>
+              <a:t>4   </a:t>
+            </a:r>
+            <a:r>
+              <a:rPr sz="1800" b="0" i="0">
+                <a:solidFill>
+                  <a:srgbClr val="222B22"/>
+                </a:solidFill>
+                <a:latin typeface="Calibri"/>
+              </a:rPr>
+              <a:t>Return to the table — small; do not start over, begin again on the next available day</a:t>
+            </a:r>
+          </a:p>
+          <a:p>
+            <a:pPr marL="342900" indent="-342900">
+              <a:spcAft>
+                <a:spcPts val="650"/>
+              </a:spcAft>
+            </a:pPr>
+            <a:r>
+              <a:rPr sz="1800" b="1" i="0">
+                <a:solidFill>
+                  <a:srgbClr val="97BC62"/>
+                </a:solidFill>
+                <a:latin typeface="Calibri"/>
+              </a:rPr>
+              <a:t>5   </a:t>
+            </a:r>
+            <a:r>
+              <a:rPr sz="1800" b="0" i="0">
+                <a:solidFill>
+                  <a:srgbClr val="222B22"/>
+                </a:solidFill>
+                <a:latin typeface="Calibri"/>
+              </a:rPr>
+              <a:t>Let it be celebrated — in the Lord’s own story of return, the ending is not a probation meeting. It is a feast.</a:t>
             </a:r>
           </a:p>
           <a:p>
             <a:pPr marL="274320" indent="-274320">
               <a:spcAft>
-                <a:spcPts val="750"/>
+                <a:spcPts val="650"/>
               </a:spcAft>
             </a:pPr>
             <a:r>
-              <a:rPr sz="2400" b="1" i="0">
+              <a:rPr sz="1800" b="1" i="0">
                 <a:solidFill>
                   <a:srgbClr val="97BC62"/>
                 </a:solidFill>
@@ -8861,113 +8865,84 @@
               <a:t>•  </a:t>
             </a:r>
             <a:r>
-              <a:rPr sz="2400" b="0" i="0">
+              <a:rPr sz="1800" b="0" i="0">
                 <a:solidFill>
                   <a:srgbClr val="222B22"/>
                 </a:solidFill>
                 <a:latin typeface="Calibri"/>
               </a:rPr>
-              <a:t>Go back to the beginning and read forward — you’re walking the road again, not re-taking the class</a:t>
-            </a:r>
-          </a:p>
-          <a:p>
-            <a:pPr marL="342900" indent="-342900">
+              <a:t>The witnessed filing — everyone files the card now, while we watch each other do it: “The door is not locked. The light is on.”</a:t>
+            </a:r>
+          </a:p>
+        </p:txBody>
+      </p:sp>
+      <p:sp>
+        <p:nvSpPr>
+          <p:cNvPr id="6" name="TextBox 6"/>
+          <p:cNvSpPr txBox="1"/>
+          <p:nvPr/>
+        </p:nvSpPr>
+        <p:spPr>
+          <a:xfrm>
+            <a:off x="6766560" y="1737360"/>
+            <a:ext cx="4663440" cy="3310128"/>
+          </a:xfrm>
+          <a:prstGeom prst="rect">
+            <a:avLst/>
+          </a:prstGeom>
+          <a:solidFill>
+            <a:srgbClr val="F1F6EC"/>
+          </a:solidFill>
+        </p:spPr>
+        <p:txBody>
+          <a:bodyPr wrap="square" lIns="91440" tIns="91440" rIns="91440" bIns="91440" anchor="ctr"/>
+          <a:lstStyle/>
+          <a:p>
+            <a:pPr>
               <a:spcAft>
-                <a:spcPts val="750"/>
+                <a:spcPts val="900"/>
               </a:spcAft>
             </a:pPr>
             <a:r>
-              <a:rPr sz="2400" b="1" i="0">
+              <a:rPr sz="1200" b="1" i="0">
                 <a:solidFill>
                   <a:srgbClr val="97BC62"/>
                 </a:solidFill>
                 <a:latin typeface="Calibri"/>
               </a:rPr>
-              <a:t>1   </a:t>
-            </a:r>
-            <a:r>
-              <a:rPr sz="2400" b="0" i="0">
-                <a:solidFill>
-                  <a:srgbClr val="222B22"/>
-                </a:solidFill>
-                <a:latin typeface="Calibri"/>
-              </a:rPr>
-              <a:t>Where did I begin?</a:t>
-            </a:r>
-          </a:p>
-          <a:p>
-            <a:pPr marL="342900" indent="-342900">
+              <a:t>LUKE 15:20</a:t>
+            </a:r>
+          </a:p>
+          <a:p>
+            <a:pPr>
               <a:spcAft>
-                <a:spcPts val="750"/>
+                <a:spcPts val="600"/>
               </a:spcAft>
             </a:pPr>
             <a:r>
-              <a:rPr sz="2400" b="1" i="0">
-                <a:solidFill>
-                  <a:srgbClr val="97BC62"/>
-                </a:solidFill>
-                <a:latin typeface="Calibri"/>
-              </a:rPr>
-              <a:t>2   </a:t>
-            </a:r>
-            <a:r>
-              <a:rPr sz="2400" b="0" i="0">
+              <a:rPr sz="2400" b="0" i="1">
                 <a:solidFill>
                   <a:srgbClr val="222B22"/>
                 </a:solidFill>
-                <a:latin typeface="Calibri"/>
-              </a:rPr>
-              <a:t>Where did He meet me? — mark those pages; fold a corner</a:t>
-            </a:r>
-          </a:p>
-          <a:p>
-            <a:pPr marL="342900" indent="-342900">
+                <a:latin typeface="Cambria"/>
+              </a:rPr>
+              <a:t>“But while he was still a long way off, his father saw him and felt compassion, and ran and embraced him and kissed him.”</a:t>
+            </a:r>
+          </a:p>
+          <a:p>
+            <a:pPr>
               <a:spcAft>
-                <a:spcPts val="750"/>
+                <a:spcPts val="600"/>
               </a:spcAft>
             </a:pPr>
             <a:r>
-              <a:rPr sz="2400" b="1" i="0">
-                <a:solidFill>
-                  <a:srgbClr val="97BC62"/>
-                </a:solidFill>
-                <a:latin typeface="Calibri"/>
-              </a:rPr>
-              <a:t>3   </a:t>
-            </a:r>
-            <a:r>
-              <a:rPr sz="2400" b="0" i="0">
+              <a:rPr sz="2400" b="0" i="1">
                 <a:solidFill>
                   <a:srgbClr val="222B22"/>
                 </a:solidFill>
-                <a:latin typeface="Calibri"/>
-              </a:rPr>
-              <a:t>What do I not want to lose?</a:t>
-            </a:r>
-          </a:p>
-          <a:p>
-            <a:pPr marL="274320" indent="-274320">
-              <a:spcAft>
-                <a:spcPts val="750"/>
-              </a:spcAft>
-            </a:pPr>
-            <a:r>
-              <a:rPr sz="2400" b="1" i="0">
-                <a:solidFill>
-                  <a:srgbClr val="97BC62"/>
-                </a:solidFill>
-                <a:latin typeface="Calibri"/>
-              </a:rPr>
-              <a:t>•  </a:t>
-            </a:r>
-            <a:r>
-              <a:rPr sz="2400" b="0" i="0">
-                <a:solidFill>
-                  <a:srgbClr val="222B22"/>
-                </a:solidFill>
-                <a:latin typeface="Calibri"/>
-              </a:rPr>
-              <a:t>Twelve minutes, in quiet — parents and teens both. Then find your one sentence.</a:t>
+                <a:latin typeface="Cambria"/>
+              </a:rPr>
+              <a:t>The father was watching the road. He ran first, embraced first, and asked for no accounting before the robe.</a:t>
             </a:r>
           </a:p>
         </p:txBody>
@@ -8994,7 +8969,7 @@
           <a:p>
             <a:pPr algn="r"/>
             <a:r>
-              <a:t>250</a:t>
+              <a:t>249</a:t>
             </a:r>
             <a:endParaRPr sz="1000" b="1">
               <a:solidFill>
@@ -9093,7 +9068,7 @@
                 </a:solidFill>
                 <a:latin typeface="Cambria"/>
               </a:rPr>
-              <a:t>One Sentence, and the Testimony Gathering</a:t>
+              <a:t>The Journal Arc Review</a:t>
             </a:r>
           </a:p>
         </p:txBody>
@@ -9120,7 +9095,7 @@
           <a:p>
             <a:pPr marL="274320" indent="-274320">
               <a:spcAft>
-                <a:spcPts val="900"/>
+                <a:spcPts val="750"/>
               </a:spcAft>
             </a:pPr>
             <a:r>
@@ -9139,13 +9114,13 @@
                 </a:solidFill>
                 <a:latin typeface="Calibri"/>
               </a:rPr>
-              <a:t>One sentence each — where He met you this year, or what you don’t want to lose. Just the sentence; no story around it. A parent starts.</a:t>
+              <a:t>Take out your journal — the one you have been writing in since September. If yours is missing, take paper and walk the year from memory.</a:t>
             </a:r>
           </a:p>
           <a:p>
             <a:pPr marL="274320" indent="-274320">
               <a:spcAft>
-                <a:spcPts val="900"/>
+                <a:spcPts val="750"/>
               </a:spcAft>
             </a:pPr>
             <a:r>
@@ -9164,13 +9139,88 @@
                 </a:solidFill>
                 <a:latin typeface="Calibri"/>
               </a:rPr>
-              <a:t>Pass-anytime holds — a pass gets the same nod a sentence gets</a:t>
+              <a:t>Go back to the beginning and read forward — you’re walking the road again, not re-taking the class</a:t>
+            </a:r>
+          </a:p>
+          <a:p>
+            <a:pPr marL="342900" indent="-342900">
+              <a:spcAft>
+                <a:spcPts val="750"/>
+              </a:spcAft>
+            </a:pPr>
+            <a:r>
+              <a:rPr sz="2400" b="1" i="0">
+                <a:solidFill>
+                  <a:srgbClr val="97BC62"/>
+                </a:solidFill>
+                <a:latin typeface="Calibri"/>
+              </a:rPr>
+              <a:t>1   </a:t>
+            </a:r>
+            <a:r>
+              <a:rPr sz="2400" b="0" i="0">
+                <a:solidFill>
+                  <a:srgbClr val="222B22"/>
+                </a:solidFill>
+                <a:latin typeface="Calibri"/>
+              </a:rPr>
+              <a:t>Where did I begin?</a:t>
+            </a:r>
+          </a:p>
+          <a:p>
+            <a:pPr marL="342900" indent="-342900">
+              <a:spcAft>
+                <a:spcPts val="750"/>
+              </a:spcAft>
+            </a:pPr>
+            <a:r>
+              <a:rPr sz="2400" b="1" i="0">
+                <a:solidFill>
+                  <a:srgbClr val="97BC62"/>
+                </a:solidFill>
+                <a:latin typeface="Calibri"/>
+              </a:rPr>
+              <a:t>2   </a:t>
+            </a:r>
+            <a:r>
+              <a:rPr sz="2400" b="0" i="0">
+                <a:solidFill>
+                  <a:srgbClr val="222B22"/>
+                </a:solidFill>
+                <a:latin typeface="Calibri"/>
+              </a:rPr>
+              <a:t>Where did He meet me? — mark those pages; fold a corner</a:t>
+            </a:r>
+          </a:p>
+          <a:p>
+            <a:pPr marL="342900" indent="-342900">
+              <a:spcAft>
+                <a:spcPts val="750"/>
+              </a:spcAft>
+            </a:pPr>
+            <a:r>
+              <a:rPr sz="2400" b="1" i="0">
+                <a:solidFill>
+                  <a:srgbClr val="97BC62"/>
+                </a:solidFill>
+                <a:latin typeface="Calibri"/>
+              </a:rPr>
+              <a:t>3   </a:t>
+            </a:r>
+            <a:r>
+              <a:rPr sz="2400" b="0" i="0">
+                <a:solidFill>
+                  <a:srgbClr val="222B22"/>
+                </a:solidFill>
+                <a:latin typeface="Calibri"/>
+              </a:rPr>
+              <a:t>What do I not want to lose?</a:t>
             </a:r>
           </a:p>
           <a:p>
             <a:pPr marL="274320" indent="-274320">
               <a:spcAft>
-                <a:spcPts val="900"/>
+                <a:spcPts val="750"/>
               </a:spcAft>
             </a:pPr>
             <a:r>
@@ -9189,57 +9239,7 @@
                 </a:solidFill>
                 <a:latin typeface="Calibri"/>
               </a:rPr>
-              <a:t>Then one more invitation, genuinely optional: your sentence, read aloud at the sendings — Week 21 or Week 22</a:t>
-            </a:r>
-          </a:p>
-          <a:p>
-            <a:pPr marL="274320" indent="-274320">
-              <a:spcAft>
-                <a:spcPts val="900"/>
-              </a:spcAft>
-            </a:pPr>
-            <a:r>
-              <a:rPr sz="2400" b="1" i="0">
-                <a:solidFill>
-                  <a:srgbClr val="97BC62"/>
-                </a:solidFill>
-                <a:latin typeface="Calibri"/>
-              </a:rPr>
-              <a:t>•  </a:t>
-            </a:r>
-            <a:r>
-              <a:rPr sz="2400" b="0" i="0">
-                <a:solidFill>
-                  <a:srgbClr val="222B22"/>
-                </a:solidFill>
-                <a:latin typeface="Calibri"/>
-              </a:rPr>
-              <a:t>Written down exactly as you say it, read back for your nod — signed or anonymous, your choice</a:t>
-            </a:r>
-          </a:p>
-          <a:p>
-            <a:pPr marL="274320" indent="-274320">
-              <a:spcAft>
-                <a:spcPts val="900"/>
-              </a:spcAft>
-            </a:pPr>
-            <a:r>
-              <a:rPr sz="2400" b="1" i="0">
-                <a:solidFill>
-                  <a:srgbClr val="97BC62"/>
-                </a:solidFill>
-                <a:latin typeface="Calibri"/>
-              </a:rPr>
-              <a:t>•  </a:t>
-            </a:r>
-            <a:r>
-              <a:rPr sz="2400" b="0" i="0">
-                <a:solidFill>
-                  <a:srgbClr val="222B22"/>
-                </a:solidFill>
-                <a:latin typeface="Calibri"/>
-              </a:rPr>
-              <a:t>“An empty card is a complete answer.” Nothing written, nothing noted, and nobody will ask again.</a:t>
+              <a:t>Twelve minutes, in quiet — parents and teens both. Then find your one sentence.</a:t>
             </a:r>
           </a:p>
         </p:txBody>
@@ -9266,7 +9266,7 @@
           <a:p>
             <a:pPr algn="r"/>
             <a:r>
-              <a:t>251</a:t>
+              <a:t>250</a:t>
             </a:r>
             <a:endParaRPr sz="1000" b="1">
               <a:solidFill>

--- a/_implementation-notes/evening-series/FotH Evening Session 20 Slides DRAFT v1.pptx
+++ b/_implementation-notes/evening-series/FotH Evening Session 20 Slides DRAFT v1.pptx
@@ -7070,7 +7070,7 @@
           <p:nvPr/>
         </p:nvPicPr>
         <p:blipFill>
-          <a:blip r:embed="rId4"/>
+          <a:blip r:embed="rId5"/>
           <a:stretch>
             <a:fillRect/>
           </a:stretch>

--- a/_implementation-notes/evening-series/FotH Evening Session 20 Slides DRAFT v1.pptx
+++ b/_implementation-notes/evening-series/FotH Evening Session 20 Slides DRAFT v1.pptx
@@ -5247,7 +5247,7 @@
           <a:p>
             <a:pPr algn="r"/>
             <a:r>
-              <a:t>251</a:t>
+              <a:t>290</a:t>
             </a:r>
             <a:endParaRPr sz="1000" b="1">
               <a:solidFill>
@@ -5494,7 +5494,7 @@
           <a:p>
             <a:pPr algn="r"/>
             <a:r>
-              <a:t>252</a:t>
+              <a:t>291</a:t>
             </a:r>
             <a:endParaRPr sz="1000" b="1">
               <a:solidFill>
@@ -5686,7 +5686,7 @@
           <a:p>
             <a:pPr algn="r"/>
             <a:r>
-              <a:t>253</a:t>
+              <a:t>292</a:t>
             </a:r>
             <a:endParaRPr sz="1000" b="1">
               <a:solidFill>
@@ -5878,7 +5878,7 @@
           <a:p>
             <a:pPr algn="r"/>
             <a:r>
-              <a:t>253a</a:t>
+              <a:t>293</a:t>
             </a:r>
             <a:endParaRPr sz="1000" b="1">
               <a:solidFill>
@@ -6175,7 +6175,7 @@
           <a:p>
             <a:pPr algn="r"/>
             <a:r>
-              <a:t>254</a:t>
+              <a:t>294</a:t>
             </a:r>
             <a:endParaRPr sz="1000" b="1">
               <a:solidFill>
@@ -6620,7 +6620,7 @@
           <a:p>
             <a:pPr algn="r"/>
             <a:r>
-              <a:t>255</a:t>
+              <a:t>295</a:t>
             </a:r>
             <a:endParaRPr sz="1000" b="1">
               <a:solidFill>
@@ -6869,7 +6869,7 @@
           <a:p>
             <a:pPr algn="r"/>
             <a:r>
-              <a:t>244</a:t>
+              <a:t>282</a:t>
             </a:r>
             <a:endParaRPr sz="1000" b="1">
               <a:solidFill>
@@ -7050,7 +7050,7 @@
           <a:p>
             <a:pPr algn="r"/>
             <a:r>
-              <a:t>244a</a:t>
+              <a:t>283</a:t>
             </a:r>
             <a:endParaRPr sz="1000" b="1">
               <a:solidFill>
@@ -7464,7 +7464,7 @@
           <a:p>
             <a:pPr algn="r"/>
             <a:r>
-              <a:t>245</a:t>
+              <a:t>284</a:t>
             </a:r>
             <a:endParaRPr sz="1000" b="1">
               <a:solidFill>
@@ -7847,7 +7847,7 @@
           <a:p>
             <a:pPr algn="r"/>
             <a:r>
-              <a:t>246</a:t>
+              <a:t>285</a:t>
             </a:r>
             <a:endParaRPr sz="1000" b="1">
               <a:solidFill>
@@ -8199,7 +8199,7 @@
           <a:p>
             <a:pPr algn="r"/>
             <a:r>
-              <a:t>247</a:t>
+              <a:t>286</a:t>
             </a:r>
             <a:endParaRPr sz="1000" b="1">
               <a:solidFill>
@@ -8576,7 +8576,7 @@
           <a:p>
             <a:pPr algn="r"/>
             <a:r>
-              <a:t>248</a:t>
+              <a:t>287</a:t>
             </a:r>
             <a:endParaRPr sz="1000" b="1">
               <a:solidFill>
@@ -8969,7 +8969,7 @@
           <a:p>
             <a:pPr algn="r"/>
             <a:r>
-              <a:t>249</a:t>
+              <a:t>288</a:t>
             </a:r>
             <a:endParaRPr sz="1000" b="1">
               <a:solidFill>
@@ -9266,7 +9266,7 @@
           <a:p>
             <a:pPr algn="r"/>
             <a:r>
-              <a:t>250</a:t>
+              <a:t>289</a:t>
             </a:r>
             <a:endParaRPr sz="1000" b="1">
               <a:solidFill>

--- a/_implementation-notes/evening-series/FotH Evening Session 20 Slides DRAFT v1.pptx
+++ b/_implementation-notes/evening-series/FotH Evening Session 20 Slides DRAFT v1.pptx
@@ -7070,7 +7070,7 @@
           <p:nvPr/>
         </p:nvPicPr>
         <p:blipFill>
-          <a:blip r:embed="rId5"/>
+          <a:blip r:embed="rId6"/>
           <a:stretch>
             <a:fillRect/>
           </a:stretch>

--- a/_implementation-notes/evening-series/FotH Evening Session 20 Slides DRAFT v1.pptx
+++ b/_implementation-notes/evening-series/FotH Evening Session 20 Slides DRAFT v1.pptx
@@ -5247,7 +5247,7 @@
           <a:p>
             <a:pPr algn="r"/>
             <a:r>
-              <a:t>290</a:t>
+              <a:t>291</a:t>
             </a:r>
             <a:endParaRPr sz="1000" b="1">
               <a:solidFill>
@@ -5494,7 +5494,7 @@
           <a:p>
             <a:pPr algn="r"/>
             <a:r>
-              <a:t>291</a:t>
+              <a:t>292</a:t>
             </a:r>
             <a:endParaRPr sz="1000" b="1">
               <a:solidFill>
@@ -5686,7 +5686,7 @@
           <a:p>
             <a:pPr algn="r"/>
             <a:r>
-              <a:t>292</a:t>
+              <a:t>293</a:t>
             </a:r>
             <a:endParaRPr sz="1000" b="1">
               <a:solidFill>
@@ -5878,7 +5878,7 @@
           <a:p>
             <a:pPr algn="r"/>
             <a:r>
-              <a:t>293</a:t>
+              <a:t>294</a:t>
             </a:r>
             <a:endParaRPr sz="1000" b="1">
               <a:solidFill>
@@ -6175,7 +6175,7 @@
           <a:p>
             <a:pPr algn="r"/>
             <a:r>
-              <a:t>294</a:t>
+              <a:t>295</a:t>
             </a:r>
             <a:endParaRPr sz="1000" b="1">
               <a:solidFill>
@@ -6620,7 +6620,7 @@
           <a:p>
             <a:pPr algn="r"/>
             <a:r>
-              <a:t>295</a:t>
+              <a:t>296</a:t>
             </a:r>
             <a:endParaRPr sz="1000" b="1">
               <a:solidFill>
@@ -6869,7 +6869,7 @@
           <a:p>
             <a:pPr algn="r"/>
             <a:r>
-              <a:t>282</a:t>
+              <a:t>283</a:t>
             </a:r>
             <a:endParaRPr sz="1000" b="1">
               <a:solidFill>
@@ -7050,7 +7050,7 @@
           <a:p>
             <a:pPr algn="r"/>
             <a:r>
-              <a:t>283</a:t>
+              <a:t>284</a:t>
             </a:r>
             <a:endParaRPr sz="1000" b="1">
               <a:solidFill>
@@ -7464,7 +7464,7 @@
           <a:p>
             <a:pPr algn="r"/>
             <a:r>
-              <a:t>284</a:t>
+              <a:t>285</a:t>
             </a:r>
             <a:endParaRPr sz="1000" b="1">
               <a:solidFill>
@@ -7847,7 +7847,7 @@
           <a:p>
             <a:pPr algn="r"/>
             <a:r>
-              <a:t>285</a:t>
+              <a:t>286</a:t>
             </a:r>
             <a:endParaRPr sz="1000" b="1">
               <a:solidFill>
@@ -8199,7 +8199,7 @@
           <a:p>
             <a:pPr algn="r"/>
             <a:r>
-              <a:t>286</a:t>
+              <a:t>287</a:t>
             </a:r>
             <a:endParaRPr sz="1000" b="1">
               <a:solidFill>
@@ -8576,7 +8576,7 @@
           <a:p>
             <a:pPr algn="r"/>
             <a:r>
-              <a:t>287</a:t>
+              <a:t>288</a:t>
             </a:r>
             <a:endParaRPr sz="1000" b="1">
               <a:solidFill>
@@ -8969,7 +8969,7 @@
           <a:p>
             <a:pPr algn="r"/>
             <a:r>
-              <a:t>288</a:t>
+              <a:t>289</a:t>
             </a:r>
             <a:endParaRPr sz="1000" b="1">
               <a:solidFill>
@@ -9266,7 +9266,7 @@
           <a:p>
             <a:pPr algn="r"/>
             <a:r>
-              <a:t>289</a:t>
+              <a:t>290</a:t>
             </a:r>
             <a:endParaRPr sz="1000" b="1">
               <a:solidFill>

--- a/_implementation-notes/evening-series/FotH Evening Session 20 Slides DRAFT v1.pptx
+++ b/_implementation-notes/evening-series/FotH Evening Session 20 Slides DRAFT v1.pptx
@@ -1751,38 +1751,37 @@
           <a:lstStyle/>
           <a:p>
             <a:r>
-              <a:rPr lang="en-US" sz="1200"/>
               <a:t>S20 · 8:28–8:30 · LEAD: CONTAINER HOLDER CIRCLE</a:t>
             </a:r>
           </a:p>
           <a:p>
             <a:r>
-              <a:rPr lang="en-US" sz="1200"/>
               <a:t>BEATS:</a:t>
             </a:r>
           </a:p>
           <a:p>
             <a:r>
-              <a:rPr lang="en-US" sz="1200"/>
               <a:t>1. Practice, two small pieces: the survey home and back; both mercy cards found at home and shown to one family member.</a:t>
             </a:r>
           </a:p>
           <a:p>
             <a:r>
-              <a:rPr lang="en-US" sz="1200"/>
               <a:t>2. One-sentence summary: the dark stretch is not a verdict; the ache is the evidence He has not gone; the door is not locked and the light is on. This room now knows that — rooms that do are where people come home.</a:t>
             </a:r>
           </a:p>
           <a:p>
             <a:r>
-              <a:rPr lang="en-US" sz="1200"/>
               <a:t>3. Name the two nights ahead: Week 21 sends the families — bring everyone; Week 22 commissions these Companions.</a:t>
             </a:r>
           </a:p>
           <a:p>
             <a:r>
-              <a:rPr lang="en-US" sz="1200"/>
               <a:t>4. Standard closing protocol, then the Aaronic blessing, hands up. Go gently.</a:t>
+            </a:r>
+          </a:p>
+          <a:p>
+            <a:r>
+              <a:t>BLESSINGS: eyes on the person, not the screen — nothing to read; say what is on your heart for them, specific and short.</a:t>
             </a:r>
           </a:p>
         </p:txBody>
@@ -6481,7 +6480,7 @@
                 </a:solidFill>
                 <a:latin typeface="Calibri"/>
               </a:rPr>
-              <a:t>Blessings — specific, witnessed, short</a:t>
+              <a:t>Blessings — eyes on the person, not the screen: say what is on your heart for them. Specific, witnessed, short</a:t>
             </a:r>
           </a:p>
           <a:p>

--- a/_implementation-notes/evening-series/FotH Evening Session 20 Slides DRAFT v1.pptx
+++ b/_implementation-notes/evening-series/FotH Evening Session 20 Slides DRAFT v1.pptx
@@ -5246,7 +5246,7 @@
           <a:p>
             <a:pPr algn="r"/>
             <a:r>
-              <a:t>291</a:t>
+              <a:t>292</a:t>
             </a:r>
             <a:endParaRPr sz="1000" b="1">
               <a:solidFill>
@@ -5493,7 +5493,7 @@
           <a:p>
             <a:pPr algn="r"/>
             <a:r>
-              <a:t>292</a:t>
+              <a:t>293</a:t>
             </a:r>
             <a:endParaRPr sz="1000" b="1">
               <a:solidFill>
@@ -5685,7 +5685,7 @@
           <a:p>
             <a:pPr algn="r"/>
             <a:r>
-              <a:t>293</a:t>
+              <a:t>294</a:t>
             </a:r>
             <a:endParaRPr sz="1000" b="1">
               <a:solidFill>
@@ -5877,7 +5877,7 @@
           <a:p>
             <a:pPr algn="r"/>
             <a:r>
-              <a:t>294</a:t>
+              <a:t>295</a:t>
             </a:r>
             <a:endParaRPr sz="1000" b="1">
               <a:solidFill>
@@ -6174,7 +6174,7 @@
           <a:p>
             <a:pPr algn="r"/>
             <a:r>
-              <a:t>295</a:t>
+              <a:t>296</a:t>
             </a:r>
             <a:endParaRPr sz="1000" b="1">
               <a:solidFill>
@@ -6619,7 +6619,7 @@
           <a:p>
             <a:pPr algn="r"/>
             <a:r>
-              <a:t>296</a:t>
+              <a:t>297</a:t>
             </a:r>
             <a:endParaRPr sz="1000" b="1">
               <a:solidFill>
@@ -6868,7 +6868,7 @@
           <a:p>
             <a:pPr algn="r"/>
             <a:r>
-              <a:t>283</a:t>
+              <a:t>284</a:t>
             </a:r>
             <a:endParaRPr sz="1000" b="1">
               <a:solidFill>
@@ -7049,7 +7049,7 @@
           <a:p>
             <a:pPr algn="r"/>
             <a:r>
-              <a:t>284</a:t>
+              <a:t>285</a:t>
             </a:r>
             <a:endParaRPr sz="1000" b="1">
               <a:solidFill>
@@ -7463,7 +7463,7 @@
           <a:p>
             <a:pPr algn="r"/>
             <a:r>
-              <a:t>285</a:t>
+              <a:t>286</a:t>
             </a:r>
             <a:endParaRPr sz="1000" b="1">
               <a:solidFill>
@@ -7846,7 +7846,7 @@
           <a:p>
             <a:pPr algn="r"/>
             <a:r>
-              <a:t>286</a:t>
+              <a:t>287</a:t>
             </a:r>
             <a:endParaRPr sz="1000" b="1">
               <a:solidFill>
@@ -8198,7 +8198,7 @@
           <a:p>
             <a:pPr algn="r"/>
             <a:r>
-              <a:t>287</a:t>
+              <a:t>288</a:t>
             </a:r>
             <a:endParaRPr sz="1000" b="1">
               <a:solidFill>
@@ -8575,7 +8575,7 @@
           <a:p>
             <a:pPr algn="r"/>
             <a:r>
-              <a:t>288</a:t>
+              <a:t>289</a:t>
             </a:r>
             <a:endParaRPr sz="1000" b="1">
               <a:solidFill>
@@ -8968,7 +8968,7 @@
           <a:p>
             <a:pPr algn="r"/>
             <a:r>
-              <a:t>289</a:t>
+              <a:t>290</a:t>
             </a:r>
             <a:endParaRPr sz="1000" b="1">
               <a:solidFill>
@@ -9265,7 +9265,7 @@
           <a:p>
             <a:pPr algn="r"/>
             <a:r>
-              <a:t>290</a:t>
+              <a:t>291</a:t>
             </a:r>
             <a:endParaRPr sz="1000" b="1">
               <a:solidFill>

--- a/_implementation-notes/evening-series/FotH Evening Session 20 Slides DRAFT v1.pptx
+++ b/_implementation-notes/evening-series/FotH Evening Session 20 Slides DRAFT v1.pptx
@@ -785,7 +785,7 @@
           <a:lstStyle/>
           <a:p>
             <a:r>
-              <a:t>S20 · WELCOME · LEAD: CONTAINER HOLDER · GROUNDING — every session opens on this map</a:t>
+              <a:t>E15 · WELCOME · LEAD: CONTAINER HOLDER · GROUNDING — every session opens on this map</a:t>
             </a:r>
           </a:p>
           <a:p>
@@ -795,7 +795,7 @@
           </a:p>
           <a:p>
             <a:r>
-              <a:t>1. Locate tonight on the map, plainly: Session 20 walks the whole map — all four Connects, consolidated for the road. Each connection makes the next one real (Matt. 22:37–40).</a:t>
+              <a:t>1. Locate tonight on the map, plainly: Evening 15 walks the whole map — all four Connects, consolidated for the road. Each connection makes the next one real (Matt. 22:37–40).</a:t>
             </a:r>
           </a:p>
           <a:p>
@@ -856,7 +856,7 @@
           <a:lstStyle/>
           <a:p>
             <a:r>
-              <a:t>S20 · COMMISSIONING · LEAD: CONTENT PRESENTER</a:t>
+              <a:t>E15 · COMMISSIONING · LEAD: CONTENT PRESENTER</a:t>
             </a:r>
           </a:p>
           <a:p>
@@ -927,7 +927,7 @@
           <a:lstStyle/>
           <a:p>
             <a:r>
-              <a:t>S20 · COMMISSIONING · LEAD: CONTENT PRESENTER</a:t>
+              <a:t>E15 · COMMISSIONING · LEAD: CONTENT PRESENTER</a:t>
             </a:r>
           </a:p>
           <a:p>
@@ -993,13 +993,11 @@
           <a:lstStyle/>
           <a:p>
             <a:r>
-              <a:rPr lang="en-US" sz="1200"/>
-              <a:t>S20 · pre-session · DIVIDER</a:t>
-            </a:r>
-          </a:p>
-          <a:p>
-            <a:r>
-              <a:rPr lang="en-US" sz="1200"/>
+              <a:t>E15 · pre-session · DIVIDER</a:t>
+            </a:r>
+          </a:p>
+          <a:p>
+            <a:r>
               <a:t>On screen through dinner and as the circle forms. Greet at the door — the slide holds the room. Journals spotted at the door — quiet paper to anyone without one, no fuss, no spotlight. Folders each hold a fresh Signs Card and Path Home Card; survey stack and return bin visible by the door. Doors close at 7:00.</a:t>
             </a:r>
           </a:p>
@@ -1046,37 +1044,31 @@
           <a:lstStyle/>
           <a:p>
             <a:r>
-              <a:rPr lang="en-US" sz="1200"/>
-              <a:t>S20 · 7:00–8:30 · LEAD: BOTH LEADERS CIRCLE</a:t>
-            </a:r>
-          </a:p>
-          <a:p>
-            <a:r>
-              <a:rPr lang="en-US" sz="1200"/>
+              <a:t>E15 · 7:00–8:30 · LEAD: BOTH LEADERS CIRCLE</a:t>
+            </a:r>
+          </a:p>
+          <a:p>
+            <a:r>
               <a:t>BEATS:</a:t>
             </a:r>
           </a:p>
           <a:p>
             <a:r>
-              <a:rPr lang="en-US" sz="1200"/>
               <a:t>1. Frame: nothing new is asked of the room today — it receives. The seniors teach the year's weightiest pastoral equipment (their final rep before commissioning); then the journals walk the year back; then testimonies are gathered for the two sendings.</a:t>
             </a:r>
           </a:p>
           <a:p>
             <a:r>
-              <a:rPr lang="en-US" sz="1200"/>
               <a:t>2. Shape: open, why-today, Signs Card (CiF), Path Home Card (CiF), journal review, pairs for one sentence and the gathering, survey, feedback, close.</a:t>
             </a:r>
           </a:p>
           <a:p>
             <a:r>
-              <a:rPr lang="en-US" sz="1200"/>
               <a:t>3. The whole team's job all night: hold the floor steady under the teaching seniors.</a:t>
             </a:r>
           </a:p>
           <a:p>
             <a:r>
-              <a:rPr lang="en-US" sz="1200"/>
               <a:t>GUARD: The dry-season teaching will describe somebody's current life — the adults watch faces; nobody is looked at or asked; the follow-up is offline within 48 hours. Section 6 protocols stand.</a:t>
             </a:r>
           </a:p>
@@ -1123,7 +1115,7 @@
           <a:lstStyle/>
           <a:p>
             <a:r>
-              <a:t>S20 · 7:00–7:08 · LEAD: CONTAINER HOLDER CIRCLE</a:t>
+              <a:t>E15 · 7:00–7:08 · LEAD: CONTAINER HOLDER CIRCLE</a:t>
             </a:r>
           </a:p>
           <a:p>
@@ -1143,7 +1135,7 @@
           </a:p>
           <a:p>
             <a:r>
-              <a:t>3. Resist adding a welcome on top of the senior's welcome — this is one of the last container reps before Week 22 asks for it in public.</a:t>
+              <a:t>3. Resist adding a welcome on top of the senior's welcome — this is one of the last container reps before Evening 17 asks for it in public.</a:t>
             </a:r>
           </a:p>
           <a:p>
@@ -1194,43 +1186,36 @@
           <a:lstStyle/>
           <a:p>
             <a:r>
-              <a:rPr lang="en-US" sz="1200"/>
-              <a:t>S20 · 7:25–7:31 · LEAD: CONTENT PRESENTER CIRCLE</a:t>
-            </a:r>
-          </a:p>
-          <a:p>
-            <a:r>
-              <a:rPr lang="en-US" sz="1200"/>
+              <a:t>E15 · 7:25–7:31 · LEAD: CONTENT PRESENTER CIRCLE</a:t>
+            </a:r>
+          </a:p>
+          <a:p>
+            <a:r>
               <a:t>BEATS:</a:t>
             </a:r>
           </a:p>
           <a:p>
             <a:r>
-              <a:rPr lang="en-US" sz="1200"/>
               <a:t>1. Name the threshold honestly: in two weeks the room stops meeting; on the other side of the sending is a summer with no evenings — and someday a season where the practices go gray and a voice misdiagnoses it.</a:t>
             </a:r>
           </a:p>
           <a:p>
             <a:r>
-              <a:rPr lang="en-US" sz="1200"/>
               <a:t>2. Land the key phrase: we hand out this equipment BEFORE anyone needs it — it gives the person currently dry cover; everyone receives, no one is looked at.</a:t>
             </a:r>
           </a:p>
           <a:p>
             <a:r>
-              <a:rPr lang="en-US" sz="1200"/>
               <a:t>3. Read Isaiah 50:10 slowly from the physical Bible — fearing, obeying, AND walking in darkness, all at once; then step back. Do not preach it.</a:t>
             </a:r>
           </a:p>
           <a:p>
             <a:r>
-              <a:rPr lang="en-US" sz="1200"/>
               <a:t>4. Introduce the teachers by name and hand them the room.</a:t>
             </a:r>
           </a:p>
           <a:p>
             <a:r>
-              <a:rPr lang="en-US" sz="1200"/>
               <a:t>GUARD: Seven minutes, no more — the night belongs to the seniors.</a:t>
             </a:r>
           </a:p>
@@ -1277,37 +1262,31 @@
           <a:lstStyle/>
           <a:p>
             <a:r>
-              <a:rPr lang="en-US" sz="1200"/>
-              <a:t>S20 · 7:31–7:46 · LEAD: CONTENT PRESENTER CIRCLE</a:t>
-            </a:r>
-          </a:p>
-          <a:p>
-            <a:r>
-              <a:rPr lang="en-US" sz="1200"/>
+              <a:t>E15 · 7:31–7:46 · LEAD: CONTENT PRESENTER CIRCLE</a:t>
+            </a:r>
+          </a:p>
+          <a:p>
+            <a:r>
               <a:t>BEATS:</a:t>
             </a:r>
           </a:p>
           <a:p>
             <a:r>
-              <a:rPr lang="en-US" sz="1200"/>
               <a:t>1. CiF 1 teaches standing, card as a net, six numbered points: why the card exists; the tide; the sorting question written LARGE (Which way does the desire point?); the four columns ~1 min each; cases 3 and 4 — opposite motions, never decide alone; the four rules and the carry-home sentence (the ache is the evidence He has not gone).</a:t>
             </a:r>
           </a:p>
           <a:p>
             <a:r>
-              <a:rPr lang="en-US" sz="1200"/>
               <a:t>2. From the floor: hold steady and stay out of the teaching.</a:t>
             </a:r>
           </a:p>
           <a:p>
             <a:r>
-              <a:rPr lang="en-US" sz="1200"/>
               <a:t>CUES: The named adult catch sits in the senior's sight line — close enough to step in inside three seconds, never beside them. Freeze-recovery: the catch picks up at the next numbered point and hands back the moment the senior reaches for it. A stumble is never the story of the night.</a:t>
             </a:r>
           </a:p>
           <a:p>
             <a:r>
-              <a:rPr lang="en-US" sz="1200"/>
               <a:t>GUARD: If the teaching visibly lands on someone, a SECOND adult (not the catch) moves quietly to sit beside them; the teaching continues; the senior never holds the person.</a:t>
             </a:r>
           </a:p>
@@ -1354,37 +1333,31 @@
           <a:lstStyle/>
           <a:p>
             <a:r>
-              <a:rPr lang="en-US" sz="1200"/>
-              <a:t>S20 · 7:46–7:55 · LEAD: CONTENT PRESENTER CIRCLE</a:t>
-            </a:r>
-          </a:p>
-          <a:p>
-            <a:r>
-              <a:rPr lang="en-US" sz="1200"/>
+              <a:t>E15 · 7:46–7:55 · LEAD: CONTENT PRESENTER CIRCLE</a:t>
+            </a:r>
+          </a:p>
+          <a:p>
+            <a:r>
               <a:t>BEATS:</a:t>
             </a:r>
           </a:p>
           <a:p>
             <a:r>
-              <a:rPr lang="en-US" sz="1200"/>
               <a:t>1. CiF 2 teaches with their own named catch, five points: why the card exists; the five steps; Luke 15:20 read exactly — the father runs; both sides of the door (how to return AND how to receive a returner); the witnessed filing.</a:t>
             </a:r>
           </a:p>
           <a:p>
             <a:r>
-              <a:rPr lang="en-US" sz="1200"/>
               <a:t>2. The filing is a real moment, not a logistic — ten full seconds of silence; let the room hear the folders close: the door is not locked; the light is on.</a:t>
             </a:r>
           </a:p>
           <a:p>
             <a:r>
-              <a:rPr lang="en-US" sz="1200"/>
               <a:t>CUES: Same catch and freeze-recovery as the Signs block — pick up at the next numbered point, hand back when the senior reaches for it; a stumble is never the story of the night.</a:t>
             </a:r>
           </a:p>
           <a:p>
             <a:r>
-              <a:rPr lang="en-US" sz="1200"/>
               <a:t>GUARD: An adult moves to sit beside anyone the teaching lands on; the teaching continues; the senior never holds the person. Section 6 stands.</a:t>
             </a:r>
           </a:p>
@@ -1431,43 +1404,36 @@
           <a:lstStyle/>
           <a:p>
             <a:r>
-              <a:rPr lang="en-US" sz="1200"/>
-              <a:t>S20 · 7:55–8:08 · LEAD: CONTENT PRESENTER · QUIET INDIVIDUAL</a:t>
-            </a:r>
-          </a:p>
-          <a:p>
-            <a:r>
-              <a:rPr lang="en-US" sz="1200"/>
+              <a:t>E15 · 7:55–8:08 · LEAD: CONTENT PRESENTER · QUIET INDIVIDUAL</a:t>
+            </a:r>
+          </a:p>
+          <a:p>
+            <a:r>
               <a:t>BEATS:</a:t>
             </a:r>
           </a:p>
           <a:p>
             <a:r>
-              <a:rPr lang="en-US" sz="1200"/>
               <a:t>1. Uncover the three prompts on the board: Where did I begin? / Where did He meet me? / What do I not want to lose?</a:t>
             </a:r>
           </a:p>
           <a:p>
             <a:r>
-              <a:rPr lang="en-US" sz="1200"/>
               <a:t>2. Send them to page one first — the question they wrote on night one — then forward through the year, folding corners at the pages where something happened.</a:t>
             </a:r>
           </a:p>
           <a:p>
             <a:r>
-              <a:rPr lang="en-US" sz="1200"/>
               <a:t>3. Then 12–15 genuinely quiet minutes — no music, no walking commentary; Companions visibly read their own journals; every adult walks the same road.</a:t>
             </a:r>
           </a:p>
           <a:p>
             <a:r>
-              <a:rPr lang="en-US" sz="1200"/>
               <a:t>4. Two-minute warning, softly: find your one sentence — you will share exactly one in your pair, nothing more.</a:t>
             </a:r>
           </a:p>
           <a:p>
             <a:r>
-              <a:rPr lang="en-US" sz="1200"/>
               <a:t>GUARD: A missing journal gets paper and memory, no fuss. Watch faces gently; approach mid-block only for real distress (Settle Protocol, quietly).</a:t>
             </a:r>
           </a:p>
@@ -1514,43 +1480,36 @@
           <a:lstStyle/>
           <a:p>
             <a:r>
-              <a:rPr lang="en-US" sz="1200"/>
-              <a:t>S20 · 8:08–8:18 · LEAD: CONTENT PRESENTER · FAMILY PAIRS</a:t>
-            </a:r>
-          </a:p>
-          <a:p>
-            <a:r>
-              <a:rPr lang="en-US" sz="1200"/>
+              <a:t>E15 · 8:08–8:18 · LEAD: CONTENT PRESENTER · FAMILY PAIRS</a:t>
+            </a:r>
+          </a:p>
+          <a:p>
+            <a:r>
               <a:t>BEATS:</a:t>
             </a:r>
           </a:p>
           <a:p>
             <a:r>
-              <a:rPr lang="en-US" sz="1200"/>
               <a:t>1. One-sentence round (~8 min): one sentence each from the review — no story around it; the arranged parent opens (Run Card), never a cold call on a teen; a pass gets the same nod a sentence gets.</a:t>
             </a:r>
           </a:p>
           <a:p>
             <a:r>
-              <a:rPr lang="en-US" sz="1200"/>
               <a:t>2. The gathering (~8 min): genuinely optional — willing sentences written on a card VERBATIM, read back for the owner's nod, marked signed or anon.</a:t>
             </a:r>
           </a:p>
           <a:p>
             <a:r>
-              <a:rPr lang="en-US" sz="1200"/>
               <a:t>3. Cards go into the Companion's pocket, not a pile — pastoral material from that moment on.</a:t>
             </a:r>
           </a:p>
           <a:p>
             <a:r>
-              <a:rPr lang="en-US" sz="1200"/>
               <a:t>CUES: An empty card is a complete answer; decliners leave zero footprint — no card, no list, no follow-up ask. If a teen glances at a parent first, add lightly: families don't have to match.</a:t>
             </a:r>
           </a:p>
           <a:p>
             <a:r>
-              <a:rPr lang="en-US" sz="1200"/>
               <a:t>GUARD: A sentence with something heavy inside gets received and blessed, never written on a card — hand it to the adult team after the pair closes. A sentence naming another person needs that person's veto today.</a:t>
             </a:r>
           </a:p>
@@ -1597,37 +1556,31 @@
           <a:lstStyle/>
           <a:p>
             <a:r>
-              <a:rPr lang="en-US" sz="1200"/>
-              <a:t>S20 · 8:18–8:20 · LEAD: CONTENT PRESENTER CIRCLE</a:t>
-            </a:r>
-          </a:p>
-          <a:p>
-            <a:r>
-              <a:rPr lang="en-US" sz="1200"/>
+              <a:t>E15 · 8:18–8:20 · LEAD: CONTENT PRESENTER CIRCLE</a:t>
+            </a:r>
+          </a:p>
+          <a:p>
+            <a:r>
               <a:t>BEATS:</a:t>
             </a:r>
           </a:p>
           <a:p>
             <a:r>
-              <a:rPr lang="en-US" sz="1200"/>
               <a:t>1. Co-Companion (Parent) frames H20.1 WITHOUT apology: this is a pilot's first year anywhere; honest answers — especially the critical ones — are a gift to families they will never meet.</a:t>
             </a:r>
           </a:p>
           <a:p>
             <a:r>
-              <a:rPr lang="en-US" sz="1200"/>
               <a:t>2. The covenant holds: no scores, no grades, mirrors not levers; signed or anonymous.</a:t>
             </a:r>
           </a:p>
           <a:p>
             <a:r>
-              <a:rPr lang="en-US" sz="1200"/>
-              <a:t>3. Home today, one per person — parents and teens each their own; back in the bin at the Week 21 door.</a:t>
-            </a:r>
-          </a:p>
-          <a:p>
-            <a:r>
-              <a:rPr lang="en-US" sz="1200"/>
+              <a:t>3. Home today, one per person — parents and teens each their own; back in the bin at the Evening 16 door.</a:t>
+            </a:r>
+          </a:p>
+          <a:p>
+            <a:r>
               <a:t>CUES: An apologized-for instrument returns half-empty — warm and unapologetic is the register.</a:t>
             </a:r>
           </a:p>
@@ -1674,37 +1627,31 @@
           <a:lstStyle/>
           <a:p>
             <a:r>
-              <a:rPr lang="en-US" sz="1200"/>
-              <a:t>S20 · 8:24–8:28 · LEAD: BOTH LEADERS CIRCLE</a:t>
-            </a:r>
-          </a:p>
-          <a:p>
-            <a:r>
-              <a:rPr lang="en-US" sz="1200"/>
+              <a:t>E15 · 8:24–8:28 · LEAD: BOTH LEADERS CIRCLE</a:t>
+            </a:r>
+          </a:p>
+          <a:p>
+            <a:r>
               <a:t>BEATS:</a:t>
             </a:r>
           </a:p>
           <a:p>
             <a:r>
-              <a:rPr lang="en-US" sz="1200"/>
               <a:t>1. Frame it: all year the journal has ended with 'if you were to teach this, what would you tell them?' — today the seniors stopped answering on paper and taught. They go first, together.</a:t>
             </a:r>
           </a:p>
           <a:p>
             <a:r>
-              <a:rPr lang="en-US" sz="1200"/>
               <a:t>2. The seniors assess their own rep honestly, including anything that wobbled; then the room, two or three voices; received undefended — 'thank you' is the whole response.</a:t>
             </a:r>
           </a:p>
           <a:p>
             <a:r>
-              <a:rPr lang="en-US" sz="1200"/>
               <a:t>3. Close the round with one specific witnessed sentence about what the room received because its own seniors carried the teaching.</a:t>
             </a:r>
           </a:p>
           <a:p>
             <a:r>
-              <a:rPr lang="en-US" sz="1200"/>
               <a:t>CUES: If a freeze happened and the catch stepped in, honor it here in one sentence — the recovery was the leadership — never manage it away.</a:t>
             </a:r>
           </a:p>
@@ -1751,7 +1698,7 @@
           <a:lstStyle/>
           <a:p>
             <a:r>
-              <a:t>S20 · 8:28–8:30 · LEAD: CONTAINER HOLDER CIRCLE</a:t>
+              <a:t>E15 · 8:28–8:30 · LEAD: CONTAINER HOLDER CIRCLE</a:t>
             </a:r>
           </a:p>
           <a:p>
@@ -1771,7 +1718,7 @@
           </a:p>
           <a:p>
             <a:r>
-              <a:t>3. Name the two nights ahead: Week 21 sends the families — bring everyone; Week 22 commissions these Companions.</a:t>
+              <a:t>3. Name the two nights ahead: Evening 16 sends the families — bring everyone; Evening 17 commissions these Companions.</a:t>
             </a:r>
           </a:p>
           <a:p>
@@ -5169,7 +5116,7 @@
                 </a:solidFill>
                 <a:latin typeface="Calibri"/>
               </a:rPr>
-              <a:t>Then one more invitation, genuinely optional: your sentence, read aloud at the sendings — Week 21 or Week 22</a:t>
+              <a:t>Then one more invitation, genuinely optional: your sentence, read aloud at the sendings — Evening 16 or Evening 17</a:t>
             </a:r>
           </a:p>
           <a:p>
@@ -5391,7 +5338,7 @@
                 </a:solidFill>
                 <a:latin typeface="Calibri"/>
               </a:rPr>
-              <a:t>The bookend to orientation’s Pre-Series Survey. Home tonight; back in the bin at the Week 21 door.</a:t>
+              <a:t>The bookend to orientation’s Pre-Series Survey. Home tonight; back in the bin at the Evening 16 door.</a:t>
             </a:r>
           </a:p>
           <a:p>
@@ -6770,7 +6717,7 @@
                 </a:solidFill>
                 <a:latin typeface="Calibri"/>
               </a:rPr>
-              <a:t>SESSION 20</a:t>
+              <a:t>EVENING 15</a:t>
             </a:r>
           </a:p>
           <a:p>
@@ -7004,7 +6951,7 @@
                 </a:solidFill>
                 <a:latin typeface="Calibri"/>
               </a:rPr>
-              <a:t>Session 20 walks the whole map — </a:t>
+              <a:t>Evening 15 walks the whole map — </a:t>
             </a:r>
             <a:r>
               <a:rPr sz="1800" b="1">
@@ -7188,7 +7135,7 @@
                 </a:solidFill>
                 <a:latin typeface="Cambria"/>
               </a:rPr>
-              <a:t>Session 20 — Tonight’s Road</a:t>
+              <a:t>Evening 15 — Tonight’s Road</a:t>
             </a:r>
           </a:p>
         </p:txBody>

--- a/_implementation-notes/evening-series/FotH Evening Session 20 Slides DRAFT v1.pptx
+++ b/_implementation-notes/evening-series/FotH Evening Session 20 Slides DRAFT v1.pptx
@@ -1290,6 +1290,11 @@
               <a:t>GUARD: If the teaching visibly lands on someone, a SECOND adult (not the catch) moves quietly to sit beside them; the teaching continues; the senior never holds the person.</a:t>
             </a:r>
           </a:p>
+          <a:p>
+            <a:r>
+              <a:t>PLANNING LAB (John's word, 13 October): the mercy-card teaching is the lab's set piece before this evening. Each Companion-in-Formation teaches their card in full, out loud, to John and their named catch, with the freeze-recovery practised once. This replaces the school series' Week 19 rehearsal in pairs; do it well.</a:t>
+            </a:r>
+          </a:p>
         </p:txBody>
       </p:sp>
     </p:spTree>
@@ -1359,6 +1364,11 @@
           <a:p>
             <a:r>
               <a:t>GUARD: An adult moves to sit beside anyone the teaching lands on; the teaching continues; the senior never holds the person. Section 6 stands.</a:t>
+            </a:r>
+          </a:p>
+          <a:p>
+            <a:r>
+              <a:t>PLANNING LAB (John's word, 13 October): the mercy-card teaching is the lab's set piece before this evening. Each Companion-in-Formation teaches their card in full, out loud, to John and their named catch, with the freeze-recovery practised once. This replaces the school series' Week 19 rehearsal in pairs; do it well.</a:t>
             </a:r>
           </a:p>
         </p:txBody>

--- a/_implementation-notes/evening-series/FotH Evening Session 20 Slides DRAFT v1.pptx
+++ b/_implementation-notes/evening-series/FotH Evening Session 20 Slides DRAFT v1.pptx
@@ -5203,7 +5203,7 @@
           <a:p>
             <a:pPr algn="r"/>
             <a:r>
-              <a:t>292</a:t>
+              <a:t>293</a:t>
             </a:r>
             <a:endParaRPr sz="1000" b="1">
               <a:solidFill>
@@ -5450,7 +5450,7 @@
           <a:p>
             <a:pPr algn="r"/>
             <a:r>
-              <a:t>293</a:t>
+              <a:t>294</a:t>
             </a:r>
             <a:endParaRPr sz="1000" b="1">
               <a:solidFill>
@@ -5642,7 +5642,7 @@
           <a:p>
             <a:pPr algn="r"/>
             <a:r>
-              <a:t>294</a:t>
+              <a:t>295</a:t>
             </a:r>
             <a:endParaRPr sz="1000" b="1">
               <a:solidFill>
@@ -5834,7 +5834,7 @@
           <a:p>
             <a:pPr algn="r"/>
             <a:r>
-              <a:t>295</a:t>
+              <a:t>296</a:t>
             </a:r>
             <a:endParaRPr sz="1000" b="1">
               <a:solidFill>
@@ -6131,7 +6131,7 @@
           <a:p>
             <a:pPr algn="r"/>
             <a:r>
-              <a:t>296</a:t>
+              <a:t>297</a:t>
             </a:r>
             <a:endParaRPr sz="1000" b="1">
               <a:solidFill>
@@ -6576,7 +6576,7 @@
           <a:p>
             <a:pPr algn="r"/>
             <a:r>
-              <a:t>297</a:t>
+              <a:t>298</a:t>
             </a:r>
             <a:endParaRPr sz="1000" b="1">
               <a:solidFill>
@@ -6825,7 +6825,7 @@
           <a:p>
             <a:pPr algn="r"/>
             <a:r>
-              <a:t>284</a:t>
+              <a:t>285</a:t>
             </a:r>
             <a:endParaRPr sz="1000" b="1">
               <a:solidFill>
@@ -7006,7 +7006,7 @@
           <a:p>
             <a:pPr algn="r"/>
             <a:r>
-              <a:t>285</a:t>
+              <a:t>286</a:t>
             </a:r>
             <a:endParaRPr sz="1000" b="1">
               <a:solidFill>
@@ -7420,7 +7420,7 @@
           <a:p>
             <a:pPr algn="r"/>
             <a:r>
-              <a:t>286</a:t>
+              <a:t>287</a:t>
             </a:r>
             <a:endParaRPr sz="1000" b="1">
               <a:solidFill>
@@ -7803,7 +7803,7 @@
           <a:p>
             <a:pPr algn="r"/>
             <a:r>
-              <a:t>287</a:t>
+              <a:t>288</a:t>
             </a:r>
             <a:endParaRPr sz="1000" b="1">
               <a:solidFill>
@@ -8155,7 +8155,7 @@
           <a:p>
             <a:pPr algn="r"/>
             <a:r>
-              <a:t>288</a:t>
+              <a:t>289</a:t>
             </a:r>
             <a:endParaRPr sz="1000" b="1">
               <a:solidFill>
@@ -8532,7 +8532,7 @@
           <a:p>
             <a:pPr algn="r"/>
             <a:r>
-              <a:t>289</a:t>
+              <a:t>290</a:t>
             </a:r>
             <a:endParaRPr sz="1000" b="1">
               <a:solidFill>
@@ -8925,7 +8925,7 @@
           <a:p>
             <a:pPr algn="r"/>
             <a:r>
-              <a:t>290</a:t>
+              <a:t>291</a:t>
             </a:r>
             <a:endParaRPr sz="1000" b="1">
               <a:solidFill>
@@ -9222,7 +9222,7 @@
           <a:p>
             <a:pPr algn="r"/>
             <a:r>
-              <a:t>291</a:t>
+              <a:t>292</a:t>
             </a:r>
             <a:endParaRPr sz="1000" b="1">
               <a:solidFill>

--- a/_implementation-notes/evening-series/FotH Evening Session 20 Slides DRAFT v1.pptx
+++ b/_implementation-notes/evening-series/FotH Evening Session 20 Slides DRAFT v1.pptx
@@ -1196,7 +1196,7 @@
           </a:p>
           <a:p>
             <a:r>
-              <a:t>1. Name the threshold honestly: in two weeks the room stops meeting; on the other side of the sending is a summer with no evenings — and someday a season where the practices go gray and a voice misdiagnoses it.</a:t>
+              <a:t>1. Name the threshold honestly: in two weeks the room stops meeting; on the other side of the sending is a stretch with no evenings — and someday a season where the practices go gray and a voice misdiagnoses it.</a:t>
             </a:r>
           </a:p>
           <a:p>
@@ -7948,7 +7948,7 @@
                 </a:solidFill>
                 <a:latin typeface="Calibri"/>
               </a:rPr>
-              <a:t>In two weeks this room stops meeting — the next two Wednesdays are sendings, not endings. On the other side: a summer with no Wednesday in it.</a:t>
+              <a:t>In two weeks this room stops meeting — the next two evenings are sendings, not endings. On the other side: a stretch with no evenings in it.</a:t>
             </a:r>
           </a:p>
           <a:p>
@@ -7973,7 +7973,7 @@
                 </a:solidFill>
                 <a:latin typeface="Calibri"/>
               </a:rPr>
-              <a:t>Somewhere out there — this summer, or in twenty years — every person in this room will hit a season where the practices go gray</a:t>
+              <a:t>Somewhere out there — this year, or in twenty years — every person in this room will hit a season where the practices go gray</a:t>
             </a:r>
           </a:p>
           <a:p>
